--- a/docs/04_주요클래스-함수-발표.pptx
+++ b/docs/04_주요클래스-함수-발표.pptx
@@ -25,9 +25,11 @@
     <p:sldId id="273" r:id="rId19"/>
     <p:sldId id="274" r:id="rId20"/>
     <p:sldId id="275" r:id="rId21"/>
+    <p:sldId id="276" r:id="rId22"/>
+    <p:sldId id="277" r:id="rId23"/>
   </p:sldIdLst>
   <p:notesMasterIdLst>
-    <p:notesMasterId r:id="rId22"/>
+    <p:notesMasterId r:id="rId24"/>
   </p:notesMasterIdLst>
   <p:sldSz cx="12192000" cy="6858000"/>
   <p:notesSz cx="6858000" cy="12192000"/>
@@ -126,14 +128,14 @@
   <p:extLst>
     <p:ext uri="{521415D9-36F7-43E2-AB2F-B90AF26B5E84}">
       <p14:sectionLst xmlns:p14="http://schemas.microsoft.com/office/powerpoint/2010/main">
-        <p14:section name="개요" id="{4f4b1d8c-8356-b9c5-8307-348fd3bd9d5f}">
+        <p14:section name="개요" id="{a15d5372-264c-fc8f-b974-c1205415609e}">
           <p14:sldIdLst>
             <p14:sldId id="256"/>
             <p14:sldId id="257"/>
             <p14:sldId id="258"/>
           </p14:sldIdLst>
         </p14:section>
-        <p14:section name="app-server.ftms" id="{ef04bd03-269a-41e2-bb9e-f313b93741a5}">
+        <p14:section name="app-server.ftms" id="{748b1861-0e38-a34e-2575-f02f0b8801f6}">
           <p14:sldIdLst>
             <p14:sldId id="259"/>
             <p14:sldId id="260"/>
@@ -146,20 +148,22 @@
             <p14:sldId id="267"/>
             <p14:sldId id="268"/>
             <p14:sldId id="269"/>
+            <p14:sldId id="270"/>
+            <p14:sldId id="271"/>
           </p14:sldIdLst>
         </p14:section>
-        <p14:section name="DxfBlazorViewer.Client" id="{ac99f2a5-9ba5-7d61-1d6a-1733b36722f9}">
+        <p14:section name="DxfBlazorViewer.Client" id="{ecd6649e-f02e-aab5-0f15-18e22325cece}">
           <p14:sldIdLst>
-            <p14:sldId id="270"/>
-            <p14:sldId id="271"/>
             <p14:sldId id="272"/>
             <p14:sldId id="273"/>
+            <p14:sldId id="274"/>
+            <p14:sldId id="275"/>
           </p14:sldIdLst>
         </p14:section>
-        <p14:section name="정리" id="{449ba32c-a699-2ac3-eafd-60efab03e83f}">
+        <p14:section name="정리" id="{086c2256-2fde-1939-a68b-63b010e2af4a}">
           <p14:sldIdLst>
-            <p14:sldId id="274"/>
-            <p14:sldId id="275"/>
+            <p14:sldId id="276"/>
+            <p14:sldId id="277"/>
           </p14:sldIdLst>
         </p14:section>
       </p14:sectionLst>
@@ -654,7 +658,7 @@
           <a:p>
             <a:r>
               <a:rPr lang="en-US" dirty="0"/>
-              <a:t>StateManager 는 싱글턴이면서 HostedService 로도 등록된, 시스템 상태의 중심입니다.</a:t>
+              <a:t/>
             </a:r>
             <a:endParaRPr lang="en-US" dirty="0"/>
           </a:p>
@@ -742,7 +746,7 @@
           <a:p>
             <a:r>
               <a:rPr lang="en-US" dirty="0"/>
-              <a:t/>
+              <a:t>StateManager 는 싱글턴이면서 HostedService 로도 등록된, 시스템 상태의 중심입니다.</a:t>
             </a:r>
             <a:endParaRPr lang="en-US" dirty="0"/>
           </a:p>
@@ -1006,7 +1010,7 @@
           <a:p>
             <a:r>
               <a:rPr lang="en-US" dirty="0"/>
-              <a:t/>
+              <a:t>Pipe 는 연결마다 바이트 흐름을, Channel 은 서버 전체에서 메시지 객체를 넘깁니다. Bounded 채널로 바꾸면 TCP 까지 배압이 전달됩니다.</a:t>
             </a:r>
             <a:endParaRPr lang="en-US" dirty="0"/>
           </a:p>
@@ -1270,7 +1274,7 @@
           <a:p>
             <a:r>
               <a:rPr lang="en-US" dirty="0"/>
-              <a:t>1~2초 폴링 코드에 중단점을 걸면 WASM 디버깅이 매우 느려집니다. Viewer 는 IAsyncDisposable 만 구현해 Dispose() 가 호출되지 않는 점도 주의합니다.</a:t>
+              <a:t/>
             </a:r>
             <a:endParaRPr lang="en-US" dirty="0"/>
           </a:p>
@@ -1446,7 +1450,7 @@
           <a:p>
             <a:r>
               <a:rPr lang="en-US" dirty="0"/>
-              <a:t/>
+              <a:t>1~2초 폴링 코드에 중단점을 걸면 WASM 디버깅이 매우 느려집니다. Viewer 는 IAsyncDisposable 만 구현해 Dispose() 가 호출되지 않는 점도 주의합니다.</a:t>
             </a:r>
             <a:endParaRPr lang="en-US" dirty="0"/>
           </a:p>
@@ -1664,6 +1668,182 @@
 </p:notes>
 </file>
 
+<file path=ppt/notesSlides/notesSlide21.xml><?xml version="1.0" encoding="utf-8"?>
+<p:notes xmlns:a="http://schemas.openxmlformats.org/drawingml/2006/main" xmlns:r="http://schemas.openxmlformats.org/officeDocument/2006/relationships" xmlns:p="http://schemas.openxmlformats.org/presentationml/2006/main">
+  <p:cSld>
+    <p:spTree>
+      <p:nvGrpSpPr>
+        <p:cNvPr id="1" name=""/>
+        <p:cNvGrpSpPr/>
+        <p:nvPr/>
+      </p:nvGrpSpPr>
+      <p:grpSpPr>
+        <a:xfrm>
+          <a:off x="0" y="0"/>
+          <a:ext cx="0" cy="0"/>
+          <a:chOff x="0" y="0"/>
+          <a:chExt cx="0" cy="0"/>
+        </a:xfrm>
+      </p:grpSpPr>
+      <p:sp>
+        <p:nvSpPr>
+          <p:cNvPr id="2" name="Slide Image Placeholder 1"/>
+          <p:cNvSpPr>
+            <a:spLocks noGrp="1" noRot="1" noChangeAspect="1"/>
+          </p:cNvSpPr>
+          <p:nvPr>
+            <p:ph type="sldImg"/>
+          </p:nvPr>
+        </p:nvSpPr>
+        <p:spPr/>
+      </p:sp>
+      <p:sp>
+        <p:nvSpPr>
+          <p:cNvPr id="3" name="Notes Placeholder 2"/>
+          <p:cNvSpPr>
+            <a:spLocks noGrp="1"/>
+          </p:cNvSpPr>
+          <p:nvPr>
+            <p:ph type="body" idx="1"/>
+          </p:nvPr>
+        </p:nvSpPr>
+        <p:spPr/>
+        <p:txBody>
+          <a:bodyPr/>
+          <a:lstStyle/>
+          <a:p>
+            <a:r>
+              <a:rPr lang="en-US" dirty="0"/>
+              <a:t/>
+            </a:r>
+            <a:endParaRPr lang="en-US" dirty="0"/>
+          </a:p>
+        </p:txBody>
+      </p:sp>
+      <p:sp>
+        <p:nvSpPr>
+          <p:cNvPr id="4" name="Slide Number Placeholder 3"/>
+          <p:cNvSpPr>
+            <a:spLocks noGrp="1"/>
+          </p:cNvSpPr>
+          <p:nvPr>
+            <p:ph type="sldNum" sz="quarter" idx="10"/>
+          </p:nvPr>
+        </p:nvSpPr>
+        <p:spPr/>
+        <p:txBody>
+          <a:bodyPr/>
+          <a:lstStyle/>
+          <a:p>
+            <a:fld id="{F7021451-1387-4CA6-816F-3879F97B5CBC}" type="slidenum">
+              <a:rPr lang="en-US"/>
+              <a:t>21</a:t>
+            </a:fld>
+            <a:endParaRPr lang="en-US"/>
+          </a:p>
+        </p:txBody>
+      </p:sp>
+    </p:spTree>
+    <p:extLst>
+      <p:ext uri="{BB962C8B-B14F-4D97-AF65-F5344CB8AC3E}">
+        <p14:creationId xmlns:p14="http://schemas.microsoft.com/office/powerpoint/2010/main" val="1024086991"/>
+      </p:ext>
+    </p:extLst>
+  </p:cSld>
+  <p:clrMapOvr>
+    <a:masterClrMapping/>
+  </p:clrMapOvr>
+</p:notes>
+</file>
+
+<file path=ppt/notesSlides/notesSlide22.xml><?xml version="1.0" encoding="utf-8"?>
+<p:notes xmlns:a="http://schemas.openxmlformats.org/drawingml/2006/main" xmlns:r="http://schemas.openxmlformats.org/officeDocument/2006/relationships" xmlns:p="http://schemas.openxmlformats.org/presentationml/2006/main">
+  <p:cSld>
+    <p:spTree>
+      <p:nvGrpSpPr>
+        <p:cNvPr id="1" name=""/>
+        <p:cNvGrpSpPr/>
+        <p:nvPr/>
+      </p:nvGrpSpPr>
+      <p:grpSpPr>
+        <a:xfrm>
+          <a:off x="0" y="0"/>
+          <a:ext cx="0" cy="0"/>
+          <a:chOff x="0" y="0"/>
+          <a:chExt cx="0" cy="0"/>
+        </a:xfrm>
+      </p:grpSpPr>
+      <p:sp>
+        <p:nvSpPr>
+          <p:cNvPr id="2" name="Slide Image Placeholder 1"/>
+          <p:cNvSpPr>
+            <a:spLocks noGrp="1" noRot="1" noChangeAspect="1"/>
+          </p:cNvSpPr>
+          <p:nvPr>
+            <p:ph type="sldImg"/>
+          </p:nvPr>
+        </p:nvSpPr>
+        <p:spPr/>
+      </p:sp>
+      <p:sp>
+        <p:nvSpPr>
+          <p:cNvPr id="3" name="Notes Placeholder 2"/>
+          <p:cNvSpPr>
+            <a:spLocks noGrp="1"/>
+          </p:cNvSpPr>
+          <p:nvPr>
+            <p:ph type="body" idx="1"/>
+          </p:nvPr>
+        </p:nvSpPr>
+        <p:spPr/>
+        <p:txBody>
+          <a:bodyPr/>
+          <a:lstStyle/>
+          <a:p>
+            <a:r>
+              <a:rPr lang="en-US" dirty="0"/>
+              <a:t/>
+            </a:r>
+            <a:endParaRPr lang="en-US" dirty="0"/>
+          </a:p>
+        </p:txBody>
+      </p:sp>
+      <p:sp>
+        <p:nvSpPr>
+          <p:cNvPr id="4" name="Slide Number Placeholder 3"/>
+          <p:cNvSpPr>
+            <a:spLocks noGrp="1"/>
+          </p:cNvSpPr>
+          <p:nvPr>
+            <p:ph type="sldNum" sz="quarter" idx="10"/>
+          </p:nvPr>
+        </p:nvSpPr>
+        <p:spPr/>
+        <p:txBody>
+          <a:bodyPr/>
+          <a:lstStyle/>
+          <a:p>
+            <a:fld id="{F7021451-1387-4CA6-816F-3879F97B5CBC}" type="slidenum">
+              <a:rPr lang="en-US"/>
+              <a:t>22</a:t>
+            </a:fld>
+            <a:endParaRPr lang="en-US"/>
+          </a:p>
+        </p:txBody>
+      </p:sp>
+    </p:spTree>
+    <p:extLst>
+      <p:ext uri="{BB962C8B-B14F-4D97-AF65-F5344CB8AC3E}">
+        <p14:creationId xmlns:p14="http://schemas.microsoft.com/office/powerpoint/2010/main" val="1024086991"/>
+      </p:ext>
+    </p:extLst>
+  </p:cSld>
+  <p:clrMapOvr>
+    <a:masterClrMapping/>
+  </p:clrMapOvr>
+</p:notes>
+</file>
+
 <file path=ppt/notesSlides/notesSlide3.xml><?xml version="1.0" encoding="utf-8"?>
 <p:notes xmlns:a="http://schemas.openxmlformats.org/drawingml/2006/main" xmlns:r="http://schemas.openxmlformats.org/officeDocument/2006/relationships" xmlns:p="http://schemas.openxmlformats.org/presentationml/2006/main">
   <p:cSld>
@@ -2238,7 +2418,7 @@
           <a:p>
             <a:r>
               <a:rPr lang="en-US" dirty="0"/>
-              <a:t/>
+              <a:t>Task.WhenAll 은 실행이 아니라 대기입니다. 포트 하나의 Start 실패는 로그만 남기고 서버는 계속 동작하므로 시작 로그에서 세 포트가 모두 열렸는지 확인합니다.</a:t>
             </a:r>
             <a:endParaRPr lang="en-US" dirty="0"/>
           </a:p>
@@ -3216,6 +3396,313 @@
                   <a:schemeClr val="tx2"/>
                 </a:solidFill>
               </a:rPr>
+              <a:t>Heartbeat 처리</a:t>
+            </a:r>
+            <a:endParaRPr lang="en-US" sz="3000" dirty="0"/>
+          </a:p>
+        </p:txBody>
+      </p:sp>
+      <p:sp>
+        <p:nvSpPr>
+          <p:cNvPr id="3" name="diagram-frame"/>
+          <p:cNvSpPr/>
+          <p:nvPr/>
+        </p:nvSpPr>
+        <p:spPr>
+          <a:xfrm>
+            <a:off x="457200" y="1143000"/>
+            <a:ext cx="7818120" cy="5120640"/>
+          </a:xfrm>
+          <a:prstGeom prst="roundRect">
+            <a:avLst>
+              <a:gd name="adj" fmla="val 1429"/>
+            </a:avLst>
+          </a:prstGeom>
+          <a:solidFill>
+            <a:srgbClr val="FFFFFF"/>
+          </a:solidFill>
+          <a:ln w="12700">
+            <a:solidFill>
+              <a:srgbClr val="CBD5D8"/>
+            </a:solidFill>
+            <a:prstDash val="solid"/>
+          </a:ln>
+        </p:spPr>
+      </p:sp>
+      <p:pic>
+        <p:nvPicPr>
+          <p:cNvPr id="4" name="Heartbeat 처리" descr="Heartbeat 처리">    </p:cNvPr>
+          <p:cNvPicPr>
+            <a:picLocks noChangeAspect="1"/>
+          </p:cNvPicPr>
+          <p:nvPr/>
+        </p:nvPicPr>
+        <p:blipFill>
+          <a:blip r:embed="rId1"/>
+          <a:stretch>
+            <a:fillRect/>
+          </a:stretch>
+        </p:blipFill>
+        <p:spPr>
+          <a:xfrm>
+            <a:off x="566928" y="1414728"/>
+            <a:ext cx="7598664" cy="4577183"/>
+          </a:xfrm>
+          <a:prstGeom prst="rect">
+            <a:avLst/>
+          </a:prstGeom>
+        </p:spPr>
+      </p:pic>
+      <p:sp>
+        <p:nvSpPr>
+          <p:cNvPr id="5" name="points-panel"/>
+          <p:cNvSpPr/>
+          <p:nvPr/>
+        </p:nvSpPr>
+        <p:spPr>
+          <a:xfrm>
+            <a:off x="8503920" y="1143000"/>
+            <a:ext cx="3246120" cy="5120640"/>
+          </a:xfrm>
+          <a:prstGeom prst="roundRect">
+            <a:avLst>
+              <a:gd name="adj" fmla="val 2254"/>
+            </a:avLst>
+          </a:prstGeom>
+          <a:solidFill>
+            <a:srgbClr val="E6F2EE"/>
+          </a:solidFill>
+          <a:ln w="12700">
+            <a:solidFill>
+              <a:srgbClr val="E6F2EE"/>
+            </a:solidFill>
+            <a:prstDash val="solid"/>
+          </a:ln>
+        </p:spPr>
+      </p:sp>
+      <p:sp>
+        <p:nvSpPr>
+          <p:cNvPr id="6" name="points-text"/>
+          <p:cNvSpPr txBox="1"/>
+          <p:nvPr/>
+        </p:nvSpPr>
+        <p:spPr>
+          <a:xfrm>
+            <a:off x="8732520" y="1325880"/>
+            <a:ext cx="2788920" cy="4754880"/>
+          </a:xfrm>
+          <a:prstGeom prst="rect">
+            <a:avLst/>
+          </a:prstGeom>
+          <a:noFill/>
+          <a:ln/>
+        </p:spPr>
+        <p:txBody>
+          <a:bodyPr wrap="square" rtlCol="0" anchor="t"/>
+          <a:lstStyle/>
+          <a:p>
+            <a:pPr indent="0" marL="0">
+              <a:spcAft>
+                <a:spcPts val="200"/>
+              </a:spcAft>
+              <a:buNone/>
+            </a:pPr>
+            <a:r>
+              <a:rPr lang="en-US" sz="1500" b="1" dirty="0">
+                <a:solidFill>
+                  <a:srgbClr val="0F6E5C"/>
+                </a:solidFill>
+              </a:rPr>
+              <a:t>상태 저장</a:t>
+            </a:r>
+            <a:endParaRPr lang="en-US" sz="1500" dirty="0"/>
+          </a:p>
+          <a:p>
+            <a:pPr indent="0" marL="0">
+              <a:spcAft>
+                <a:spcPts val="1000"/>
+              </a:spcAft>
+              <a:buNone/>
+            </a:pPr>
+            <a:r>
+              <a:rPr lang="en-US" sz="1300" dirty="0">
+                <a:solidFill>
+                  <a:srgbClr val="1B2A2F"/>
+                </a:solidFill>
+              </a:rPr>
+              <a:t>메모리에 덮어쓰고 10초마다 dock_message_events 에 기록</a:t>
+            </a:r>
+            <a:endParaRPr lang="en-US" sz="1500" dirty="0"/>
+          </a:p>
+          <a:p>
+            <a:pPr indent="0" marL="0">
+              <a:spcAft>
+                <a:spcPts val="200"/>
+              </a:spcAft>
+              <a:buNone/>
+            </a:pPr>
+            <a:r>
+              <a:rPr lang="en-US" sz="1500" b="1" dirty="0">
+                <a:solidFill>
+                  <a:srgbClr val="0F6E5C"/>
+                </a:solidFill>
+              </a:rPr>
+              <a:t>설정 내려주기</a:t>
+            </a:r>
+            <a:endParaRPr lang="en-US" sz="1500" dirty="0"/>
+          </a:p>
+          <a:p>
+            <a:pPr indent="0" marL="0">
+              <a:spcAft>
+                <a:spcPts val="1000"/>
+              </a:spcAft>
+              <a:buNone/>
+            </a:pPr>
+            <a:r>
+              <a:rPr lang="en-US" sz="1300" dirty="0">
+                <a:solidFill>
+                  <a:srgbClr val="1B2A2F"/>
+                </a:solidFill>
+              </a:rPr>
+              <a:t>응답에 도크 활성 파라미터(없으면 Default)를 실어 보냄</a:t>
+            </a:r>
+            <a:endParaRPr lang="en-US" sz="1500" dirty="0"/>
+          </a:p>
+          <a:p>
+            <a:pPr indent="0" marL="0">
+              <a:spcAft>
+                <a:spcPts val="200"/>
+              </a:spcAft>
+              <a:buNone/>
+            </a:pPr>
+            <a:r>
+              <a:rPr lang="en-US" sz="1500" b="1" dirty="0">
+                <a:solidFill>
+                  <a:srgbClr val="0F6E5C"/>
+                </a:solidFill>
+              </a:rPr>
+              <a:t>알람</a:t>
+            </a:r>
+            <a:endParaRPr lang="en-US" sz="1500" dirty="0"/>
+          </a:p>
+          <a:p>
+            <a:pPr indent="0" marL="0">
+              <a:buNone/>
+            </a:pPr>
+            <a:r>
+              <a:rPr lang="en-US" sz="1300" dirty="0">
+                <a:solidFill>
+                  <a:srgbClr val="1B2A2F"/>
+                </a:solidFill>
+              </a:rPr>
+              <a:t>장치 상태 비트 변화만 ftms_event_log 로 기록 (DeviceStatusManager)</a:t>
+            </a:r>
+            <a:endParaRPr lang="en-US" sz="1500" dirty="0"/>
+          </a:p>
+        </p:txBody>
+      </p:sp>
+      <p:sp>
+        <p:nvSpPr>
+          <p:cNvPr id="25" name="Slide Number Placeholder 0"/>
+          <p:cNvSpPr>
+            <a:spLocks noGrp="1"/>
+          </p:cNvSpPr>
+          <p:nvPr>
+            <p:ph type="sldNum" sz="quarter" idx="4294967295"/>
+          </p:nvPr>
+        </p:nvSpPr>
+        <p:spPr>
+          <a:xfrm>
+            <a:off x="11247120" y="6446520"/>
+            <a:ext cx="548640" cy="274320"/>
+          </a:xfrm>
+          <a:prstGeom prst="rect">
+            <a:avLst/>
+          </a:prstGeom>
+          <a:extLst>
+            <a:ext uri="{C572A759-6A51-4108-AA02-DFA0A04FC94B}">
+              <ma14:wrappingTextBoxFlag xmlns:ma14="http://schemas.microsoft.com/office/mac/drawingml/2011/main" val="0"/>
+            </a:ext>
+          </a:extLst>
+        </p:spPr>
+        <p:txBody>
+          <a:bodyPr/>
+          <a:lstStyle>
+            <a:lvl1pPr>
+              <a:defRPr sz="1000">
+                <a:solidFill>
+                  <a:srgbClr val="5B6B70"/>
+                </a:solidFill>
+              </a:defRPr>
+            </a:lvl1pPr>
+          </a:lstStyle>
+          <a:p>
+            <a:pPr algn="r"/>
+            <a:fld id="{F7021451-1387-4CA6-816F-3879F97B5CBC}" type="slidenum">
+              <a:rPr b="0" lang="en-US"/>
+              <a:t>10</a:t>
+            </a:fld>
+            <a:endParaRPr lang="en-US"/>
+          </a:p>
+        </p:txBody>
+      </p:sp>
+    </p:spTree>
+  </p:cSld>
+  <p:clrMapOvr>
+    <a:masterClrMapping/>
+  </p:clrMapOvr>
+</p:sld>
+</file>
+
+<file path=ppt/slides/slide11.xml><?xml version="1.0" encoding="utf-8"?>
+<p:sld xmlns:a="http://schemas.openxmlformats.org/drawingml/2006/main" xmlns:r="http://schemas.openxmlformats.org/officeDocument/2006/relationships" xmlns:p="http://schemas.openxmlformats.org/presentationml/2006/main">
+  <p:cSld name="Slide 11">
+    <p:spTree>
+      <p:nvGrpSpPr>
+        <p:cNvPr id="1" name=""/>
+        <p:cNvGrpSpPr/>
+        <p:nvPr/>
+      </p:nvGrpSpPr>
+      <p:grpSpPr>
+        <a:xfrm>
+          <a:off x="0" y="0"/>
+          <a:ext cx="0" cy="0"/>
+          <a:chOff x="0" y="0"/>
+          <a:chExt cx="0" cy="0"/>
+        </a:xfrm>
+      </p:grpSpPr>
+      <p:sp>
+        <p:nvSpPr>
+          <p:cNvPr id="2" name="Text 0"/>
+          <p:cNvSpPr/>
+          <p:nvPr>
+            <p:ph idx="100" type="title" hasCustomPrompt="1"/>
+          </p:nvPr>
+        </p:nvSpPr>
+        <p:spPr>
+          <a:xfrm>
+            <a:off x="457200" y="274320"/>
+            <a:ext cx="11247120" cy="731520"/>
+          </a:xfrm>
+          <a:prstGeom prst="rect">
+            <a:avLst/>
+          </a:prstGeom>
+          <a:noFill/>
+          <a:ln/>
+        </p:spPr>
+        <p:txBody>
+          <a:bodyPr wrap="square" lIns="0" tIns="0" rIns="0" bIns="0" rtlCol="0" anchor="ctr"/>
+          <a:lstStyle/>
+          <a:p>
+            <a:pPr indent="0" marL="0">
+              <a:buNone/>
+            </a:pPr>
+            <a:r>
+              <a:rPr lang="en-US" sz="3000" b="1" dirty="0">
+                <a:solidFill>
+                  <a:schemeClr val="tx2"/>
+                </a:solidFill>
+              </a:rPr>
               <a:t>LogisticsSystemStateManager 핵심 함수</a:t>
             </a:r>
             <a:endParaRPr lang="en-US" sz="3000" dirty="0"/>
@@ -3224,7 +3711,7 @@
       </p:sp>
       <p:graphicFrame>
         <p:nvGraphicFramePr>
-          <p:cNvPr id="11" name="statemanager-table"/>
+          <p:cNvPr id="12" name="statemanager-table"/>
           <p:cNvGraphicFramePr>
             <a:graphicFrameLocks noGrp="1"/>
           </p:cNvGraphicFramePr>
@@ -4357,405 +4844,6 @@
             <a:pPr algn="r"/>
             <a:fld id="{F7021451-1387-4CA6-816F-3879F97B5CBC}" type="slidenum">
               <a:rPr b="0" lang="en-US"/>
-              <a:t>10</a:t>
-            </a:fld>
-            <a:endParaRPr lang="en-US"/>
-          </a:p>
-        </p:txBody>
-      </p:sp>
-    </p:spTree>
-  </p:cSld>
-  <p:clrMapOvr>
-    <a:masterClrMapping/>
-  </p:clrMapOvr>
-</p:sld>
-</file>
-
-<file path=ppt/slides/slide11.xml><?xml version="1.0" encoding="utf-8"?>
-<p:sld xmlns:a="http://schemas.openxmlformats.org/drawingml/2006/main" xmlns:r="http://schemas.openxmlformats.org/officeDocument/2006/relationships" xmlns:p="http://schemas.openxmlformats.org/presentationml/2006/main">
-  <p:cSld name="Slide 11">
-    <p:spTree>
-      <p:nvGrpSpPr>
-        <p:cNvPr id="1" name=""/>
-        <p:cNvGrpSpPr/>
-        <p:nvPr/>
-      </p:nvGrpSpPr>
-      <p:grpSpPr>
-        <a:xfrm>
-          <a:off x="0" y="0"/>
-          <a:ext cx="0" cy="0"/>
-          <a:chOff x="0" y="0"/>
-          <a:chExt cx="0" cy="0"/>
-        </a:xfrm>
-      </p:grpSpPr>
-      <p:sp>
-        <p:nvSpPr>
-          <p:cNvPr id="2" name="Text 0"/>
-          <p:cNvSpPr/>
-          <p:nvPr>
-            <p:ph idx="100" type="title" hasCustomPrompt="1"/>
-          </p:nvPr>
-        </p:nvSpPr>
-        <p:spPr>
-          <a:xfrm>
-            <a:off x="457200" y="274320"/>
-            <a:ext cx="11247120" cy="731520"/>
-          </a:xfrm>
-          <a:prstGeom prst="rect">
-            <a:avLst/>
-          </a:prstGeom>
-          <a:noFill/>
-          <a:ln/>
-        </p:spPr>
-        <p:txBody>
-          <a:bodyPr wrap="square" lIns="0" tIns="0" rIns="0" bIns="0" rtlCol="0" anchor="ctr"/>
-          <a:lstStyle/>
-          <a:p>
-            <a:pPr indent="0" marL="0">
-              <a:buNone/>
-            </a:pPr>
-            <a:r>
-              <a:rPr lang="en-US" sz="3000" b="1" dirty="0">
-                <a:solidFill>
-                  <a:schemeClr val="tx2"/>
-                </a:solidFill>
-              </a:rPr>
-              <a:t>상태 저장·복원 테이블 불일치 (B15)</a:t>
-            </a:r>
-            <a:endParaRPr lang="en-US" sz="3000" dirty="0"/>
-          </a:p>
-        </p:txBody>
-      </p:sp>
-      <p:sp>
-        <p:nvSpPr>
-          <p:cNvPr id="3" name="diagram-frame"/>
-          <p:cNvSpPr/>
-          <p:nvPr/>
-        </p:nvSpPr>
-        <p:spPr>
-          <a:xfrm>
-            <a:off x="457200" y="1143000"/>
-            <a:ext cx="11292840" cy="2011680"/>
-          </a:xfrm>
-          <a:prstGeom prst="roundRect">
-            <a:avLst>
-              <a:gd name="adj" fmla="val 3636"/>
-            </a:avLst>
-          </a:prstGeom>
-          <a:solidFill>
-            <a:srgbClr val="FFFFFF"/>
-          </a:solidFill>
-          <a:ln w="12700">
-            <a:solidFill>
-              <a:srgbClr val="CBD5D8"/>
-            </a:solidFill>
-            <a:prstDash val="solid"/>
-          </a:ln>
-        </p:spPr>
-      </p:sp>
-      <p:pic>
-        <p:nvPicPr>
-          <p:cNvPr id="4" name="상태 저장·복원 테이블 불일치 (B15)" descr="상태 저장·복원 테이블 불일치 (B15)">    </p:cNvPr>
-          <p:cNvPicPr>
-            <a:picLocks noChangeAspect="1"/>
-          </p:cNvPicPr>
-          <p:nvPr/>
-        </p:nvPicPr>
-        <p:blipFill>
-          <a:blip r:embed="rId1"/>
-          <a:stretch>
-            <a:fillRect/>
-          </a:stretch>
-        </p:blipFill>
-        <p:spPr>
-          <a:xfrm>
-            <a:off x="594360" y="1435962"/>
-            <a:ext cx="11018520" cy="1425756"/>
-          </a:xfrm>
-          <a:prstGeom prst="rect">
-            <a:avLst/>
-          </a:prstGeom>
-        </p:spPr>
-      </p:pic>
-      <p:sp>
-        <p:nvSpPr>
-          <p:cNvPr id="5" name="card"/>
-          <p:cNvSpPr/>
-          <p:nvPr/>
-        </p:nvSpPr>
-        <p:spPr>
-          <a:xfrm>
-            <a:off x="457200" y="3429000"/>
-            <a:ext cx="3581400" cy="2834640"/>
-          </a:xfrm>
-          <a:prstGeom prst="roundRect">
-            <a:avLst>
-              <a:gd name="adj" fmla="val 2581"/>
-            </a:avLst>
-          </a:prstGeom>
-          <a:solidFill>
-            <a:srgbClr val="E6F2EE"/>
-          </a:solidFill>
-          <a:ln w="12700">
-            <a:solidFill>
-              <a:srgbClr val="E6F2EE"/>
-            </a:solidFill>
-            <a:prstDash val="solid"/>
-          </a:ln>
-        </p:spPr>
-      </p:sp>
-      <p:sp>
-        <p:nvSpPr>
-          <p:cNvPr id="6" name="card-text"/>
-          <p:cNvSpPr txBox="1"/>
-          <p:nvPr/>
-        </p:nvSpPr>
-        <p:spPr>
-          <a:xfrm>
-            <a:off x="658368" y="3593592"/>
-            <a:ext cx="3179064" cy="2505456"/>
-          </a:xfrm>
-          <a:prstGeom prst="rect">
-            <a:avLst/>
-          </a:prstGeom>
-          <a:noFill/>
-          <a:ln/>
-        </p:spPr>
-        <p:txBody>
-          <a:bodyPr wrap="square" rtlCol="0" anchor="t"/>
-          <a:lstStyle/>
-          <a:p>
-            <a:pPr indent="0" marL="0">
-              <a:spcAft>
-                <a:spcPts val="400"/>
-              </a:spcAft>
-              <a:buNone/>
-            </a:pPr>
-            <a:r>
-              <a:rPr lang="en-US" sz="1500" b="1" dirty="0">
-                <a:solidFill>
-                  <a:srgbClr val="0F6E5C"/>
-                </a:solidFill>
-              </a:rPr>
-              <a:t>저장</a:t>
-            </a:r>
-            <a:endParaRPr lang="en-US" sz="1500" dirty="0"/>
-          </a:p>
-          <a:p>
-            <a:pPr indent="0" marL="0">
-              <a:buNone/>
-            </a:pPr>
-            <a:r>
-              <a:rPr lang="en-US" sz="1300" dirty="0">
-                <a:solidFill>
-                  <a:srgbClr val="1B2A2F"/>
-                </a:solidFill>
-              </a:rPr>
-              <a:t>FlushAsync → InsertAsync → dock_message_events</a:t>
-            </a:r>
-            <a:endParaRPr lang="en-US" sz="1500" dirty="0"/>
-          </a:p>
-        </p:txBody>
-      </p:sp>
-      <p:sp>
-        <p:nvSpPr>
-          <p:cNvPr id="7" name="card"/>
-          <p:cNvSpPr/>
-          <p:nvPr/>
-        </p:nvSpPr>
-        <p:spPr>
-          <a:xfrm>
-            <a:off x="4312920" y="3429000"/>
-            <a:ext cx="3581400" cy="2834640"/>
-          </a:xfrm>
-          <a:prstGeom prst="roundRect">
-            <a:avLst>
-              <a:gd name="adj" fmla="val 2581"/>
-            </a:avLst>
-          </a:prstGeom>
-          <a:solidFill>
-            <a:srgbClr val="FBEDEA"/>
-          </a:solidFill>
-          <a:ln w="12700">
-            <a:solidFill>
-              <a:srgbClr val="FBEDEA"/>
-            </a:solidFill>
-            <a:prstDash val="solid"/>
-          </a:ln>
-        </p:spPr>
-      </p:sp>
-      <p:sp>
-        <p:nvSpPr>
-          <p:cNvPr id="8" name="card-text"/>
-          <p:cNvSpPr txBox="1"/>
-          <p:nvPr/>
-        </p:nvSpPr>
-        <p:spPr>
-          <a:xfrm>
-            <a:off x="4514088" y="3593592"/>
-            <a:ext cx="3179064" cy="2505456"/>
-          </a:xfrm>
-          <a:prstGeom prst="rect">
-            <a:avLst/>
-          </a:prstGeom>
-          <a:noFill/>
-          <a:ln/>
-        </p:spPr>
-        <p:txBody>
-          <a:bodyPr wrap="square" rtlCol="0" anchor="t"/>
-          <a:lstStyle/>
-          <a:p>
-            <a:pPr indent="0" marL="0">
-              <a:spcAft>
-                <a:spcPts val="400"/>
-              </a:spcAft>
-              <a:buNone/>
-            </a:pPr>
-            <a:r>
-              <a:rPr lang="en-US" sz="1500" b="1" dirty="0">
-                <a:solidFill>
-                  <a:srgbClr val="B8452F"/>
-                </a:solidFill>
-              </a:rPr>
-              <a:t>복원·정리</a:t>
-            </a:r>
-            <a:endParaRPr lang="en-US" sz="1500" dirty="0"/>
-          </a:p>
-          <a:p>
-            <a:pPr indent="0" marL="0">
-              <a:buNone/>
-            </a:pPr>
-            <a:r>
-              <a:rPr lang="en-US" sz="1300" dirty="0">
-                <a:solidFill>
-                  <a:srgbClr val="1B2A2F"/>
-                </a:solidFill>
-              </a:rPr>
-              <a:t>RestoreAsync, DeleteOldEventsAsync → event_data_store (비어 있음)</a:t>
-            </a:r>
-            <a:endParaRPr lang="en-US" sz="1500" dirty="0"/>
-          </a:p>
-        </p:txBody>
-      </p:sp>
-      <p:sp>
-        <p:nvSpPr>
-          <p:cNvPr id="9" name="card"/>
-          <p:cNvSpPr/>
-          <p:nvPr/>
-        </p:nvSpPr>
-        <p:spPr>
-          <a:xfrm>
-            <a:off x="8168640" y="3429000"/>
-            <a:ext cx="3581400" cy="2834640"/>
-          </a:xfrm>
-          <a:prstGeom prst="roundRect">
-            <a:avLst>
-              <a:gd name="adj" fmla="val 2581"/>
-            </a:avLst>
-          </a:prstGeom>
-          <a:solidFill>
-            <a:srgbClr val="E6F2EE"/>
-          </a:solidFill>
-          <a:ln w="12700">
-            <a:solidFill>
-              <a:srgbClr val="E6F2EE"/>
-            </a:solidFill>
-            <a:prstDash val="solid"/>
-          </a:ln>
-        </p:spPr>
-      </p:sp>
-      <p:sp>
-        <p:nvSpPr>
-          <p:cNvPr id="10" name="card-text"/>
-          <p:cNvSpPr txBox="1"/>
-          <p:nvPr/>
-        </p:nvSpPr>
-        <p:spPr>
-          <a:xfrm>
-            <a:off x="8369808" y="3593592"/>
-            <a:ext cx="3179064" cy="2505456"/>
-          </a:xfrm>
-          <a:prstGeom prst="rect">
-            <a:avLst/>
-          </a:prstGeom>
-          <a:noFill/>
-          <a:ln/>
-        </p:spPr>
-        <p:txBody>
-          <a:bodyPr wrap="square" rtlCol="0" anchor="t"/>
-          <a:lstStyle/>
-          <a:p>
-            <a:pPr indent="0" marL="0">
-              <a:spcAft>
-                <a:spcPts val="400"/>
-              </a:spcAft>
-              <a:buNone/>
-            </a:pPr>
-            <a:r>
-              <a:rPr lang="en-US" sz="1500" b="1" dirty="0">
-                <a:solidFill>
-                  <a:srgbClr val="0F6E5C"/>
-                </a:solidFill>
-              </a:rPr>
-              <a:t>영향</a:t>
-            </a:r>
-            <a:endParaRPr lang="en-US" sz="1500" dirty="0"/>
-          </a:p>
-          <a:p>
-            <a:pPr indent="0" marL="0">
-              <a:buNone/>
-            </a:pPr>
-            <a:r>
-              <a:rPr lang="en-US" sz="1300" dirty="0">
-                <a:solidFill>
-                  <a:srgbClr val="1B2A2F"/>
-                </a:solidFill>
-              </a:rPr>
-              <a:t>재시작 후 도크 상태·누적 수량 미복원. 화면은 패치로 '미접속' 표시</a:t>
-            </a:r>
-            <a:endParaRPr lang="en-US" sz="1500" dirty="0"/>
-          </a:p>
-        </p:txBody>
-      </p:sp>
-      <p:sp>
-        <p:nvSpPr>
-          <p:cNvPr id="25" name="Slide Number Placeholder 0"/>
-          <p:cNvSpPr>
-            <a:spLocks noGrp="1"/>
-          </p:cNvSpPr>
-          <p:nvPr>
-            <p:ph type="sldNum" sz="quarter" idx="4294967295"/>
-          </p:nvPr>
-        </p:nvSpPr>
-        <p:spPr>
-          <a:xfrm>
-            <a:off x="11247120" y="6446520"/>
-            <a:ext cx="548640" cy="274320"/>
-          </a:xfrm>
-          <a:prstGeom prst="rect">
-            <a:avLst/>
-          </a:prstGeom>
-          <a:extLst>
-            <a:ext uri="{C572A759-6A51-4108-AA02-DFA0A04FC94B}">
-              <ma14:wrappingTextBoxFlag xmlns:ma14="http://schemas.microsoft.com/office/mac/drawingml/2011/main" val="0"/>
-            </a:ext>
-          </a:extLst>
-        </p:spPr>
-        <p:txBody>
-          <a:bodyPr/>
-          <a:lstStyle>
-            <a:lvl1pPr>
-              <a:defRPr sz="1000">
-                <a:solidFill>
-                  <a:srgbClr val="5B6B70"/>
-                </a:solidFill>
-              </a:defRPr>
-            </a:lvl1pPr>
-          </a:lstStyle>
-          <a:p>
-            <a:pPr algn="r"/>
-            <a:fld id="{F7021451-1387-4CA6-816F-3879F97B5CBC}" type="slidenum">
-              <a:rPr b="0" lang="en-US"/>
               <a:t>11</a:t>
             </a:fld>
             <a:endParaRPr lang="en-US"/>
@@ -4819,7 +4907,7 @@
                   <a:schemeClr val="tx2"/>
                 </a:solidFill>
               </a:rPr>
-              <a:t>처리수량 수집·집계</a:t>
+              <a:t>상태 저장·복원 테이블 불일치 (B15)</a:t>
             </a:r>
             <a:endParaRPr lang="en-US" sz="3000" dirty="0"/>
           </a:p>
@@ -4834,11 +4922,11 @@
         <p:spPr>
           <a:xfrm>
             <a:off x="457200" y="1143000"/>
-            <a:ext cx="7818120" cy="5120640"/>
+            <a:ext cx="11292840" cy="2011680"/>
           </a:xfrm>
           <a:prstGeom prst="roundRect">
             <a:avLst>
-              <a:gd name="adj" fmla="val 1429"/>
+              <a:gd name="adj" fmla="val 3636"/>
             </a:avLst>
           </a:prstGeom>
           <a:solidFill>
@@ -4854,7 +4942,7 @@
       </p:sp>
       <p:pic>
         <p:nvPicPr>
-          <p:cNvPr id="4" name="처리수량 수집·집계" descr="처리수량 수집·집계">    </p:cNvPr>
+          <p:cNvPr id="4" name="상태 저장·복원 테이블 불일치 (B15)" descr="상태 저장·복원 테이블 불일치 (B15)">    </p:cNvPr>
           <p:cNvPicPr>
             <a:picLocks noChangeAspect="1"/>
           </p:cNvPicPr>
@@ -4868,8 +4956,8 @@
         </p:blipFill>
         <p:spPr>
           <a:xfrm>
-            <a:off x="1290231" y="1252728"/>
-            <a:ext cx="6152059" cy="4901184"/>
+            <a:off x="594360" y="1435962"/>
+            <a:ext cx="11018520" cy="1425756"/>
           </a:xfrm>
           <a:prstGeom prst="rect">
             <a:avLst/>
@@ -4878,18 +4966,18 @@
       </p:pic>
       <p:sp>
         <p:nvSpPr>
-          <p:cNvPr id="5" name="points-panel"/>
+          <p:cNvPr id="5" name="card"/>
           <p:cNvSpPr/>
           <p:nvPr/>
         </p:nvSpPr>
         <p:spPr>
           <a:xfrm>
-            <a:off x="8503920" y="1143000"/>
-            <a:ext cx="3246120" cy="5120640"/>
+            <a:off x="457200" y="3429000"/>
+            <a:ext cx="3581400" cy="2834640"/>
           </a:xfrm>
           <a:prstGeom prst="roundRect">
             <a:avLst>
-              <a:gd name="adj" fmla="val 2254"/>
+              <a:gd name="adj" fmla="val 2581"/>
             </a:avLst>
           </a:prstGeom>
           <a:solidFill>
@@ -4905,14 +4993,14 @@
       </p:sp>
       <p:sp>
         <p:nvSpPr>
-          <p:cNvPr id="6" name="points-text"/>
+          <p:cNvPr id="6" name="card-text"/>
           <p:cNvSpPr txBox="1"/>
           <p:nvPr/>
         </p:nvSpPr>
         <p:spPr>
           <a:xfrm>
-            <a:off x="8732520" y="1325880"/>
-            <a:ext cx="2788920" cy="4754880"/>
+            <a:off x="658368" y="3593592"/>
+            <a:ext cx="3179064" cy="2505456"/>
           </a:xfrm>
           <a:prstGeom prst="rect">
             <a:avLst/>
@@ -4926,7 +5014,7 @@
           <a:p>
             <a:pPr indent="0" marL="0">
               <a:spcAft>
-                <a:spcPts val="200"/>
+                <a:spcPts val="400"/>
               </a:spcAft>
               <a:buNone/>
             </a:pPr>
@@ -4936,31 +5024,157 @@
                   <a:srgbClr val="0F6E5C"/>
                 </a:solidFill>
               </a:rPr>
-              <a:t>채널로 분리</a:t>
+              <a:t>저장</a:t>
             </a:r>
             <a:endParaRPr lang="en-US" sz="1500" dirty="0"/>
           </a:p>
           <a:p>
             <a:pPr indent="0" marL="0">
+              <a:buNone/>
+            </a:pPr>
+            <a:r>
+              <a:rPr lang="en-US" sz="1300" dirty="0">
+                <a:solidFill>
+                  <a:srgbClr val="1B2A2F"/>
+                </a:solidFill>
+              </a:rPr>
+              <a:t>FlushAsync → InsertAsync → dock_message_events</a:t>
+            </a:r>
+            <a:endParaRPr lang="en-US" sz="1500" dirty="0"/>
+          </a:p>
+        </p:txBody>
+      </p:sp>
+      <p:sp>
+        <p:nvSpPr>
+          <p:cNvPr id="7" name="card"/>
+          <p:cNvSpPr/>
+          <p:nvPr/>
+        </p:nvSpPr>
+        <p:spPr>
+          <a:xfrm>
+            <a:off x="4312920" y="3429000"/>
+            <a:ext cx="3581400" cy="2834640"/>
+          </a:xfrm>
+          <a:prstGeom prst="roundRect">
+            <a:avLst>
+              <a:gd name="adj" fmla="val 2581"/>
+            </a:avLst>
+          </a:prstGeom>
+          <a:solidFill>
+            <a:srgbClr val="FBEDEA"/>
+          </a:solidFill>
+          <a:ln w="12700">
+            <a:solidFill>
+              <a:srgbClr val="FBEDEA"/>
+            </a:solidFill>
+            <a:prstDash val="solid"/>
+          </a:ln>
+        </p:spPr>
+      </p:sp>
+      <p:sp>
+        <p:nvSpPr>
+          <p:cNvPr id="8" name="card-text"/>
+          <p:cNvSpPr txBox="1"/>
+          <p:nvPr/>
+        </p:nvSpPr>
+        <p:spPr>
+          <a:xfrm>
+            <a:off x="4514088" y="3593592"/>
+            <a:ext cx="3179064" cy="2505456"/>
+          </a:xfrm>
+          <a:prstGeom prst="rect">
+            <a:avLst/>
+          </a:prstGeom>
+          <a:noFill/>
+          <a:ln/>
+        </p:spPr>
+        <p:txBody>
+          <a:bodyPr wrap="square" rtlCol="0" anchor="t"/>
+          <a:lstStyle/>
+          <a:p>
+            <a:pPr indent="0" marL="0">
               <a:spcAft>
-                <a:spcPts val="1000"/>
+                <a:spcPts val="400"/>
               </a:spcAft>
               <a:buNone/>
             </a:pPr>
             <a:r>
+              <a:rPr lang="en-US" sz="1500" b="1" dirty="0">
+                <a:solidFill>
+                  <a:srgbClr val="B8452F"/>
+                </a:solidFill>
+              </a:rPr>
+              <a:t>복원·정리</a:t>
+            </a:r>
+            <a:endParaRPr lang="en-US" sz="1500" dirty="0"/>
+          </a:p>
+          <a:p>
+            <a:pPr indent="0" marL="0">
+              <a:buNone/>
+            </a:pPr>
+            <a:r>
               <a:rPr lang="en-US" sz="1300" dirty="0">
                 <a:solidFill>
                   <a:srgbClr val="1B2A2F"/>
                 </a:solidFill>
               </a:rPr>
-              <a:t>핸들러는 채널에 넣고 즉시 OK → 수신과 DB 처리 분리</a:t>
+              <a:t>RestoreAsync, DeleteOldEventsAsync → event_data_store (비어 있음)</a:t>
             </a:r>
             <a:endParaRPr lang="en-US" sz="1500" dirty="0"/>
           </a:p>
+        </p:txBody>
+      </p:sp>
+      <p:sp>
+        <p:nvSpPr>
+          <p:cNvPr id="9" name="card"/>
+          <p:cNvSpPr/>
+          <p:nvPr/>
+        </p:nvSpPr>
+        <p:spPr>
+          <a:xfrm>
+            <a:off x="8168640" y="3429000"/>
+            <a:ext cx="3581400" cy="2834640"/>
+          </a:xfrm>
+          <a:prstGeom prst="roundRect">
+            <a:avLst>
+              <a:gd name="adj" fmla="val 2581"/>
+            </a:avLst>
+          </a:prstGeom>
+          <a:solidFill>
+            <a:srgbClr val="E6F2EE"/>
+          </a:solidFill>
+          <a:ln w="12700">
+            <a:solidFill>
+              <a:srgbClr val="E6F2EE"/>
+            </a:solidFill>
+            <a:prstDash val="solid"/>
+          </a:ln>
+        </p:spPr>
+      </p:sp>
+      <p:sp>
+        <p:nvSpPr>
+          <p:cNvPr id="10" name="card-text"/>
+          <p:cNvSpPr txBox="1"/>
+          <p:nvPr/>
+        </p:nvSpPr>
+        <p:spPr>
+          <a:xfrm>
+            <a:off x="8369808" y="3593592"/>
+            <a:ext cx="3179064" cy="2505456"/>
+          </a:xfrm>
+          <a:prstGeom prst="rect">
+            <a:avLst/>
+          </a:prstGeom>
+          <a:noFill/>
+          <a:ln/>
+        </p:spPr>
+        <p:txBody>
+          <a:bodyPr wrap="square" rtlCol="0" anchor="t"/>
+          <a:lstStyle/>
           <a:p>
             <a:pPr indent="0" marL="0">
               <a:spcAft>
-                <a:spcPts val="200"/>
+                <a:spcPts val="400"/>
               </a:spcAft>
               <a:buNone/>
             </a:pPr>
@@ -4970,15 +5184,12 @@
                   <a:srgbClr val="0F6E5C"/>
                 </a:solidFill>
               </a:rPr>
-              <a:t>4개 작업 병렬</a:t>
+              <a:t>영향</a:t>
             </a:r>
             <a:endParaRPr lang="en-US" sz="1500" dirty="0"/>
           </a:p>
           <a:p>
             <a:pPr indent="0" marL="0">
-              <a:spcAft>
-                <a:spcPts val="1000"/>
-              </a:spcAft>
               <a:buNone/>
             </a:pPr>
             <a:r>
@@ -4987,38 +5198,7 @@
                   <a:srgbClr val="1B2A2F"/>
                 </a:solidFill>
               </a:rPr>
-              <a:t>5분 누적 · collected_payload 적재 · v4 처리 · 분/시/일 집계</a:t>
-            </a:r>
-            <a:endParaRPr lang="en-US" sz="1500" dirty="0"/>
-          </a:p>
-          <a:p>
-            <a:pPr indent="0" marL="0">
-              <a:spcAft>
-                <a:spcPts val="200"/>
-              </a:spcAft>
-              <a:buNone/>
-            </a:pPr>
-            <a:r>
-              <a:rPr lang="en-US" sz="1500" b="1" dirty="0">
-                <a:solidFill>
-                  <a:srgbClr val="B8452F"/>
-                </a:solidFill>
-              </a:rPr>
-              <a:t>집계 루프 보호 없음</a:t>
-            </a:r>
-            <a:endParaRPr lang="en-US" sz="1500" dirty="0"/>
-          </a:p>
-          <a:p>
-            <a:pPr indent="0" marL="0">
-              <a:buNone/>
-            </a:pPr>
-            <a:r>
-              <a:rPr lang="en-US" sz="1300" dirty="0">
-                <a:solidFill>
-                  <a:srgbClr val="1B2A2F"/>
-                </a:solidFill>
-              </a:rPr>
-              <a:t>DB 오류 1회로 영구 정지 가능 (B6)</a:t>
+              <a:t>재시작 후 도크 상태·누적 수량 미복원. 화면은 패치로 '미접속' 표시</a:t>
             </a:r>
             <a:endParaRPr lang="en-US" sz="1500" dirty="0"/>
           </a:p>
@@ -5126,7 +5306,7 @@
                   <a:schemeClr val="tx2"/>
                 </a:solidFill>
               </a:rPr>
-              <a:t>로그인·토큰</a:t>
+              <a:t>처리수량 수집·집계</a:t>
             </a:r>
             <a:endParaRPr lang="en-US" sz="3000" dirty="0"/>
           </a:p>
@@ -5161,7 +5341,7 @@
       </p:sp>
       <p:pic>
         <p:nvPicPr>
-          <p:cNvPr id="4" name="로그인·토큰" descr="로그인·토큰">    </p:cNvPr>
+          <p:cNvPr id="4" name="처리수량 수집·집계" descr="처리수량 수집·집계">    </p:cNvPr>
           <p:cNvPicPr>
             <a:picLocks noChangeAspect="1"/>
           </p:cNvPicPr>
@@ -5175,8 +5355,8 @@
         </p:blipFill>
         <p:spPr>
           <a:xfrm>
-            <a:off x="1063518" y="1252728"/>
-            <a:ext cx="6605483" cy="4901184"/>
+            <a:off x="1290231" y="1252728"/>
+            <a:ext cx="6152059" cy="4901184"/>
           </a:xfrm>
           <a:prstGeom prst="rect">
             <a:avLst/>
@@ -5243,7 +5423,7 @@
                   <a:srgbClr val="0F6E5C"/>
                 </a:solidFill>
               </a:rPr>
-              <a:t>토큰</a:t>
+              <a:t>채널로 분리</a:t>
             </a:r>
             <a:endParaRPr lang="en-US" sz="1500" dirty="0"/>
           </a:p>
@@ -5260,7 +5440,7 @@
                   <a:srgbClr val="1B2A2F"/>
                 </a:solidFill>
               </a:rPr>
-              <a:t>Access JWT 15분(본문) + Refresh 7일(HttpOnly 쿠키), 만료 전 자동 refresh</a:t>
+              <a:t>핸들러는 채널에 넣고 즉시 OK → 수신과 DB 처리 분리</a:t>
             </a:r>
             <a:endParaRPr lang="en-US" sz="1500" dirty="0"/>
           </a:p>
@@ -5277,7 +5457,7 @@
                   <a:srgbClr val="0F6E5C"/>
                 </a:solidFill>
               </a:rPr>
-              <a:t>502 = 로그인 실패</a:t>
+              <a:t>4개 작업 병렬</a:t>
             </a:r>
             <a:endParaRPr lang="en-US" sz="1500" dirty="0"/>
           </a:p>
@@ -5294,7 +5474,7 @@
                   <a:srgbClr val="1B2A2F"/>
                 </a:solidFill>
               </a:rPr>
-              <a:t>서버 기동 전 요청은 nginx 502 → 화면은 "Login failed" 로만 표시</a:t>
+              <a:t>5분 누적 · collected_payload 적재 · v4 처리 · 분/시/일 집계</a:t>
             </a:r>
             <a:endParaRPr lang="en-US" sz="1500" dirty="0"/>
           </a:p>
@@ -5311,7 +5491,7 @@
                   <a:srgbClr val="B8452F"/>
                 </a:solidFill>
               </a:rPr>
-              <a:t>보안</a:t>
+              <a:t>집계 루프 보호 없음</a:t>
             </a:r>
             <a:endParaRPr lang="en-US" sz="1500" dirty="0"/>
           </a:p>
@@ -5325,7 +5505,7 @@
                   <a:srgbClr val="1B2A2F"/>
                 </a:solidFill>
               </a:rPr>
-              <a:t>익명 가입 시 Admin 부여(S1), 잠금 미적용(S9)</a:t>
+              <a:t>DB 오류 1회로 영구 정지 가능 (B6)</a:t>
             </a:r>
             <a:endParaRPr lang="en-US" sz="1500" dirty="0"/>
           </a:p>
@@ -5433,7 +5613,7 @@
                   <a:schemeClr val="tx2"/>
                 </a:solidFill>
               </a:rPr>
-              <a:t>설정 변경이 도크에 전달되는 경로</a:t>
+              <a:t>Channel 기반 수집 — 수신과 DB 저장 분리</a:t>
             </a:r>
             <a:endParaRPr lang="en-US" sz="3000" dirty="0"/>
           </a:p>
@@ -5448,11 +5628,11 @@
         <p:spPr>
           <a:xfrm>
             <a:off x="457200" y="1143000"/>
-            <a:ext cx="11292840" cy="2834640"/>
+            <a:ext cx="7818120" cy="5120640"/>
           </a:xfrm>
           <a:prstGeom prst="roundRect">
             <a:avLst>
-              <a:gd name="adj" fmla="val 2581"/>
+              <a:gd name="adj" fmla="val 1429"/>
             </a:avLst>
           </a:prstGeom>
           <a:solidFill>
@@ -5468,7 +5648,7 @@
       </p:sp>
       <p:pic>
         <p:nvPicPr>
-          <p:cNvPr id="4" name="설정 변경이 도크에 전달되는 경로" descr="설정 변경이 도크에 전달되는 경로">    </p:cNvPr>
+          <p:cNvPr id="4" name="Channel 기반 수집 — 수신과 DB 저장 분리" descr="Channel 기반 수집 — 수신과 DB 저장 분리">    </p:cNvPr>
           <p:cNvPicPr>
             <a:picLocks noChangeAspect="1"/>
           </p:cNvPicPr>
@@ -5482,8 +5662,8 @@
         </p:blipFill>
         <p:spPr>
           <a:xfrm>
-            <a:off x="2241294" y="1280160"/>
-            <a:ext cx="7724651" cy="2560320"/>
+            <a:off x="788815" y="1252728"/>
+            <a:ext cx="7154891" cy="4901184"/>
           </a:xfrm>
           <a:prstGeom prst="rect">
             <a:avLst/>
@@ -5492,18 +5672,18 @@
       </p:pic>
       <p:sp>
         <p:nvSpPr>
-          <p:cNvPr id="5" name="card"/>
+          <p:cNvPr id="5" name="points-panel"/>
           <p:cNvSpPr/>
           <p:nvPr/>
         </p:nvSpPr>
         <p:spPr>
           <a:xfrm>
-            <a:off x="457200" y="4251960"/>
-            <a:ext cx="3581400" cy="2011680"/>
+            <a:off x="8503920" y="1143000"/>
+            <a:ext cx="3246120" cy="5120640"/>
           </a:xfrm>
           <a:prstGeom prst="roundRect">
             <a:avLst>
-              <a:gd name="adj" fmla="val 3636"/>
+              <a:gd name="adj" fmla="val 2254"/>
             </a:avLst>
           </a:prstGeom>
           <a:solidFill>
@@ -5519,14 +5699,14 @@
       </p:sp>
       <p:sp>
         <p:nvSpPr>
-          <p:cNvPr id="6" name="card-text"/>
+          <p:cNvPr id="6" name="points-text"/>
           <p:cNvSpPr txBox="1"/>
           <p:nvPr/>
         </p:nvSpPr>
         <p:spPr>
           <a:xfrm>
-            <a:off x="658368" y="4416552"/>
-            <a:ext cx="3179064" cy="1682496"/>
+            <a:off x="8732520" y="1325880"/>
+            <a:ext cx="2788920" cy="4754880"/>
           </a:xfrm>
           <a:prstGeom prst="rect">
             <a:avLst/>
@@ -5540,7 +5720,7 @@
           <a:p>
             <a:pPr indent="0" marL="0">
               <a:spcAft>
-                <a:spcPts val="400"/>
+                <a:spcPts val="200"/>
               </a:spcAft>
               <a:buNone/>
             </a:pPr>
@@ -5550,12 +5730,15 @@
                   <a:srgbClr val="0F6E5C"/>
                 </a:solidFill>
               </a:rPr>
-              <a:t>저장 + 통지</a:t>
+              <a:t>N : 1 Channel</a:t>
             </a:r>
             <a:endParaRPr lang="en-US" sz="1500" dirty="0"/>
           </a:p>
           <a:p>
             <a:pPr indent="0" marL="0">
+              <a:spcAft>
+                <a:spcPts val="1000"/>
+              </a:spcAft>
               <a:buNone/>
             </a:pPr>
             <a:r>
@@ -5564,63 +5747,14 @@
                   <a:srgbClr val="1B2A2F"/>
                 </a:solidFill>
               </a:rPr>
-              <a:t>POST /api/setting → DB 저장 + AssetItemUpdateChannel</a:t>
+              <a:t>모든 TCP 세션이 Writer, DataCollectorService 하나가 ReadAllAsync 로 소비 (Unbounded)</a:t>
             </a:r>
             <a:endParaRPr lang="en-US" sz="1500" dirty="0"/>
           </a:p>
-        </p:txBody>
-      </p:sp>
-      <p:sp>
-        <p:nvSpPr>
-          <p:cNvPr id="7" name="card"/>
-          <p:cNvSpPr/>
-          <p:nvPr/>
-        </p:nvSpPr>
-        <p:spPr>
-          <a:xfrm>
-            <a:off x="4312920" y="4251960"/>
-            <a:ext cx="3581400" cy="2011680"/>
-          </a:xfrm>
-          <a:prstGeom prst="roundRect">
-            <a:avLst>
-              <a:gd name="adj" fmla="val 3636"/>
-            </a:avLst>
-          </a:prstGeom>
-          <a:solidFill>
-            <a:srgbClr val="E6F2EE"/>
-          </a:solidFill>
-          <a:ln w="12700">
-            <a:solidFill>
-              <a:srgbClr val="E6F2EE"/>
-            </a:solidFill>
-            <a:prstDash val="solid"/>
-          </a:ln>
-        </p:spPr>
-      </p:sp>
-      <p:sp>
-        <p:nvSpPr>
-          <p:cNvPr id="8" name="card-text"/>
-          <p:cNvSpPr txBox="1"/>
-          <p:nvPr/>
-        </p:nvSpPr>
-        <p:spPr>
-          <a:xfrm>
-            <a:off x="4514088" y="4416552"/>
-            <a:ext cx="3179064" cy="1682496"/>
-          </a:xfrm>
-          <a:prstGeom prst="rect">
-            <a:avLst/>
-          </a:prstGeom>
-          <a:noFill/>
-          <a:ln/>
-        </p:spPr>
-        <p:txBody>
-          <a:bodyPr wrap="square" rtlCol="0" anchor="t"/>
-          <a:lstStyle/>
           <a:p>
             <a:pPr indent="0" marL="0">
               <a:spcAft>
-                <a:spcPts val="400"/>
+                <a:spcPts val="200"/>
               </a:spcAft>
               <a:buNone/>
             </a:pPr>
@@ -5630,12 +5764,15 @@
                   <a:srgbClr val="0F6E5C"/>
                 </a:solidFill>
               </a:rPr>
-              <a:t>다음 heartbeat 로 전달</a:t>
+              <a:t>큐 10개 교대</a:t>
             </a:r>
             <a:endParaRPr lang="en-US" sz="1500" dirty="0"/>
           </a:p>
           <a:p>
             <a:pPr indent="0" marL="0">
+              <a:spcAft>
+                <a:spcPts val="1000"/>
+              </a:spcAft>
               <a:buNone/>
             </a:pPr>
             <a:r>
@@ -5644,63 +5781,14 @@
                   <a:srgbClr val="1B2A2F"/>
                 </a:solidFill>
               </a:rPr>
-              <a:t>StateManager 가 메모리 갱신 → 응답 SetParameter 로 도크 반영</a:t>
+              <a:t>1초 또는 20,000건마다 활성 큐를 넘기고, 떼어 낸 큐를 별도 Task 가 DB 에 일괄 저장</a:t>
             </a:r>
             <a:endParaRPr lang="en-US" sz="1500" dirty="0"/>
           </a:p>
-        </p:txBody>
-      </p:sp>
-      <p:sp>
-        <p:nvSpPr>
-          <p:cNvPr id="9" name="card"/>
-          <p:cNvSpPr/>
-          <p:nvPr/>
-        </p:nvSpPr>
-        <p:spPr>
-          <a:xfrm>
-            <a:off x="8168640" y="4251960"/>
-            <a:ext cx="3581400" cy="2011680"/>
-          </a:xfrm>
-          <a:prstGeom prst="roundRect">
-            <a:avLst>
-              <a:gd name="adj" fmla="val 3636"/>
-            </a:avLst>
-          </a:prstGeom>
-          <a:solidFill>
-            <a:srgbClr val="FBEDEA"/>
-          </a:solidFill>
-          <a:ln w="12700">
-            <a:solidFill>
-              <a:srgbClr val="FBEDEA"/>
-            </a:solidFill>
-            <a:prstDash val="solid"/>
-          </a:ln>
-        </p:spPr>
-      </p:sp>
-      <p:sp>
-        <p:nvSpPr>
-          <p:cNvPr id="10" name="card-text"/>
-          <p:cNvSpPr txBox="1"/>
-          <p:nvPr/>
-        </p:nvSpPr>
-        <p:spPr>
-          <a:xfrm>
-            <a:off x="8369808" y="4416552"/>
-            <a:ext cx="3179064" cy="1682496"/>
-          </a:xfrm>
-          <a:prstGeom prst="rect">
-            <a:avLst/>
-          </a:prstGeom>
-          <a:noFill/>
-          <a:ln/>
-        </p:spPr>
-        <p:txBody>
-          <a:bodyPr wrap="square" rtlCol="0" anchor="t"/>
-          <a:lstStyle/>
           <a:p>
             <a:pPr indent="0" marL="0">
               <a:spcAft>
-                <a:spcPts val="400"/>
+                <a:spcPts val="200"/>
               </a:spcAft>
               <a:buNone/>
             </a:pPr>
@@ -5710,7 +5798,7 @@
                   <a:srgbClr val="B8452F"/>
                 </a:solidFill>
               </a:rPr>
-              <a:t>삭제는 미반영</a:t>
+              <a:t>주의</a:t>
             </a:r>
             <a:endParaRPr lang="en-US" sz="1500" dirty="0"/>
           </a:p>
@@ -5724,7 +5812,7 @@
                   <a:srgbClr val="1B2A2F"/>
                 </a:solidFill>
               </a:rPr>
-              <a:t>DELETE 는 통지 없음 → 재시작 전까지 이전 값 전송</a:t>
+              <a:t>OK 는 저장 전 응답 · 무제한 버퍼 · JSON 3회 파싱 · 종료 시 마지막 배치 유실 가능</a:t>
             </a:r>
             <a:endParaRPr lang="en-US" sz="1500" dirty="0"/>
           </a:p>
@@ -5810,8 +5898,8 @@
         </p:nvSpPr>
         <p:spPr>
           <a:xfrm>
-            <a:off x="731520" y="2377440"/>
-            <a:ext cx="10698480" cy="1097280"/>
+            <a:off x="457200" y="274320"/>
+            <a:ext cx="11247120" cy="731520"/>
           </a:xfrm>
           <a:prstGeom prst="rect">
             <a:avLst/>
@@ -5820,36 +5908,112 @@
           <a:ln/>
         </p:spPr>
         <p:txBody>
-          <a:bodyPr wrap="square" rtlCol="0"/>
-          <a:lstStyle/>
-          <a:p>
-            <a:pPr indent="0" marL="0">
-              <a:buNone/>
-            </a:pPr>
-            <a:r>
-              <a:rPr lang="en-US" sz="4000" b="1" dirty="0">
-                <a:solidFill>
-                  <a:schemeClr val="bg1"/>
-                </a:solidFill>
-              </a:rPr>
-              <a:t>DxfBlazorViewer.Client</a:t>
-            </a:r>
-            <a:endParaRPr lang="en-US" sz="4000" dirty="0"/>
-          </a:p>
-        </p:txBody>
-      </p:sp>
-      <p:sp>
-        <p:nvSpPr>
-          <p:cNvPr id="3" name="Text 0"/>
+          <a:bodyPr wrap="square" lIns="0" tIns="0" rIns="0" bIns="0" rtlCol="0" anchor="ctr"/>
+          <a:lstStyle/>
+          <a:p>
+            <a:pPr indent="0" marL="0">
+              <a:buNone/>
+            </a:pPr>
+            <a:r>
+              <a:rPr lang="en-US" sz="3000" b="1" dirty="0">
+                <a:solidFill>
+                  <a:schemeClr val="tx2"/>
+                </a:solidFill>
+              </a:rPr>
+              <a:t>로그인·토큰</a:t>
+            </a:r>
+            <a:endParaRPr lang="en-US" sz="3000" dirty="0"/>
+          </a:p>
+        </p:txBody>
+      </p:sp>
+      <p:sp>
+        <p:nvSpPr>
+          <p:cNvPr id="3" name="diagram-frame"/>
           <p:cNvSpPr/>
-          <p:nvPr>
-            <p:ph idx="101" type="body" hasCustomPrompt="1"/>
-          </p:nvPr>
-        </p:nvSpPr>
-        <p:spPr>
-          <a:xfrm>
-            <a:off x="731520" y="3566160"/>
-            <a:ext cx="10698480" cy="914400"/>
+          <p:nvPr/>
+        </p:nvSpPr>
+        <p:spPr>
+          <a:xfrm>
+            <a:off x="457200" y="1143000"/>
+            <a:ext cx="7818120" cy="5120640"/>
+          </a:xfrm>
+          <a:prstGeom prst="roundRect">
+            <a:avLst>
+              <a:gd name="adj" fmla="val 1429"/>
+            </a:avLst>
+          </a:prstGeom>
+          <a:solidFill>
+            <a:srgbClr val="FFFFFF"/>
+          </a:solidFill>
+          <a:ln w="12700">
+            <a:solidFill>
+              <a:srgbClr val="CBD5D8"/>
+            </a:solidFill>
+            <a:prstDash val="solid"/>
+          </a:ln>
+        </p:spPr>
+      </p:sp>
+      <p:pic>
+        <p:nvPicPr>
+          <p:cNvPr id="4" name="로그인·토큰" descr="로그인·토큰">    </p:cNvPr>
+          <p:cNvPicPr>
+            <a:picLocks noChangeAspect="1"/>
+          </p:cNvPicPr>
+          <p:nvPr/>
+        </p:nvPicPr>
+        <p:blipFill>
+          <a:blip r:embed="rId1"/>
+          <a:stretch>
+            <a:fillRect/>
+          </a:stretch>
+        </p:blipFill>
+        <p:spPr>
+          <a:xfrm>
+            <a:off x="1063518" y="1252728"/>
+            <a:ext cx="6605483" cy="4901184"/>
+          </a:xfrm>
+          <a:prstGeom prst="rect">
+            <a:avLst/>
+          </a:prstGeom>
+        </p:spPr>
+      </p:pic>
+      <p:sp>
+        <p:nvSpPr>
+          <p:cNvPr id="5" name="points-panel"/>
+          <p:cNvSpPr/>
+          <p:nvPr/>
+        </p:nvSpPr>
+        <p:spPr>
+          <a:xfrm>
+            <a:off x="8503920" y="1143000"/>
+            <a:ext cx="3246120" cy="5120640"/>
+          </a:xfrm>
+          <a:prstGeom prst="roundRect">
+            <a:avLst>
+              <a:gd name="adj" fmla="val 2254"/>
+            </a:avLst>
+          </a:prstGeom>
+          <a:solidFill>
+            <a:srgbClr val="E6F2EE"/>
+          </a:solidFill>
+          <a:ln w="12700">
+            <a:solidFill>
+              <a:srgbClr val="E6F2EE"/>
+            </a:solidFill>
+            <a:prstDash val="solid"/>
+          </a:ln>
+        </p:spPr>
+      </p:sp>
+      <p:sp>
+        <p:nvSpPr>
+          <p:cNvPr id="6" name="points-text"/>
+          <p:cNvSpPr txBox="1"/>
+          <p:nvPr/>
+        </p:nvSpPr>
+        <p:spPr>
+          <a:xfrm>
+            <a:off x="8732520" y="1325880"/>
+            <a:ext cx="2788920" cy="4754880"/>
           </a:xfrm>
           <a:prstGeom prst="rect">
             <a:avLst/>
@@ -5858,21 +6022,106 @@
           <a:ln/>
         </p:spPr>
         <p:txBody>
-          <a:bodyPr wrap="square" rtlCol="0"/>
-          <a:lstStyle/>
-          <a:p>
-            <a:pPr indent="0" marL="0">
-              <a:buNone/>
-            </a:pPr>
-            <a:r>
-              <a:rPr lang="en-US" sz="1800" dirty="0">
-                <a:solidFill>
-                  <a:srgbClr val="D6EFE7"/>
-                </a:solidFill>
-              </a:rPr>
-              <a:t>Blazor WASM · SkiaSharp 도면/도식 렌더링 · 폴링 + SignalR</a:t>
-            </a:r>
-            <a:endParaRPr lang="en-US" sz="1800" dirty="0"/>
+          <a:bodyPr wrap="square" rtlCol="0" anchor="t"/>
+          <a:lstStyle/>
+          <a:p>
+            <a:pPr indent="0" marL="0">
+              <a:spcAft>
+                <a:spcPts val="200"/>
+              </a:spcAft>
+              <a:buNone/>
+            </a:pPr>
+            <a:r>
+              <a:rPr lang="en-US" sz="1500" b="1" dirty="0">
+                <a:solidFill>
+                  <a:srgbClr val="0F6E5C"/>
+                </a:solidFill>
+              </a:rPr>
+              <a:t>토큰</a:t>
+            </a:r>
+            <a:endParaRPr lang="en-US" sz="1500" dirty="0"/>
+          </a:p>
+          <a:p>
+            <a:pPr indent="0" marL="0">
+              <a:spcAft>
+                <a:spcPts val="1000"/>
+              </a:spcAft>
+              <a:buNone/>
+            </a:pPr>
+            <a:r>
+              <a:rPr lang="en-US" sz="1300" dirty="0">
+                <a:solidFill>
+                  <a:srgbClr val="1B2A2F"/>
+                </a:solidFill>
+              </a:rPr>
+              <a:t>Access JWT 15분(본문) + Refresh 7일(HttpOnly 쿠키), 만료 전 자동 refresh</a:t>
+            </a:r>
+            <a:endParaRPr lang="en-US" sz="1500" dirty="0"/>
+          </a:p>
+          <a:p>
+            <a:pPr indent="0" marL="0">
+              <a:spcAft>
+                <a:spcPts val="200"/>
+              </a:spcAft>
+              <a:buNone/>
+            </a:pPr>
+            <a:r>
+              <a:rPr lang="en-US" sz="1500" b="1" dirty="0">
+                <a:solidFill>
+                  <a:srgbClr val="0F6E5C"/>
+                </a:solidFill>
+              </a:rPr>
+              <a:t>502 = 로그인 실패</a:t>
+            </a:r>
+            <a:endParaRPr lang="en-US" sz="1500" dirty="0"/>
+          </a:p>
+          <a:p>
+            <a:pPr indent="0" marL="0">
+              <a:spcAft>
+                <a:spcPts val="1000"/>
+              </a:spcAft>
+              <a:buNone/>
+            </a:pPr>
+            <a:r>
+              <a:rPr lang="en-US" sz="1300" dirty="0">
+                <a:solidFill>
+                  <a:srgbClr val="1B2A2F"/>
+                </a:solidFill>
+              </a:rPr>
+              <a:t>서버 기동 전 요청은 nginx 502 → 화면은 "Login failed" 로만 표시</a:t>
+            </a:r>
+            <a:endParaRPr lang="en-US" sz="1500" dirty="0"/>
+          </a:p>
+          <a:p>
+            <a:pPr indent="0" marL="0">
+              <a:spcAft>
+                <a:spcPts val="200"/>
+              </a:spcAft>
+              <a:buNone/>
+            </a:pPr>
+            <a:r>
+              <a:rPr lang="en-US" sz="1500" b="1" dirty="0">
+                <a:solidFill>
+                  <a:srgbClr val="B8452F"/>
+                </a:solidFill>
+              </a:rPr>
+              <a:t>보안</a:t>
+            </a:r>
+            <a:endParaRPr lang="en-US" sz="1500" dirty="0"/>
+          </a:p>
+          <a:p>
+            <a:pPr indent="0" marL="0">
+              <a:buNone/>
+            </a:pPr>
+            <a:r>
+              <a:rPr lang="en-US" sz="1300" dirty="0">
+                <a:solidFill>
+                  <a:srgbClr val="1B2A2F"/>
+                </a:solidFill>
+              </a:rPr>
+              <a:t>익명 가입 시 Admin 부여(S1), 잠금 미적용(S9)</a:t>
+            </a:r>
+            <a:endParaRPr lang="en-US" sz="1500" dirty="0"/>
           </a:p>
         </p:txBody>
       </p:sp>
@@ -5888,7 +6137,7 @@
         </p:nvSpPr>
         <p:spPr>
           <a:xfrm>
-            <a:off x="11338560" y="6400800"/>
+            <a:off x="11247120" y="6446520"/>
             <a:ext cx="548640" cy="274320"/>
           </a:xfrm>
           <a:prstGeom prst="rect">
@@ -5906,13 +6155,13 @@
             <a:lvl1pPr>
               <a:defRPr sz="1000">
                 <a:solidFill>
-                  <a:srgbClr val="D6EFE7"/>
+                  <a:srgbClr val="5B6B70"/>
                 </a:solidFill>
               </a:defRPr>
             </a:lvl1pPr>
           </a:lstStyle>
           <a:p>
-            <a:pPr algn="l"/>
+            <a:pPr algn="r"/>
             <a:fld id="{F7021451-1387-4CA6-816F-3879F97B5CBC}" type="slidenum">
               <a:rPr b="0" lang="en-US"/>
               <a:t>15</a:t>
@@ -5978,7 +6227,7 @@
                   <a:schemeClr val="tx2"/>
                 </a:solidFill>
               </a:rPr>
-              <a:t>웹 UI 구성</a:t>
+              <a:t>설정 변경이 도크에 전달되는 경로</a:t>
             </a:r>
             <a:endParaRPr lang="en-US" sz="3000" dirty="0"/>
           </a:p>
@@ -5993,11 +6242,11 @@
         <p:spPr>
           <a:xfrm>
             <a:off x="457200" y="1143000"/>
-            <a:ext cx="7818120" cy="5120640"/>
+            <a:ext cx="11292840" cy="2834640"/>
           </a:xfrm>
           <a:prstGeom prst="roundRect">
             <a:avLst>
-              <a:gd name="adj" fmla="val 1429"/>
+              <a:gd name="adj" fmla="val 2581"/>
             </a:avLst>
           </a:prstGeom>
           <a:solidFill>
@@ -6013,7 +6262,7 @@
       </p:sp>
       <p:pic>
         <p:nvPicPr>
-          <p:cNvPr id="4" name="웹 UI 구성" descr="웹 UI 구성">    </p:cNvPr>
+          <p:cNvPr id="4" name="설정 변경이 도크에 전달되는 경로" descr="설정 변경이 도크에 전달되는 경로">    </p:cNvPr>
           <p:cNvPicPr>
             <a:picLocks noChangeAspect="1"/>
           </p:cNvPicPr>
@@ -6027,8 +6276,8 @@
         </p:blipFill>
         <p:spPr>
           <a:xfrm>
-            <a:off x="1923242" y="1252728"/>
-            <a:ext cx="4886037" cy="4901184"/>
+            <a:off x="2241294" y="1280160"/>
+            <a:ext cx="7724651" cy="2560320"/>
           </a:xfrm>
           <a:prstGeom prst="rect">
             <a:avLst/>
@@ -6037,18 +6286,18 @@
       </p:pic>
       <p:sp>
         <p:nvSpPr>
-          <p:cNvPr id="5" name="points-panel"/>
+          <p:cNvPr id="5" name="card"/>
           <p:cNvSpPr/>
           <p:nvPr/>
         </p:nvSpPr>
         <p:spPr>
           <a:xfrm>
-            <a:off x="8503920" y="1143000"/>
-            <a:ext cx="3246120" cy="5120640"/>
+            <a:off x="457200" y="4251960"/>
+            <a:ext cx="3581400" cy="2011680"/>
           </a:xfrm>
           <a:prstGeom prst="roundRect">
             <a:avLst>
-              <a:gd name="adj" fmla="val 2254"/>
+              <a:gd name="adj" fmla="val 3636"/>
             </a:avLst>
           </a:prstGeom>
           <a:solidFill>
@@ -6064,14 +6313,14 @@
       </p:sp>
       <p:sp>
         <p:nvSpPr>
-          <p:cNvPr id="6" name="points-text"/>
+          <p:cNvPr id="6" name="card-text"/>
           <p:cNvSpPr txBox="1"/>
           <p:nvPr/>
         </p:nvSpPr>
         <p:spPr>
           <a:xfrm>
-            <a:off x="8732520" y="1325880"/>
-            <a:ext cx="2788920" cy="4754880"/>
+            <a:off x="658368" y="4416552"/>
+            <a:ext cx="3179064" cy="1682496"/>
           </a:xfrm>
           <a:prstGeom prst="rect">
             <a:avLst/>
@@ -6085,7 +6334,7 @@
           <a:p>
             <a:pPr indent="0" marL="0">
               <a:spcAft>
-                <a:spcPts val="200"/>
+                <a:spcPts val="400"/>
               </a:spcAft>
               <a:buNone/>
             </a:pPr>
@@ -6095,31 +6344,157 @@
                   <a:srgbClr val="0F6E5C"/>
                 </a:solidFill>
               </a:rPr>
-              <a:t>상대 주소 API</a:t>
+              <a:t>저장 + 통지</a:t>
             </a:r>
             <a:endParaRPr lang="en-US" sz="1500" dirty="0"/>
           </a:p>
           <a:p>
             <a:pPr indent="0" marL="0">
+              <a:buNone/>
+            </a:pPr>
+            <a:r>
+              <a:rPr lang="en-US" sz="1300" dirty="0">
+                <a:solidFill>
+                  <a:srgbClr val="1B2A2F"/>
+                </a:solidFill>
+              </a:rPr>
+              <a:t>POST /api/setting → DB 저장 + AssetItemUpdateChannel</a:t>
+            </a:r>
+            <a:endParaRPr lang="en-US" sz="1500" dirty="0"/>
+          </a:p>
+        </p:txBody>
+      </p:sp>
+      <p:sp>
+        <p:nvSpPr>
+          <p:cNvPr id="7" name="card"/>
+          <p:cNvSpPr/>
+          <p:nvPr/>
+        </p:nvSpPr>
+        <p:spPr>
+          <a:xfrm>
+            <a:off x="4312920" y="4251960"/>
+            <a:ext cx="3581400" cy="2011680"/>
+          </a:xfrm>
+          <a:prstGeom prst="roundRect">
+            <a:avLst>
+              <a:gd name="adj" fmla="val 3636"/>
+            </a:avLst>
+          </a:prstGeom>
+          <a:solidFill>
+            <a:srgbClr val="E6F2EE"/>
+          </a:solidFill>
+          <a:ln w="12700">
+            <a:solidFill>
+              <a:srgbClr val="E6F2EE"/>
+            </a:solidFill>
+            <a:prstDash val="solid"/>
+          </a:ln>
+        </p:spPr>
+      </p:sp>
+      <p:sp>
+        <p:nvSpPr>
+          <p:cNvPr id="8" name="card-text"/>
+          <p:cNvSpPr txBox="1"/>
+          <p:nvPr/>
+        </p:nvSpPr>
+        <p:spPr>
+          <a:xfrm>
+            <a:off x="4514088" y="4416552"/>
+            <a:ext cx="3179064" cy="1682496"/>
+          </a:xfrm>
+          <a:prstGeom prst="rect">
+            <a:avLst/>
+          </a:prstGeom>
+          <a:noFill/>
+          <a:ln/>
+        </p:spPr>
+        <p:txBody>
+          <a:bodyPr wrap="square" rtlCol="0" anchor="t"/>
+          <a:lstStyle/>
+          <a:p>
+            <a:pPr indent="0" marL="0">
               <a:spcAft>
-                <a:spcPts val="1000"/>
+                <a:spcPts val="400"/>
               </a:spcAft>
               <a:buNone/>
             </a:pPr>
             <a:r>
+              <a:rPr lang="en-US" sz="1500" b="1" dirty="0">
+                <a:solidFill>
+                  <a:srgbClr val="0F6E5C"/>
+                </a:solidFill>
+              </a:rPr>
+              <a:t>다음 heartbeat 로 전달</a:t>
+            </a:r>
+            <a:endParaRPr lang="en-US" sz="1500" dirty="0"/>
+          </a:p>
+          <a:p>
+            <a:pPr indent="0" marL="0">
+              <a:buNone/>
+            </a:pPr>
+            <a:r>
               <a:rPr lang="en-US" sz="1300" dirty="0">
                 <a:solidFill>
                   <a:srgbClr val="1B2A2F"/>
                 </a:solidFill>
               </a:rPr>
-              <a:t>HttpClient BaseAddress = 현재 사이트 → 리버스 프록시 필수</a:t>
+              <a:t>StateManager 가 메모리 갱신 → 응답 SetParameter 로 도크 반영</a:t>
             </a:r>
             <a:endParaRPr lang="en-US" sz="1500" dirty="0"/>
           </a:p>
+        </p:txBody>
+      </p:sp>
+      <p:sp>
+        <p:nvSpPr>
+          <p:cNvPr id="9" name="card"/>
+          <p:cNvSpPr/>
+          <p:nvPr/>
+        </p:nvSpPr>
+        <p:spPr>
+          <a:xfrm>
+            <a:off x="8168640" y="4251960"/>
+            <a:ext cx="3581400" cy="2011680"/>
+          </a:xfrm>
+          <a:prstGeom prst="roundRect">
+            <a:avLst>
+              <a:gd name="adj" fmla="val 3636"/>
+            </a:avLst>
+          </a:prstGeom>
+          <a:solidFill>
+            <a:srgbClr val="FBEDEA"/>
+          </a:solidFill>
+          <a:ln w="12700">
+            <a:solidFill>
+              <a:srgbClr val="FBEDEA"/>
+            </a:solidFill>
+            <a:prstDash val="solid"/>
+          </a:ln>
+        </p:spPr>
+      </p:sp>
+      <p:sp>
+        <p:nvSpPr>
+          <p:cNvPr id="10" name="card-text"/>
+          <p:cNvSpPr txBox="1"/>
+          <p:nvPr/>
+        </p:nvSpPr>
+        <p:spPr>
+          <a:xfrm>
+            <a:off x="8369808" y="4416552"/>
+            <a:ext cx="3179064" cy="1682496"/>
+          </a:xfrm>
+          <a:prstGeom prst="rect">
+            <a:avLst/>
+          </a:prstGeom>
+          <a:noFill/>
+          <a:ln/>
+        </p:spPr>
+        <p:txBody>
+          <a:bodyPr wrap="square" rtlCol="0" anchor="t"/>
+          <a:lstStyle/>
           <a:p>
             <a:pPr indent="0" marL="0">
               <a:spcAft>
-                <a:spcPts val="200"/>
+                <a:spcPts val="400"/>
               </a:spcAft>
               <a:buNone/>
             </a:pPr>
@@ -6129,15 +6504,12 @@
                   <a:srgbClr val="B8452F"/>
                 </a:solidFill>
               </a:rPr>
-              <a:t>메뉴만 숨김</a:t>
+              <a:t>삭제는 미반영</a:t>
             </a:r>
             <a:endParaRPr lang="en-US" sz="1500" dirty="0"/>
           </a:p>
           <a:p>
             <a:pPr indent="0" marL="0">
-              <a:spcAft>
-                <a:spcPts val="1000"/>
-              </a:spcAft>
               <a:buNone/>
             </a:pPr>
             <a:r>
@@ -6146,38 +6518,7 @@
                   <a:srgbClr val="1B2A2F"/>
                 </a:solidFill>
               </a:rPr>
-              <a:t>MainLayout 이 역할별 메뉴만 숨기고, 페이지 자체는 로그인 확인 없음</a:t>
-            </a:r>
-            <a:endParaRPr lang="en-US" sz="1500" dirty="0"/>
-          </a:p>
-          <a:p>
-            <a:pPr indent="0" marL="0">
-              <a:spcAft>
-                <a:spcPts val="200"/>
-              </a:spcAft>
-              <a:buNone/>
-            </a:pPr>
-            <a:r>
-              <a:rPr lang="en-US" sz="1500" b="1" dirty="0">
-                <a:solidFill>
-                  <a:srgbClr val="0F6E5C"/>
-                </a:solidFill>
-              </a:rPr>
-              <a:t>Viewer 재사용</a:t>
-            </a:r>
-            <a:endParaRPr lang="en-US" sz="1500" dirty="0"/>
-          </a:p>
-          <a:p>
-            <a:pPr indent="0" marL="0">
-              <a:buNone/>
-            </a:pPr>
-            <a:r>
-              <a:rPr lang="en-US" sz="1300" dirty="0">
-                <a:solidFill>
-                  <a:srgbClr val="1B2A2F"/>
-                </a:solidFill>
-              </a:rPr>
-              <a:t>도면·도식 두 렌더러를 가진 Viewer 를 Monitoring 도 사용</a:t>
+              <a:t>DELETE 는 통지 없음 → 재시작 전까지 이전 값 전송</a:t>
             </a:r>
             <a:endParaRPr lang="en-US" sz="1500" dirty="0"/>
           </a:p>
@@ -6263,8 +6604,8 @@
         </p:nvSpPr>
         <p:spPr>
           <a:xfrm>
-            <a:off x="457200" y="274320"/>
-            <a:ext cx="11247120" cy="731520"/>
+            <a:off x="731520" y="2377440"/>
+            <a:ext cx="10698480" cy="1097280"/>
           </a:xfrm>
           <a:prstGeom prst="rect">
             <a:avLst/>
@@ -6273,112 +6614,36 @@
           <a:ln/>
         </p:spPr>
         <p:txBody>
-          <a:bodyPr wrap="square" lIns="0" tIns="0" rIns="0" bIns="0" rtlCol="0" anchor="ctr"/>
-          <a:lstStyle/>
-          <a:p>
-            <a:pPr indent="0" marL="0">
-              <a:buNone/>
-            </a:pPr>
-            <a:r>
-              <a:rPr lang="en-US" sz="3000" b="1" dirty="0">
-                <a:solidFill>
-                  <a:schemeClr val="tx2"/>
-                </a:solidFill>
-              </a:rPr>
-              <a:t>Viewer 데이터 흐름</a:t>
-            </a:r>
-            <a:endParaRPr lang="en-US" sz="3000" dirty="0"/>
-          </a:p>
-        </p:txBody>
-      </p:sp>
-      <p:sp>
-        <p:nvSpPr>
-          <p:cNvPr id="3" name="diagram-frame"/>
+          <a:bodyPr wrap="square" rtlCol="0"/>
+          <a:lstStyle/>
+          <a:p>
+            <a:pPr indent="0" marL="0">
+              <a:buNone/>
+            </a:pPr>
+            <a:r>
+              <a:rPr lang="en-US" sz="4000" b="1" dirty="0">
+                <a:solidFill>
+                  <a:schemeClr val="bg1"/>
+                </a:solidFill>
+              </a:rPr>
+              <a:t>DxfBlazorViewer.Client</a:t>
+            </a:r>
+            <a:endParaRPr lang="en-US" sz="4000" dirty="0"/>
+          </a:p>
+        </p:txBody>
+      </p:sp>
+      <p:sp>
+        <p:nvSpPr>
+          <p:cNvPr id="3" name="Text 0"/>
           <p:cNvSpPr/>
-          <p:nvPr/>
-        </p:nvSpPr>
-        <p:spPr>
-          <a:xfrm>
-            <a:off x="457200" y="1143000"/>
-            <a:ext cx="7818120" cy="5120640"/>
-          </a:xfrm>
-          <a:prstGeom prst="roundRect">
-            <a:avLst>
-              <a:gd name="adj" fmla="val 1429"/>
-            </a:avLst>
-          </a:prstGeom>
-          <a:solidFill>
-            <a:srgbClr val="FFFFFF"/>
-          </a:solidFill>
-          <a:ln w="12700">
-            <a:solidFill>
-              <a:srgbClr val="CBD5D8"/>
-            </a:solidFill>
-            <a:prstDash val="solid"/>
-          </a:ln>
-        </p:spPr>
-      </p:sp>
-      <p:pic>
-        <p:nvPicPr>
-          <p:cNvPr id="4" name="Viewer 데이터 흐름" descr="Viewer 데이터 흐름">    </p:cNvPr>
-          <p:cNvPicPr>
-            <a:picLocks noChangeAspect="1"/>
-          </p:cNvPicPr>
-          <p:nvPr/>
-        </p:nvPicPr>
-        <p:blipFill>
-          <a:blip r:embed="rId1"/>
-          <a:stretch>
-            <a:fillRect/>
-          </a:stretch>
-        </p:blipFill>
-        <p:spPr>
-          <a:xfrm>
-            <a:off x="1930284" y="1252728"/>
-            <a:ext cx="4871952" cy="4901184"/>
-          </a:xfrm>
-          <a:prstGeom prst="rect">
-            <a:avLst/>
-          </a:prstGeom>
-        </p:spPr>
-      </p:pic>
-      <p:sp>
-        <p:nvSpPr>
-          <p:cNvPr id="5" name="points-panel"/>
-          <p:cNvSpPr/>
-          <p:nvPr/>
-        </p:nvSpPr>
-        <p:spPr>
-          <a:xfrm>
-            <a:off x="8503920" y="1143000"/>
-            <a:ext cx="3246120" cy="5120640"/>
-          </a:xfrm>
-          <a:prstGeom prst="roundRect">
-            <a:avLst>
-              <a:gd name="adj" fmla="val 2254"/>
-            </a:avLst>
-          </a:prstGeom>
-          <a:solidFill>
-            <a:srgbClr val="E6F2EE"/>
-          </a:solidFill>
-          <a:ln w="12700">
-            <a:solidFill>
-              <a:srgbClr val="E6F2EE"/>
-            </a:solidFill>
-            <a:prstDash val="solid"/>
-          </a:ln>
-        </p:spPr>
-      </p:sp>
-      <p:sp>
-        <p:nvSpPr>
-          <p:cNvPr id="6" name="points-text"/>
-          <p:cNvSpPr txBox="1"/>
-          <p:nvPr/>
-        </p:nvSpPr>
-        <p:spPr>
-          <a:xfrm>
-            <a:off x="8732520" y="1325880"/>
-            <a:ext cx="2788920" cy="4754880"/>
+          <p:nvPr>
+            <p:ph idx="101" type="body" hasCustomPrompt="1"/>
+          </p:nvPr>
+        </p:nvSpPr>
+        <p:spPr>
+          <a:xfrm>
+            <a:off x="731520" y="3566160"/>
+            <a:ext cx="10698480" cy="914400"/>
           </a:xfrm>
           <a:prstGeom prst="rect">
             <a:avLst/>
@@ -6387,106 +6652,21 @@
           <a:ln/>
         </p:spPr>
         <p:txBody>
-          <a:bodyPr wrap="square" rtlCol="0" anchor="t"/>
-          <a:lstStyle/>
-          <a:p>
-            <a:pPr indent="0" marL="0">
-              <a:spcAft>
-                <a:spcPts val="200"/>
-              </a:spcAft>
-              <a:buNone/>
-            </a:pPr>
-            <a:r>
-              <a:rPr lang="en-US" sz="1500" b="1" dirty="0">
-                <a:solidFill>
-                  <a:srgbClr val="0F6E5C"/>
-                </a:solidFill>
-              </a:rPr>
-              <a:t>도면 1회 로드</a:t>
-            </a:r>
-            <a:endParaRPr lang="en-US" sz="1500" dirty="0"/>
-          </a:p>
-          <a:p>
-            <a:pPr indent="0" marL="0">
-              <a:spcAft>
-                <a:spcPts val="1000"/>
-              </a:spcAft>
-              <a:buNone/>
-            </a:pPr>
-            <a:r>
-              <a:rPr lang="en-US" sz="1300" dirty="0">
-                <a:solidFill>
-                  <a:srgbClr val="1B2A2F"/>
-                </a:solidFill>
-              </a:rPr>
-              <a:t>/api/dxf 를 MessagePack+LZ4 로 받아 렌더러 캐시 구성</a:t>
-            </a:r>
-            <a:endParaRPr lang="en-US" sz="1500" dirty="0"/>
-          </a:p>
-          <a:p>
-            <a:pPr indent="0" marL="0">
-              <a:spcAft>
-                <a:spcPts val="200"/>
-              </a:spcAft>
-              <a:buNone/>
-            </a:pPr>
-            <a:r>
-              <a:rPr lang="en-US" sz="1500" b="1" dirty="0">
-                <a:solidFill>
-                  <a:srgbClr val="0F6E5C"/>
-                </a:solidFill>
-              </a:rPr>
-              <a:t>폴링 3종</a:t>
-            </a:r>
-            <a:endParaRPr lang="en-US" sz="1500" dirty="0"/>
-          </a:p>
-          <a:p>
-            <a:pPr indent="0" marL="0">
-              <a:spcAft>
-                <a:spcPts val="1000"/>
-              </a:spcAft>
-              <a:buNone/>
-            </a:pPr>
-            <a:r>
-              <a:rPr lang="en-US" sz="1300" dirty="0">
-                <a:solidFill>
-                  <a:srgbClr val="1B2A2F"/>
-                </a:solidFill>
-              </a:rPr>
-              <a:t>처리수량 2초 · 도크 상태 1초 · 알람 1초 (재진입 방지)</a:t>
-            </a:r>
-            <a:endParaRPr lang="en-US" sz="1500" dirty="0"/>
-          </a:p>
-          <a:p>
-            <a:pPr indent="0" marL="0">
-              <a:spcAft>
-                <a:spcPts val="200"/>
-              </a:spcAft>
-              <a:buNone/>
-            </a:pPr>
-            <a:r>
-              <a:rPr lang="en-US" sz="1500" b="1" dirty="0">
-                <a:solidFill>
-                  <a:srgbClr val="0F6E5C"/>
-                </a:solidFill>
-              </a:rPr>
-              <a:t>SignalR</a:t>
-            </a:r>
-            <a:endParaRPr lang="en-US" sz="1500" dirty="0"/>
-          </a:p>
-          <a:p>
-            <a:pPr indent="0" marL="0">
-              <a:buNone/>
-            </a:pPr>
-            <a:r>
-              <a:rPr lang="en-US" sz="1300" dirty="0">
-                <a:solidFill>
-                  <a:srgbClr val="1B2A2F"/>
-                </a:solidFill>
-              </a:rPr>
-              <a:t>서버 시각·수집 통계만 수신, 도크 상태는 폴링</a:t>
-            </a:r>
-            <a:endParaRPr lang="en-US" sz="1500" dirty="0"/>
+          <a:bodyPr wrap="square" rtlCol="0"/>
+          <a:lstStyle/>
+          <a:p>
+            <a:pPr indent="0" marL="0">
+              <a:buNone/>
+            </a:pPr>
+            <a:r>
+              <a:rPr lang="en-US" sz="1800" dirty="0">
+                <a:solidFill>
+                  <a:srgbClr val="D6EFE7"/>
+                </a:solidFill>
+              </a:rPr>
+              <a:t>Blazor WASM · SkiaSharp 도면/도식 렌더링 · 폴링 + SignalR</a:t>
+            </a:r>
+            <a:endParaRPr lang="en-US" sz="1800" dirty="0"/>
           </a:p>
         </p:txBody>
       </p:sp>
@@ -6502,7 +6682,7 @@
         </p:nvSpPr>
         <p:spPr>
           <a:xfrm>
-            <a:off x="11247120" y="6446520"/>
+            <a:off x="11338560" y="6400800"/>
             <a:ext cx="548640" cy="274320"/>
           </a:xfrm>
           <a:prstGeom prst="rect">
@@ -6520,13 +6700,13 @@
             <a:lvl1pPr>
               <a:defRPr sz="1000">
                 <a:solidFill>
-                  <a:srgbClr val="5B6B70"/>
+                  <a:srgbClr val="D6EFE7"/>
                 </a:solidFill>
               </a:defRPr>
             </a:lvl1pPr>
           </a:lstStyle>
           <a:p>
-            <a:pPr algn="r"/>
+            <a:pPr algn="l"/>
             <a:fld id="{F7021451-1387-4CA6-816F-3879F97B5CBC}" type="slidenum">
               <a:rPr b="0" lang="en-US"/>
               <a:t>17</a:t>
@@ -6592,7 +6772,7 @@
                   <a:schemeClr val="tx2"/>
                 </a:solidFill>
               </a:rPr>
-              <a:t>도크 연결 상태 (끊김 패치 적용 후)</a:t>
+              <a:t>웹 UI 구성</a:t>
             </a:r>
             <a:endParaRPr lang="en-US" sz="3000" dirty="0"/>
           </a:p>
@@ -6607,11 +6787,11 @@
         <p:spPr>
           <a:xfrm>
             <a:off x="457200" y="1143000"/>
-            <a:ext cx="11292840" cy="2377440"/>
+            <a:ext cx="7818120" cy="5120640"/>
           </a:xfrm>
           <a:prstGeom prst="roundRect">
             <a:avLst>
-              <a:gd name="adj" fmla="val 3077"/>
+              <a:gd name="adj" fmla="val 1429"/>
             </a:avLst>
           </a:prstGeom>
           <a:solidFill>
@@ -6627,7 +6807,7 @@
       </p:sp>
       <p:pic>
         <p:nvPicPr>
-          <p:cNvPr id="4" name="도크 연결 상태 (끊김 패치 적용 후)" descr="도크 연결 상태 (끊김 패치 적용 후)">    </p:cNvPr>
+          <p:cNvPr id="4" name="웹 UI 구성" descr="웹 UI 구성">    </p:cNvPr>
           <p:cNvPicPr>
             <a:picLocks noChangeAspect="1"/>
           </p:cNvPicPr>
@@ -6641,8 +6821,8 @@
         </p:blipFill>
         <p:spPr>
           <a:xfrm>
-            <a:off x="1376394" y="1280160"/>
-            <a:ext cx="9454451" cy="2103120"/>
+            <a:off x="1923242" y="1252728"/>
+            <a:ext cx="4886037" cy="4901184"/>
           </a:xfrm>
           <a:prstGeom prst="rect">
             <a:avLst/>
@@ -6651,98 +6831,18 @@
       </p:pic>
       <p:sp>
         <p:nvSpPr>
-          <p:cNvPr id="5" name="card"/>
+          <p:cNvPr id="5" name="points-panel"/>
           <p:cNvSpPr/>
           <p:nvPr/>
         </p:nvSpPr>
         <p:spPr>
           <a:xfrm>
-            <a:off x="457200" y="3794760"/>
-            <a:ext cx="3581400" cy="2468880"/>
+            <a:off x="8503920" y="1143000"/>
+            <a:ext cx="3246120" cy="5120640"/>
           </a:xfrm>
           <a:prstGeom prst="roundRect">
             <a:avLst>
-              <a:gd name="adj" fmla="val 2963"/>
-            </a:avLst>
-          </a:prstGeom>
-          <a:solidFill>
-            <a:srgbClr val="FBEDEA"/>
-          </a:solidFill>
-          <a:ln w="12700">
-            <a:solidFill>
-              <a:srgbClr val="FBEDEA"/>
-            </a:solidFill>
-            <a:prstDash val="solid"/>
-          </a:ln>
-        </p:spPr>
-      </p:sp>
-      <p:sp>
-        <p:nvSpPr>
-          <p:cNvPr id="6" name="card-text"/>
-          <p:cNvSpPr txBox="1"/>
-          <p:nvPr/>
-        </p:nvSpPr>
-        <p:spPr>
-          <a:xfrm>
-            <a:off x="658368" y="3959352"/>
-            <a:ext cx="3179064" cy="2139696"/>
-          </a:xfrm>
-          <a:prstGeom prst="rect">
-            <a:avLst/>
-          </a:prstGeom>
-          <a:noFill/>
-          <a:ln/>
-        </p:spPr>
-        <p:txBody>
-          <a:bodyPr wrap="square" rtlCol="0" anchor="t"/>
-          <a:lstStyle/>
-          <a:p>
-            <a:pPr indent="0" marL="0">
-              <a:spcAft>
-                <a:spcPts val="400"/>
-              </a:spcAft>
-              <a:buNone/>
-            </a:pPr>
-            <a:r>
-              <a:rPr lang="en-US" sz="1500" b="1" dirty="0">
-                <a:solidFill>
-                  <a:srgbClr val="B8452F"/>
-                </a:solidFill>
-              </a:rPr>
-              <a:t>원본 문제 (B17)</a:t>
-            </a:r>
-            <a:endParaRPr lang="en-US" sz="1500" dirty="0"/>
-          </a:p>
-          <a:p>
-            <a:pPr indent="0" marL="0">
-              <a:buNone/>
-            </a:pPr>
-            <a:r>
-              <a:rPr lang="en-US" sz="1300" dirty="0">
-                <a:solidFill>
-                  <a:srgbClr val="1B2A2F"/>
-                </a:solidFill>
-              </a:rPr>
-              <a:t>서버·화면 모두 수신 시각 판정 없음 → 끊긴 도크가 마지막 상태 유지</a:t>
-            </a:r>
-            <a:endParaRPr lang="en-US" sz="1500" dirty="0"/>
-          </a:p>
-        </p:txBody>
-      </p:sp>
-      <p:sp>
-        <p:nvSpPr>
-          <p:cNvPr id="7" name="card"/>
-          <p:cNvSpPr/>
-          <p:nvPr/>
-        </p:nvSpPr>
-        <p:spPr>
-          <a:xfrm>
-            <a:off x="4312920" y="3794760"/>
-            <a:ext cx="3581400" cy="2468880"/>
-          </a:xfrm>
-          <a:prstGeom prst="roundRect">
-            <a:avLst>
-              <a:gd name="adj" fmla="val 2963"/>
+              <a:gd name="adj" fmla="val 2254"/>
             </a:avLst>
           </a:prstGeom>
           <a:solidFill>
@@ -6758,14 +6858,14 @@
       </p:sp>
       <p:sp>
         <p:nvSpPr>
-          <p:cNvPr id="8" name="card-text"/>
+          <p:cNvPr id="6" name="points-text"/>
           <p:cNvSpPr txBox="1"/>
           <p:nvPr/>
         </p:nvSpPr>
         <p:spPr>
           <a:xfrm>
-            <a:off x="4514088" y="3959352"/>
-            <a:ext cx="3179064" cy="2139696"/>
+            <a:off x="8732520" y="1325880"/>
+            <a:ext cx="2788920" cy="4754880"/>
           </a:xfrm>
           <a:prstGeom prst="rect">
             <a:avLst/>
@@ -6779,7 +6879,7 @@
           <a:p>
             <a:pPr indent="0" marL="0">
               <a:spcAft>
-                <a:spcPts val="400"/>
+                <a:spcPts val="200"/>
               </a:spcAft>
               <a:buNone/>
             </a:pPr>
@@ -6789,12 +6889,15 @@
                   <a:srgbClr val="0F6E5C"/>
                 </a:solidFill>
               </a:rPr>
-              <a:t>판정</a:t>
+              <a:t>상대 주소 API</a:t>
             </a:r>
             <a:endParaRPr lang="en-US" sz="1500" dirty="0"/>
           </a:p>
           <a:p>
             <a:pPr indent="0" marL="0">
+              <a:spcAft>
+                <a:spcPts val="1000"/>
+              </a:spcAft>
               <a:buNone/>
             </a:pPr>
             <a:r>
@@ -6803,73 +6906,58 @@
                   <a:srgbClr val="1B2A2F"/>
                 </a:solidFill>
               </a:rPr>
-              <a:t>Connected=false 또는 서버시각 - ReceivedAt &gt; TimeoutSeconds → Offline(진회색)</a:t>
+              <a:t>HttpClient BaseAddress = 현재 사이트 → 리버스 프록시 필수</a:t>
             </a:r>
             <a:endParaRPr lang="en-US" sz="1500" dirty="0"/>
           </a:p>
-        </p:txBody>
-      </p:sp>
-      <p:sp>
-        <p:nvSpPr>
-          <p:cNvPr id="9" name="card"/>
-          <p:cNvSpPr/>
-          <p:nvPr/>
-        </p:nvSpPr>
-        <p:spPr>
-          <a:xfrm>
-            <a:off x="8168640" y="3794760"/>
-            <a:ext cx="3581400" cy="2468880"/>
-          </a:xfrm>
-          <a:prstGeom prst="roundRect">
-            <a:avLst>
-              <a:gd name="adj" fmla="val 2963"/>
-            </a:avLst>
-          </a:prstGeom>
-          <a:solidFill>
-            <a:srgbClr val="E6F2EE"/>
-          </a:solidFill>
-          <a:ln w="12700">
-            <a:solidFill>
-              <a:srgbClr val="E6F2EE"/>
-            </a:solidFill>
-            <a:prstDash val="solid"/>
-          </a:ln>
-        </p:spPr>
-      </p:sp>
-      <p:sp>
-        <p:nvSpPr>
-          <p:cNvPr id="10" name="card-text"/>
-          <p:cNvSpPr txBox="1"/>
-          <p:nvPr/>
-        </p:nvSpPr>
-        <p:spPr>
-          <a:xfrm>
-            <a:off x="8369808" y="3959352"/>
-            <a:ext cx="3179064" cy="2139696"/>
-          </a:xfrm>
-          <a:prstGeom prst="rect">
-            <a:avLst/>
-          </a:prstGeom>
-          <a:noFill/>
-          <a:ln/>
-        </p:spPr>
-        <p:txBody>
-          <a:bodyPr wrap="square" rtlCol="0" anchor="t"/>
-          <a:lstStyle/>
           <a:p>
             <a:pPr indent="0" marL="0">
               <a:spcAft>
-                <a:spcPts val="400"/>
+                <a:spcPts val="200"/>
               </a:spcAft>
               <a:buNone/>
             </a:pPr>
             <a:r>
               <a:rPr lang="en-US" sz="1500" b="1" dirty="0">
                 <a:solidFill>
+                  <a:srgbClr val="B8452F"/>
+                </a:solidFill>
+              </a:rPr>
+              <a:t>메뉴만 숨김</a:t>
+            </a:r>
+            <a:endParaRPr lang="en-US" sz="1500" dirty="0"/>
+          </a:p>
+          <a:p>
+            <a:pPr indent="0" marL="0">
+              <a:spcAft>
+                <a:spcPts val="1000"/>
+              </a:spcAft>
+              <a:buNone/>
+            </a:pPr>
+            <a:r>
+              <a:rPr lang="en-US" sz="1300" dirty="0">
+                <a:solidFill>
+                  <a:srgbClr val="1B2A2F"/>
+                </a:solidFill>
+              </a:rPr>
+              <a:t>MainLayout 이 역할별 메뉴만 숨기고, 페이지 자체는 로그인 확인 없음</a:t>
+            </a:r>
+            <a:endParaRPr lang="en-US" sz="1500" dirty="0"/>
+          </a:p>
+          <a:p>
+            <a:pPr indent="0" marL="0">
+              <a:spcAft>
+                <a:spcPts val="200"/>
+              </a:spcAft>
+              <a:buNone/>
+            </a:pPr>
+            <a:r>
+              <a:rPr lang="en-US" sz="1500" b="1" dirty="0">
+                <a:solidFill>
                   <a:srgbClr val="0F6E5C"/>
                 </a:solidFill>
               </a:rPr>
-              <a:t>이력</a:t>
+              <a:t>Viewer 재사용</a:t>
             </a:r>
             <a:endParaRPr lang="en-US" sz="1500" dirty="0"/>
           </a:p>
@@ -6883,7 +6971,7 @@
                   <a:srgbClr val="1B2A2F"/>
                 </a:solidFill>
               </a:rPr>
-              <a:t>끊김 E0000.0050 · 복구 E0000.0051 을 ftms_event_log 에 기록</a:t>
+              <a:t>도면·도식 두 렌더러를 가진 Viewer 를 Monitoring 도 사용</a:t>
             </a:r>
             <a:endParaRPr lang="en-US" sz="1500" dirty="0"/>
           </a:p>
@@ -6991,7 +7079,7 @@
                   <a:schemeClr val="tx2"/>
                 </a:solidFill>
               </a:rPr>
-              <a:t>주의 사항 요약</a:t>
+              <a:t>Viewer 데이터 흐름</a:t>
             </a:r>
             <a:endParaRPr lang="en-US" sz="3000" dirty="0"/>
           </a:p>
@@ -6999,18 +7087,18 @@
       </p:sp>
       <p:sp>
         <p:nvSpPr>
-          <p:cNvPr id="3" name="card"/>
+          <p:cNvPr id="3" name="diagram-frame"/>
           <p:cNvSpPr/>
           <p:nvPr/>
         </p:nvSpPr>
         <p:spPr>
           <a:xfrm>
-            <a:off x="457200" y="1234440"/>
-            <a:ext cx="3611880" cy="2286000"/>
+            <a:off x="457200" y="1143000"/>
+            <a:ext cx="7818120" cy="5120640"/>
           </a:xfrm>
           <a:prstGeom prst="roundRect">
             <a:avLst>
-              <a:gd name="adj" fmla="val 3200"/>
+              <a:gd name="adj" fmla="val 1429"/>
             </a:avLst>
           </a:prstGeom>
           <a:solidFill>
@@ -7022,35 +7110,54 @@
             </a:solidFill>
             <a:prstDash val="solid"/>
           </a:ln>
-          <a:effectLst>
-            <a:outerShdw sx="100000" sy="100000" kx="0" ky="0" algn="bl" rotWithShape="0" blurRad="76200" dist="25400" dir="5400000">
-              <a:srgbClr val="000000">
-                <a:alpha val="12000"/>
-              </a:srgbClr>
-            </a:outerShdw>
-          </a:effectLst>
-        </p:spPr>
-      </p:sp>
-      <p:sp>
-        <p:nvSpPr>
-          <p:cNvPr id="4" name="badge"/>
+        </p:spPr>
+      </p:sp>
+      <p:pic>
+        <p:nvPicPr>
+          <p:cNvPr id="4" name="Viewer 데이터 흐름" descr="Viewer 데이터 흐름">    </p:cNvPr>
+          <p:cNvPicPr>
+            <a:picLocks noChangeAspect="1"/>
+          </p:cNvPicPr>
+          <p:nvPr/>
+        </p:nvPicPr>
+        <p:blipFill>
+          <a:blip r:embed="rId1"/>
+          <a:stretch>
+            <a:fillRect/>
+          </a:stretch>
+        </p:blipFill>
+        <p:spPr>
+          <a:xfrm>
+            <a:off x="1930284" y="1252728"/>
+            <a:ext cx="4871952" cy="4901184"/>
+          </a:xfrm>
+          <a:prstGeom prst="rect">
+            <a:avLst/>
+          </a:prstGeom>
+        </p:spPr>
+      </p:pic>
+      <p:sp>
+        <p:nvSpPr>
+          <p:cNvPr id="5" name="points-panel"/>
           <p:cNvSpPr/>
           <p:nvPr/>
         </p:nvSpPr>
         <p:spPr>
           <a:xfrm>
-            <a:off x="658368" y="1435608"/>
-            <a:ext cx="457200" cy="457200"/>
-          </a:xfrm>
-          <a:prstGeom prst="ellipse">
-            <a:avLst/>
+            <a:off x="8503920" y="1143000"/>
+            <a:ext cx="3246120" cy="5120640"/>
+          </a:xfrm>
+          <a:prstGeom prst="roundRect">
+            <a:avLst>
+              <a:gd name="adj" fmla="val 2254"/>
+            </a:avLst>
           </a:prstGeom>
           <a:solidFill>
-            <a:srgbClr val="B8452F"/>
+            <a:srgbClr val="E6F2EE"/>
           </a:solidFill>
           <a:ln w="12700">
             <a:solidFill>
-              <a:srgbClr val="B8452F"/>
+              <a:srgbClr val="E6F2EE"/>
             </a:solidFill>
             <a:prstDash val="solid"/>
           </a:ln>
@@ -7058,14 +7165,14 @@
       </p:sp>
       <p:sp>
         <p:nvSpPr>
-          <p:cNvPr id="5" name="badge-num"/>
+          <p:cNvPr id="6" name="points-text"/>
           <p:cNvSpPr txBox="1"/>
           <p:nvPr/>
         </p:nvSpPr>
         <p:spPr>
           <a:xfrm>
-            <a:off x="658368" y="1435608"/>
-            <a:ext cx="457200" cy="457200"/>
+            <a:off x="8732520" y="1325880"/>
+            <a:ext cx="2788920" cy="4754880"/>
           </a:xfrm>
           <a:prstGeom prst="rect">
             <a:avLst/>
@@ -7074,82 +7181,64 @@
           <a:ln/>
         </p:spPr>
         <p:txBody>
-          <a:bodyPr wrap="square" lIns="0" tIns="0" rIns="0" bIns="0" rtlCol="0" anchor="ctr"/>
-          <a:lstStyle/>
-          <a:p>
-            <a:pPr algn="ctr" indent="0" marL="0">
+          <a:bodyPr wrap="square" rtlCol="0" anchor="t"/>
+          <a:lstStyle/>
+          <a:p>
+            <a:pPr indent="0" marL="0">
+              <a:spcAft>
+                <a:spcPts val="200"/>
+              </a:spcAft>
               <a:buNone/>
             </a:pPr>
             <a:r>
               <a:rPr lang="en-US" sz="1500" b="1" dirty="0">
                 <a:solidFill>
-                  <a:srgbClr val="FFFFFF"/>
-                </a:solidFill>
-              </a:rPr>
-              <a:t>1</a:t>
+                  <a:srgbClr val="0F6E5C"/>
+                </a:solidFill>
+              </a:rPr>
+              <a:t>도면 1회 로드</a:t>
             </a:r>
             <a:endParaRPr lang="en-US" sz="1500" dirty="0"/>
           </a:p>
-        </p:txBody>
-      </p:sp>
-      <p:sp>
-        <p:nvSpPr>
-          <p:cNvPr id="6" name="card-head"/>
-          <p:cNvSpPr txBox="1"/>
-          <p:nvPr/>
-        </p:nvSpPr>
-        <p:spPr>
-          <a:xfrm>
-            <a:off x="1234440" y="1417320"/>
-            <a:ext cx="2651760" cy="502920"/>
-          </a:xfrm>
-          <a:prstGeom prst="rect">
-            <a:avLst/>
-          </a:prstGeom>
-          <a:noFill/>
-          <a:ln/>
-        </p:spPr>
-        <p:txBody>
-          <a:bodyPr wrap="square" lIns="0" tIns="0" rIns="0" bIns="0" rtlCol="0" anchor="ctr"/>
-          <a:lstStyle/>
-          <a:p>
-            <a:pPr indent="0" marL="0">
-              <a:buNone/>
-            </a:pPr>
-            <a:r>
-              <a:rPr lang="en-US" sz="1600" b="1" dirty="0">
+          <a:p>
+            <a:pPr indent="0" marL="0">
+              <a:spcAft>
+                <a:spcPts val="1000"/>
+              </a:spcAft>
+              <a:buNone/>
+            </a:pPr>
+            <a:r>
+              <a:rPr lang="en-US" sz="1300" dirty="0">
                 <a:solidFill>
                   <a:srgbClr val="1B2A2F"/>
                 </a:solidFill>
               </a:rPr>
-              <a:t>보안</a:t>
-            </a:r>
-            <a:endParaRPr lang="en-US" sz="1600" dirty="0"/>
-          </a:p>
-        </p:txBody>
-      </p:sp>
-      <p:sp>
-        <p:nvSpPr>
-          <p:cNvPr id="7" name="card-body"/>
-          <p:cNvSpPr txBox="1"/>
-          <p:nvPr/>
-        </p:nvSpPr>
-        <p:spPr>
-          <a:xfrm>
-            <a:off x="685800" y="2011680"/>
-            <a:ext cx="3154680" cy="1371600"/>
-          </a:xfrm>
-          <a:prstGeom prst="rect">
-            <a:avLst/>
-          </a:prstGeom>
-          <a:noFill/>
-          <a:ln/>
-        </p:spPr>
-        <p:txBody>
-          <a:bodyPr wrap="square" lIns="0" tIns="0" rIns="0" bIns="0" rtlCol="0" anchor="t"/>
-          <a:lstStyle/>
-          <a:p>
-            <a:pPr indent="0" marL="0">
+              <a:t>/api/dxf 를 MessagePack+LZ4 로 받아 렌더러 캐시 구성</a:t>
+            </a:r>
+            <a:endParaRPr lang="en-US" sz="1500" dirty="0"/>
+          </a:p>
+          <a:p>
+            <a:pPr indent="0" marL="0">
+              <a:spcAft>
+                <a:spcPts val="200"/>
+              </a:spcAft>
+              <a:buNone/>
+            </a:pPr>
+            <a:r>
+              <a:rPr lang="en-US" sz="1500" b="1" dirty="0">
+                <a:solidFill>
+                  <a:srgbClr val="0F6E5C"/>
+                </a:solidFill>
+              </a:rPr>
+              <a:t>폴링 3종</a:t>
+            </a:r>
+            <a:endParaRPr lang="en-US" sz="1500" dirty="0"/>
+          </a:p>
+          <a:p>
+            <a:pPr indent="0" marL="0">
+              <a:spcAft>
+                <a:spcPts val="1000"/>
+              </a:spcAft>
               <a:buNone/>
             </a:pPr>
             <a:r>
@@ -7158,844 +7247,40 @@
                   <a:srgbClr val="1B2A2F"/>
                 </a:solidFill>
               </a:rPr>
-              <a:t>익명 Admin 가입, API·SignalR·TCP 무인증, 기본 계정, 비밀키 포함</a:t>
-            </a:r>
-            <a:endParaRPr lang="en-US" sz="1300" dirty="0"/>
-          </a:p>
-        </p:txBody>
-      </p:sp>
-      <p:sp>
-        <p:nvSpPr>
-          <p:cNvPr id="8" name="card"/>
-          <p:cNvSpPr/>
-          <p:nvPr/>
-        </p:nvSpPr>
-        <p:spPr>
-          <a:xfrm>
-            <a:off x="4279392" y="1234440"/>
-            <a:ext cx="3611880" cy="2286000"/>
-          </a:xfrm>
-          <a:prstGeom prst="roundRect">
-            <a:avLst>
-              <a:gd name="adj" fmla="val 3200"/>
-            </a:avLst>
-          </a:prstGeom>
-          <a:solidFill>
-            <a:srgbClr val="FFFFFF"/>
-          </a:solidFill>
-          <a:ln w="12700">
-            <a:solidFill>
-              <a:srgbClr val="CBD5D8"/>
-            </a:solidFill>
-            <a:prstDash val="solid"/>
-          </a:ln>
-          <a:effectLst>
-            <a:outerShdw sx="100000" sy="100000" kx="0" ky="0" algn="bl" rotWithShape="0" blurRad="76200" dist="25400" dir="5400000">
-              <a:srgbClr val="000000">
-                <a:alpha val="12000"/>
-              </a:srgbClr>
-            </a:outerShdw>
-          </a:effectLst>
-        </p:spPr>
-      </p:sp>
-      <p:sp>
-        <p:nvSpPr>
-          <p:cNvPr id="9" name="badge"/>
-          <p:cNvSpPr/>
-          <p:nvPr/>
-        </p:nvSpPr>
-        <p:spPr>
-          <a:xfrm>
-            <a:off x="4480560" y="1435608"/>
-            <a:ext cx="457200" cy="457200"/>
-          </a:xfrm>
-          <a:prstGeom prst="ellipse">
-            <a:avLst/>
-          </a:prstGeom>
-          <a:solidFill>
-            <a:srgbClr val="C99A00"/>
-          </a:solidFill>
-          <a:ln w="12700">
-            <a:solidFill>
-              <a:srgbClr val="C99A00"/>
-            </a:solidFill>
-            <a:prstDash val="solid"/>
-          </a:ln>
-        </p:spPr>
-      </p:sp>
-      <p:sp>
-        <p:nvSpPr>
-          <p:cNvPr id="10" name="badge-num"/>
-          <p:cNvSpPr txBox="1"/>
-          <p:nvPr/>
-        </p:nvSpPr>
-        <p:spPr>
-          <a:xfrm>
-            <a:off x="4480560" y="1435608"/>
-            <a:ext cx="457200" cy="457200"/>
-          </a:xfrm>
-          <a:prstGeom prst="rect">
-            <a:avLst/>
-          </a:prstGeom>
-          <a:noFill/>
-          <a:ln/>
-        </p:spPr>
-        <p:txBody>
-          <a:bodyPr wrap="square" lIns="0" tIns="0" rIns="0" bIns="0" rtlCol="0" anchor="ctr"/>
-          <a:lstStyle/>
-          <a:p>
-            <a:pPr algn="ctr" indent="0" marL="0">
+              <a:t>처리수량 2초 · 도크 상태 1초 · 알람 1초 (재진입 방지)</a:t>
+            </a:r>
+            <a:endParaRPr lang="en-US" sz="1500" dirty="0"/>
+          </a:p>
+          <a:p>
+            <a:pPr indent="0" marL="0">
+              <a:spcAft>
+                <a:spcPts val="200"/>
+              </a:spcAft>
               <a:buNone/>
             </a:pPr>
             <a:r>
               <a:rPr lang="en-US" sz="1500" b="1" dirty="0">
                 <a:solidFill>
-                  <a:srgbClr val="FFFFFF"/>
-                </a:solidFill>
-              </a:rPr>
-              <a:t>2</a:t>
+                  <a:srgbClr val="0F6E5C"/>
+                </a:solidFill>
+              </a:rPr>
+              <a:t>SignalR</a:t>
             </a:r>
             <a:endParaRPr lang="en-US" sz="1500" dirty="0"/>
           </a:p>
-        </p:txBody>
-      </p:sp>
-      <p:sp>
-        <p:nvSpPr>
-          <p:cNvPr id="11" name="card-head"/>
-          <p:cNvSpPr txBox="1"/>
-          <p:nvPr/>
-        </p:nvSpPr>
-        <p:spPr>
-          <a:xfrm>
-            <a:off x="5056632" y="1417320"/>
-            <a:ext cx="2651760" cy="502920"/>
-          </a:xfrm>
-          <a:prstGeom prst="rect">
-            <a:avLst/>
-          </a:prstGeom>
-          <a:noFill/>
-          <a:ln/>
-        </p:spPr>
-        <p:txBody>
-          <a:bodyPr wrap="square" lIns="0" tIns="0" rIns="0" bIns="0" rtlCol="0" anchor="ctr"/>
-          <a:lstStyle/>
-          <a:p>
-            <a:pPr indent="0" marL="0">
-              <a:buNone/>
-            </a:pPr>
-            <a:r>
-              <a:rPr lang="en-US" sz="1600" b="1" dirty="0">
+          <a:p>
+            <a:pPr indent="0" marL="0">
+              <a:buNone/>
+            </a:pPr>
+            <a:r>
+              <a:rPr lang="en-US" sz="1300" dirty="0">
                 <a:solidFill>
                   <a:srgbClr val="1B2A2F"/>
                 </a:solidFill>
               </a:rPr>
-              <a:t>기동</a:t>
-            </a:r>
-            <a:endParaRPr lang="en-US" sz="1600" dirty="0"/>
-          </a:p>
-        </p:txBody>
-      </p:sp>
-      <p:sp>
-        <p:nvSpPr>
-          <p:cNvPr id="12" name="card-body"/>
-          <p:cNvSpPr txBox="1"/>
-          <p:nvPr/>
-        </p:nvSpPr>
-        <p:spPr>
-          <a:xfrm>
-            <a:off x="4507992" y="2011680"/>
-            <a:ext cx="3154680" cy="1371600"/>
-          </a:xfrm>
-          <a:prstGeom prst="rect">
-            <a:avLst/>
-          </a:prstGeom>
-          <a:noFill/>
-          <a:ln/>
-        </p:spPr>
-        <p:txBody>
-          <a:bodyPr wrap="square" lIns="0" tIns="0" rIns="0" bIns="0" rtlCol="0" anchor="t"/>
-          <a:lstStyle/>
-          <a:p>
-            <a:pPr indent="0" marL="0">
-              <a:buNone/>
-            </a:pPr>
-            <a:r>
-              <a:rPr lang="en-US" sz="1300" dirty="0">
-                <a:solidFill>
-                  <a:srgbClr val="1B2A2F"/>
-                </a:solidFill>
-              </a:rPr>
-              <a:t>DB 연결 후에야 8121 개방, 재시도 없음 (B12)</a:t>
-            </a:r>
-            <a:endParaRPr lang="en-US" sz="1300" dirty="0"/>
-          </a:p>
-        </p:txBody>
-      </p:sp>
-      <p:sp>
-        <p:nvSpPr>
-          <p:cNvPr id="13" name="card"/>
-          <p:cNvSpPr/>
-          <p:nvPr/>
-        </p:nvSpPr>
-        <p:spPr>
-          <a:xfrm>
-            <a:off x="8101584" y="1234440"/>
-            <a:ext cx="3611880" cy="2286000"/>
-          </a:xfrm>
-          <a:prstGeom prst="roundRect">
-            <a:avLst>
-              <a:gd name="adj" fmla="val 3200"/>
-            </a:avLst>
-          </a:prstGeom>
-          <a:solidFill>
-            <a:srgbClr val="FFFFFF"/>
-          </a:solidFill>
-          <a:ln w="12700">
-            <a:solidFill>
-              <a:srgbClr val="CBD5D8"/>
-            </a:solidFill>
-            <a:prstDash val="solid"/>
-          </a:ln>
-          <a:effectLst>
-            <a:outerShdw sx="100000" sy="100000" kx="0" ky="0" algn="bl" rotWithShape="0" blurRad="76200" dist="25400" dir="5400000">
-              <a:srgbClr val="000000">
-                <a:alpha val="12000"/>
-              </a:srgbClr>
-            </a:outerShdw>
-          </a:effectLst>
-        </p:spPr>
-      </p:sp>
-      <p:sp>
-        <p:nvSpPr>
-          <p:cNvPr id="14" name="badge"/>
-          <p:cNvSpPr/>
-          <p:nvPr/>
-        </p:nvSpPr>
-        <p:spPr>
-          <a:xfrm>
-            <a:off x="8302752" y="1435608"/>
-            <a:ext cx="457200" cy="457200"/>
-          </a:xfrm>
-          <a:prstGeom prst="ellipse">
-            <a:avLst/>
-          </a:prstGeom>
-          <a:solidFill>
-            <a:srgbClr val="C99A00"/>
-          </a:solidFill>
-          <a:ln w="12700">
-            <a:solidFill>
-              <a:srgbClr val="C99A00"/>
-            </a:solidFill>
-            <a:prstDash val="solid"/>
-          </a:ln>
-        </p:spPr>
-      </p:sp>
-      <p:sp>
-        <p:nvSpPr>
-          <p:cNvPr id="15" name="badge-num"/>
-          <p:cNvSpPr txBox="1"/>
-          <p:nvPr/>
-        </p:nvSpPr>
-        <p:spPr>
-          <a:xfrm>
-            <a:off x="8302752" y="1435608"/>
-            <a:ext cx="457200" cy="457200"/>
-          </a:xfrm>
-          <a:prstGeom prst="rect">
-            <a:avLst/>
-          </a:prstGeom>
-          <a:noFill/>
-          <a:ln/>
-        </p:spPr>
-        <p:txBody>
-          <a:bodyPr wrap="square" lIns="0" tIns="0" rIns="0" bIns="0" rtlCol="0" anchor="ctr"/>
-          <a:lstStyle/>
-          <a:p>
-            <a:pPr algn="ctr" indent="0" marL="0">
-              <a:buNone/>
-            </a:pPr>
-            <a:r>
-              <a:rPr lang="en-US" sz="1500" b="1" dirty="0">
-                <a:solidFill>
-                  <a:srgbClr val="FFFFFF"/>
-                </a:solidFill>
-              </a:rPr>
-              <a:t>3</a:t>
+              <a:t>서버 시각·수집 통계만 수신, 도크 상태는 폴링</a:t>
             </a:r>
             <a:endParaRPr lang="en-US" sz="1500" dirty="0"/>
-          </a:p>
-        </p:txBody>
-      </p:sp>
-      <p:sp>
-        <p:nvSpPr>
-          <p:cNvPr id="16" name="card-head"/>
-          <p:cNvSpPr txBox="1"/>
-          <p:nvPr/>
-        </p:nvSpPr>
-        <p:spPr>
-          <a:xfrm>
-            <a:off x="8878824" y="1417320"/>
-            <a:ext cx="2651760" cy="502920"/>
-          </a:xfrm>
-          <a:prstGeom prst="rect">
-            <a:avLst/>
-          </a:prstGeom>
-          <a:noFill/>
-          <a:ln/>
-        </p:spPr>
-        <p:txBody>
-          <a:bodyPr wrap="square" lIns="0" tIns="0" rIns="0" bIns="0" rtlCol="0" anchor="ctr"/>
-          <a:lstStyle/>
-          <a:p>
-            <a:pPr indent="0" marL="0">
-              <a:buNone/>
-            </a:pPr>
-            <a:r>
-              <a:rPr lang="en-US" sz="1600" b="1" dirty="0">
-                <a:solidFill>
-                  <a:srgbClr val="1B2A2F"/>
-                </a:solidFill>
-              </a:rPr>
-              <a:t>상태 영속화</a:t>
-            </a:r>
-            <a:endParaRPr lang="en-US" sz="1600" dirty="0"/>
-          </a:p>
-        </p:txBody>
-      </p:sp>
-      <p:sp>
-        <p:nvSpPr>
-          <p:cNvPr id="17" name="card-body"/>
-          <p:cNvSpPr txBox="1"/>
-          <p:nvPr/>
-        </p:nvSpPr>
-        <p:spPr>
-          <a:xfrm>
-            <a:off x="8330184" y="2011680"/>
-            <a:ext cx="3154680" cy="1371600"/>
-          </a:xfrm>
-          <a:prstGeom prst="rect">
-            <a:avLst/>
-          </a:prstGeom>
-          <a:noFill/>
-          <a:ln/>
-        </p:spPr>
-        <p:txBody>
-          <a:bodyPr wrap="square" lIns="0" tIns="0" rIns="0" bIns="0" rtlCol="0" anchor="t"/>
-          <a:lstStyle/>
-          <a:p>
-            <a:pPr indent="0" marL="0">
-              <a:buNone/>
-            </a:pPr>
-            <a:r>
-              <a:rPr lang="en-US" sz="1300" dirty="0">
-                <a:solidFill>
-                  <a:srgbClr val="1B2A2F"/>
-                </a:solidFill>
-              </a:rPr>
-              <a:t>저장/복원 테이블 불일치로 재시작 시 미복원 (B15)</a:t>
-            </a:r>
-            <a:endParaRPr lang="en-US" sz="1300" dirty="0"/>
-          </a:p>
-        </p:txBody>
-      </p:sp>
-      <p:sp>
-        <p:nvSpPr>
-          <p:cNvPr id="18" name="card"/>
-          <p:cNvSpPr/>
-          <p:nvPr/>
-        </p:nvSpPr>
-        <p:spPr>
-          <a:xfrm>
-            <a:off x="457200" y="3749040"/>
-            <a:ext cx="3611880" cy="2286000"/>
-          </a:xfrm>
-          <a:prstGeom prst="roundRect">
-            <a:avLst>
-              <a:gd name="adj" fmla="val 3200"/>
-            </a:avLst>
-          </a:prstGeom>
-          <a:solidFill>
-            <a:srgbClr val="FFFFFF"/>
-          </a:solidFill>
-          <a:ln w="12700">
-            <a:solidFill>
-              <a:srgbClr val="CBD5D8"/>
-            </a:solidFill>
-            <a:prstDash val="solid"/>
-          </a:ln>
-          <a:effectLst>
-            <a:outerShdw sx="100000" sy="100000" kx="0" ky="0" algn="bl" rotWithShape="0" blurRad="76200" dist="25400" dir="5400000">
-              <a:srgbClr val="000000">
-                <a:alpha val="12000"/>
-              </a:srgbClr>
-            </a:outerShdw>
-          </a:effectLst>
-        </p:spPr>
-      </p:sp>
-      <p:sp>
-        <p:nvSpPr>
-          <p:cNvPr id="19" name="badge"/>
-          <p:cNvSpPr/>
-          <p:nvPr/>
-        </p:nvSpPr>
-        <p:spPr>
-          <a:xfrm>
-            <a:off x="658368" y="3950208"/>
-            <a:ext cx="457200" cy="457200"/>
-          </a:xfrm>
-          <a:prstGeom prst="ellipse">
-            <a:avLst/>
-          </a:prstGeom>
-          <a:solidFill>
-            <a:srgbClr val="C99A00"/>
-          </a:solidFill>
-          <a:ln w="12700">
-            <a:solidFill>
-              <a:srgbClr val="C99A00"/>
-            </a:solidFill>
-            <a:prstDash val="solid"/>
-          </a:ln>
-        </p:spPr>
-      </p:sp>
-      <p:sp>
-        <p:nvSpPr>
-          <p:cNvPr id="20" name="badge-num"/>
-          <p:cNvSpPr txBox="1"/>
-          <p:nvPr/>
-        </p:nvSpPr>
-        <p:spPr>
-          <a:xfrm>
-            <a:off x="658368" y="3950208"/>
-            <a:ext cx="457200" cy="457200"/>
-          </a:xfrm>
-          <a:prstGeom prst="rect">
-            <a:avLst/>
-          </a:prstGeom>
-          <a:noFill/>
-          <a:ln/>
-        </p:spPr>
-        <p:txBody>
-          <a:bodyPr wrap="square" lIns="0" tIns="0" rIns="0" bIns="0" rtlCol="0" anchor="ctr"/>
-          <a:lstStyle/>
-          <a:p>
-            <a:pPr algn="ctr" indent="0" marL="0">
-              <a:buNone/>
-            </a:pPr>
-            <a:r>
-              <a:rPr lang="en-US" sz="1500" b="1" dirty="0">
-                <a:solidFill>
-                  <a:srgbClr val="FFFFFF"/>
-                </a:solidFill>
-              </a:rPr>
-              <a:t>4</a:t>
-            </a:r>
-            <a:endParaRPr lang="en-US" sz="1500" dirty="0"/>
-          </a:p>
-        </p:txBody>
-      </p:sp>
-      <p:sp>
-        <p:nvSpPr>
-          <p:cNvPr id="21" name="card-head"/>
-          <p:cNvSpPr txBox="1"/>
-          <p:nvPr/>
-        </p:nvSpPr>
-        <p:spPr>
-          <a:xfrm>
-            <a:off x="1234440" y="3931920"/>
-            <a:ext cx="2651760" cy="502920"/>
-          </a:xfrm>
-          <a:prstGeom prst="rect">
-            <a:avLst/>
-          </a:prstGeom>
-          <a:noFill/>
-          <a:ln/>
-        </p:spPr>
-        <p:txBody>
-          <a:bodyPr wrap="square" lIns="0" tIns="0" rIns="0" bIns="0" rtlCol="0" anchor="ctr"/>
-          <a:lstStyle/>
-          <a:p>
-            <a:pPr indent="0" marL="0">
-              <a:buNone/>
-            </a:pPr>
-            <a:r>
-              <a:rPr lang="en-US" sz="1600" b="1" dirty="0">
-                <a:solidFill>
-                  <a:srgbClr val="1B2A2F"/>
-                </a:solidFill>
-              </a:rPr>
-              <a:t>끊김 표시</a:t>
-            </a:r>
-            <a:endParaRPr lang="en-US" sz="1600" dirty="0"/>
-          </a:p>
-        </p:txBody>
-      </p:sp>
-      <p:sp>
-        <p:nvSpPr>
-          <p:cNvPr id="22" name="card-body"/>
-          <p:cNvSpPr txBox="1"/>
-          <p:nvPr/>
-        </p:nvSpPr>
-        <p:spPr>
-          <a:xfrm>
-            <a:off x="685800" y="4526280"/>
-            <a:ext cx="3154680" cy="1371600"/>
-          </a:xfrm>
-          <a:prstGeom prst="rect">
-            <a:avLst/>
-          </a:prstGeom>
-          <a:noFill/>
-          <a:ln/>
-        </p:spPr>
-        <p:txBody>
-          <a:bodyPr wrap="square" lIns="0" tIns="0" rIns="0" bIns="0" rtlCol="0" anchor="t"/>
-          <a:lstStyle/>
-          <a:p>
-            <a:pPr indent="0" marL="0">
-              <a:buNone/>
-            </a:pPr>
-            <a:r>
-              <a:rPr lang="en-US" sz="1300" dirty="0">
-                <a:solidFill>
-                  <a:srgbClr val="1B2A2F"/>
-                </a:solidFill>
-              </a:rPr>
-              <a:t>수신 시각 판정 없음 → 패치 dock-offline (B17)</a:t>
-            </a:r>
-            <a:endParaRPr lang="en-US" sz="1300" dirty="0"/>
-          </a:p>
-        </p:txBody>
-      </p:sp>
-      <p:sp>
-        <p:nvSpPr>
-          <p:cNvPr id="23" name="card"/>
-          <p:cNvSpPr/>
-          <p:nvPr/>
-        </p:nvSpPr>
-        <p:spPr>
-          <a:xfrm>
-            <a:off x="4279392" y="3749040"/>
-            <a:ext cx="3611880" cy="2286000"/>
-          </a:xfrm>
-          <a:prstGeom prst="roundRect">
-            <a:avLst>
-              <a:gd name="adj" fmla="val 3200"/>
-            </a:avLst>
-          </a:prstGeom>
-          <a:solidFill>
-            <a:srgbClr val="FFFFFF"/>
-          </a:solidFill>
-          <a:ln w="12700">
-            <a:solidFill>
-              <a:srgbClr val="CBD5D8"/>
-            </a:solidFill>
-            <a:prstDash val="solid"/>
-          </a:ln>
-          <a:effectLst>
-            <a:outerShdw sx="100000" sy="100000" kx="0" ky="0" algn="bl" rotWithShape="0" blurRad="76200" dist="25400" dir="5400000">
-              <a:srgbClr val="000000">
-                <a:alpha val="12000"/>
-              </a:srgbClr>
-            </a:outerShdw>
-          </a:effectLst>
-        </p:spPr>
-      </p:sp>
-      <p:sp>
-        <p:nvSpPr>
-          <p:cNvPr id="24" name="badge"/>
-          <p:cNvSpPr/>
-          <p:nvPr/>
-        </p:nvSpPr>
-        <p:spPr>
-          <a:xfrm>
-            <a:off x="4480560" y="3950208"/>
-            <a:ext cx="457200" cy="457200"/>
-          </a:xfrm>
-          <a:prstGeom prst="ellipse">
-            <a:avLst/>
-          </a:prstGeom>
-          <a:solidFill>
-            <a:srgbClr val="B8452F"/>
-          </a:solidFill>
-          <a:ln w="12700">
-            <a:solidFill>
-              <a:srgbClr val="B8452F"/>
-            </a:solidFill>
-            <a:prstDash val="solid"/>
-          </a:ln>
-        </p:spPr>
-      </p:sp>
-      <p:sp>
-        <p:nvSpPr>
-          <p:cNvPr id="25" name="badge-num"/>
-          <p:cNvSpPr txBox="1"/>
-          <p:nvPr/>
-        </p:nvSpPr>
-        <p:spPr>
-          <a:xfrm>
-            <a:off x="4480560" y="3950208"/>
-            <a:ext cx="457200" cy="457200"/>
-          </a:xfrm>
-          <a:prstGeom prst="rect">
-            <a:avLst/>
-          </a:prstGeom>
-          <a:noFill/>
-          <a:ln/>
-        </p:spPr>
-        <p:txBody>
-          <a:bodyPr wrap="square" lIns="0" tIns="0" rIns="0" bIns="0" rtlCol="0" anchor="ctr"/>
-          <a:lstStyle/>
-          <a:p>
-            <a:pPr algn="ctr" indent="0" marL="0">
-              <a:buNone/>
-            </a:pPr>
-            <a:r>
-              <a:rPr lang="en-US" sz="1500" b="1" dirty="0">
-                <a:solidFill>
-                  <a:srgbClr val="FFFFFF"/>
-                </a:solidFill>
-              </a:rPr>
-              <a:t>5</a:t>
-            </a:r>
-            <a:endParaRPr lang="en-US" sz="1500" dirty="0"/>
-          </a:p>
-        </p:txBody>
-      </p:sp>
-      <p:sp>
-        <p:nvSpPr>
-          <p:cNvPr id="26" name="card-head"/>
-          <p:cNvSpPr txBox="1"/>
-          <p:nvPr/>
-        </p:nvSpPr>
-        <p:spPr>
-          <a:xfrm>
-            <a:off x="5056632" y="3931920"/>
-            <a:ext cx="2651760" cy="502920"/>
-          </a:xfrm>
-          <a:prstGeom prst="rect">
-            <a:avLst/>
-          </a:prstGeom>
-          <a:noFill/>
-          <a:ln/>
-        </p:spPr>
-        <p:txBody>
-          <a:bodyPr wrap="square" lIns="0" tIns="0" rIns="0" bIns="0" rtlCol="0" anchor="ctr"/>
-          <a:lstStyle/>
-          <a:p>
-            <a:pPr indent="0" marL="0">
-              <a:buNone/>
-            </a:pPr>
-            <a:r>
-              <a:rPr lang="en-US" sz="1600" b="1" dirty="0">
-                <a:solidFill>
-                  <a:srgbClr val="1B2A2F"/>
-                </a:solidFill>
-              </a:rPr>
-              <a:t>예외 처리</a:t>
-            </a:r>
-            <a:endParaRPr lang="en-US" sz="1600" dirty="0"/>
-          </a:p>
-        </p:txBody>
-      </p:sp>
-      <p:sp>
-        <p:nvSpPr>
-          <p:cNvPr id="27" name="card-body"/>
-          <p:cNvSpPr txBox="1"/>
-          <p:nvPr/>
-        </p:nvSpPr>
-        <p:spPr>
-          <a:xfrm>
-            <a:off x="4507992" y="4526280"/>
-            <a:ext cx="3154680" cy="1371600"/>
-          </a:xfrm>
-          <a:prstGeom prst="rect">
-            <a:avLst/>
-          </a:prstGeom>
-          <a:noFill/>
-          <a:ln/>
-        </p:spPr>
-        <p:txBody>
-          <a:bodyPr wrap="square" lIns="0" tIns="0" rIns="0" bIns="0" rtlCol="0" anchor="t"/>
-          <a:lstStyle/>
-          <a:p>
-            <a:pPr indent="0" marL="0">
-              <a:buNone/>
-            </a:pPr>
-            <a:r>
-              <a:rPr lang="en-US" sz="1300" dirty="0">
-                <a:solidFill>
-                  <a:srgbClr val="1B2A2F"/>
-                </a:solidFill>
-              </a:rPr>
-              <a:t>async void 타이머, 집계 루프 무방비, 빈 catch (B1·B2·B6)</a:t>
-            </a:r>
-            <a:endParaRPr lang="en-US" sz="1300" dirty="0"/>
-          </a:p>
-        </p:txBody>
-      </p:sp>
-      <p:sp>
-        <p:nvSpPr>
-          <p:cNvPr id="28" name="card"/>
-          <p:cNvSpPr/>
-          <p:nvPr/>
-        </p:nvSpPr>
-        <p:spPr>
-          <a:xfrm>
-            <a:off x="8101584" y="3749040"/>
-            <a:ext cx="3611880" cy="2286000"/>
-          </a:xfrm>
-          <a:prstGeom prst="roundRect">
-            <a:avLst>
-              <a:gd name="adj" fmla="val 3200"/>
-            </a:avLst>
-          </a:prstGeom>
-          <a:solidFill>
-            <a:srgbClr val="FFFFFF"/>
-          </a:solidFill>
-          <a:ln w="12700">
-            <a:solidFill>
-              <a:srgbClr val="CBD5D8"/>
-            </a:solidFill>
-            <a:prstDash val="solid"/>
-          </a:ln>
-          <a:effectLst>
-            <a:outerShdw sx="100000" sy="100000" kx="0" ky="0" algn="bl" rotWithShape="0" blurRad="76200" dist="25400" dir="5400000">
-              <a:srgbClr val="000000">
-                <a:alpha val="12000"/>
-              </a:srgbClr>
-            </a:outerShdw>
-          </a:effectLst>
-        </p:spPr>
-      </p:sp>
-      <p:sp>
-        <p:nvSpPr>
-          <p:cNvPr id="29" name="badge"/>
-          <p:cNvSpPr/>
-          <p:nvPr/>
-        </p:nvSpPr>
-        <p:spPr>
-          <a:xfrm>
-            <a:off x="8302752" y="3950208"/>
-            <a:ext cx="457200" cy="457200"/>
-          </a:xfrm>
-          <a:prstGeom prst="ellipse">
-            <a:avLst/>
-          </a:prstGeom>
-          <a:solidFill>
-            <a:srgbClr val="C99A00"/>
-          </a:solidFill>
-          <a:ln w="12700">
-            <a:solidFill>
-              <a:srgbClr val="C99A00"/>
-            </a:solidFill>
-            <a:prstDash val="solid"/>
-          </a:ln>
-        </p:spPr>
-      </p:sp>
-      <p:sp>
-        <p:nvSpPr>
-          <p:cNvPr id="30" name="badge-num"/>
-          <p:cNvSpPr txBox="1"/>
-          <p:nvPr/>
-        </p:nvSpPr>
-        <p:spPr>
-          <a:xfrm>
-            <a:off x="8302752" y="3950208"/>
-            <a:ext cx="457200" cy="457200"/>
-          </a:xfrm>
-          <a:prstGeom prst="rect">
-            <a:avLst/>
-          </a:prstGeom>
-          <a:noFill/>
-          <a:ln/>
-        </p:spPr>
-        <p:txBody>
-          <a:bodyPr wrap="square" lIns="0" tIns="0" rIns="0" bIns="0" rtlCol="0" anchor="ctr"/>
-          <a:lstStyle/>
-          <a:p>
-            <a:pPr algn="ctr" indent="0" marL="0">
-              <a:buNone/>
-            </a:pPr>
-            <a:r>
-              <a:rPr lang="en-US" sz="1500" b="1" dirty="0">
-                <a:solidFill>
-                  <a:srgbClr val="FFFFFF"/>
-                </a:solidFill>
-              </a:rPr>
-              <a:t>6</a:t>
-            </a:r>
-            <a:endParaRPr lang="en-US" sz="1500" dirty="0"/>
-          </a:p>
-        </p:txBody>
-      </p:sp>
-      <p:sp>
-        <p:nvSpPr>
-          <p:cNvPr id="31" name="card-head"/>
-          <p:cNvSpPr txBox="1"/>
-          <p:nvPr/>
-        </p:nvSpPr>
-        <p:spPr>
-          <a:xfrm>
-            <a:off x="8878824" y="3931920"/>
-            <a:ext cx="2651760" cy="502920"/>
-          </a:xfrm>
-          <a:prstGeom prst="rect">
-            <a:avLst/>
-          </a:prstGeom>
-          <a:noFill/>
-          <a:ln/>
-        </p:spPr>
-        <p:txBody>
-          <a:bodyPr wrap="square" lIns="0" tIns="0" rIns="0" bIns="0" rtlCol="0" anchor="ctr"/>
-          <a:lstStyle/>
-          <a:p>
-            <a:pPr indent="0" marL="0">
-              <a:buNone/>
-            </a:pPr>
-            <a:r>
-              <a:rPr lang="en-US" sz="1600" b="1" dirty="0">
-                <a:solidFill>
-                  <a:srgbClr val="1B2A2F"/>
-                </a:solidFill>
-              </a:rPr>
-              <a:t>동시성</a:t>
-            </a:r>
-            <a:endParaRPr lang="en-US" sz="1600" dirty="0"/>
-          </a:p>
-        </p:txBody>
-      </p:sp>
-      <p:sp>
-        <p:nvSpPr>
-          <p:cNvPr id="32" name="card-body"/>
-          <p:cNvSpPr txBox="1"/>
-          <p:nvPr/>
-        </p:nvSpPr>
-        <p:spPr>
-          <a:xfrm>
-            <a:off x="8330184" y="4526280"/>
-            <a:ext cx="3154680" cy="1371600"/>
-          </a:xfrm>
-          <a:prstGeom prst="rect">
-            <a:avLst/>
-          </a:prstGeom>
-          <a:noFill/>
-          <a:ln/>
-        </p:spPr>
-        <p:txBody>
-          <a:bodyPr wrap="square" lIns="0" tIns="0" rIns="0" bIns="0" rtlCol="0" anchor="t"/>
-          <a:lstStyle/>
-          <a:p>
-            <a:pPr indent="0" marL="0">
-              <a:buNone/>
-            </a:pPr>
-            <a:r>
-              <a:rPr lang="en-US" sz="1300" dirty="0">
-                <a:solidFill>
-                  <a:srgbClr val="1B2A2F"/>
-                </a:solidFill>
-              </a:rPr>
-              <a:t>내부 가변 객체 반환, Default 공유 객체 수정 (B3·B10)</a:t>
-            </a:r>
-            <a:endParaRPr lang="en-US" sz="1300" dirty="0"/>
           </a:p>
         </p:txBody>
       </p:sp>
@@ -8877,7 +8162,7 @@
                   <a:schemeClr val="tx2"/>
                 </a:solidFill>
               </a:rPr>
-              <a:t>권장 조치 순서</a:t>
+              <a:t>도크 연결 상태 (끊김 패치 적용 후)</a:t>
             </a:r>
             <a:endParaRPr lang="en-US" sz="3000" dirty="0"/>
           </a:p>
@@ -8885,19 +8170,450 @@
       </p:sp>
       <p:sp>
         <p:nvSpPr>
-          <p:cNvPr id="3" name="step-head"/>
+          <p:cNvPr id="3" name="diagram-frame"/>
           <p:cNvSpPr/>
           <p:nvPr/>
         </p:nvSpPr>
         <p:spPr>
           <a:xfrm>
-            <a:off x="457200" y="1828800"/>
-            <a:ext cx="2606040" cy="685800"/>
+            <a:off x="457200" y="1143000"/>
+            <a:ext cx="11292840" cy="2377440"/>
           </a:xfrm>
           <a:prstGeom prst="roundRect">
             <a:avLst>
-              <a:gd name="adj" fmla="val 13333"/>
+              <a:gd name="adj" fmla="val 3077"/>
             </a:avLst>
+          </a:prstGeom>
+          <a:solidFill>
+            <a:srgbClr val="FFFFFF"/>
+          </a:solidFill>
+          <a:ln w="12700">
+            <a:solidFill>
+              <a:srgbClr val="CBD5D8"/>
+            </a:solidFill>
+            <a:prstDash val="solid"/>
+          </a:ln>
+        </p:spPr>
+      </p:sp>
+      <p:pic>
+        <p:nvPicPr>
+          <p:cNvPr id="4" name="도크 연결 상태 (끊김 패치 적용 후)" descr="도크 연결 상태 (끊김 패치 적용 후)">    </p:cNvPr>
+          <p:cNvPicPr>
+            <a:picLocks noChangeAspect="1"/>
+          </p:cNvPicPr>
+          <p:nvPr/>
+        </p:nvPicPr>
+        <p:blipFill>
+          <a:blip r:embed="rId1"/>
+          <a:stretch>
+            <a:fillRect/>
+          </a:stretch>
+        </p:blipFill>
+        <p:spPr>
+          <a:xfrm>
+            <a:off x="1376394" y="1280160"/>
+            <a:ext cx="9454451" cy="2103120"/>
+          </a:xfrm>
+          <a:prstGeom prst="rect">
+            <a:avLst/>
+          </a:prstGeom>
+        </p:spPr>
+      </p:pic>
+      <p:sp>
+        <p:nvSpPr>
+          <p:cNvPr id="5" name="card"/>
+          <p:cNvSpPr/>
+          <p:nvPr/>
+        </p:nvSpPr>
+        <p:spPr>
+          <a:xfrm>
+            <a:off x="457200" y="3794760"/>
+            <a:ext cx="3581400" cy="2468880"/>
+          </a:xfrm>
+          <a:prstGeom prst="roundRect">
+            <a:avLst>
+              <a:gd name="adj" fmla="val 2963"/>
+            </a:avLst>
+          </a:prstGeom>
+          <a:solidFill>
+            <a:srgbClr val="FBEDEA"/>
+          </a:solidFill>
+          <a:ln w="12700">
+            <a:solidFill>
+              <a:srgbClr val="FBEDEA"/>
+            </a:solidFill>
+            <a:prstDash val="solid"/>
+          </a:ln>
+        </p:spPr>
+      </p:sp>
+      <p:sp>
+        <p:nvSpPr>
+          <p:cNvPr id="6" name="card-text"/>
+          <p:cNvSpPr txBox="1"/>
+          <p:nvPr/>
+        </p:nvSpPr>
+        <p:spPr>
+          <a:xfrm>
+            <a:off x="658368" y="3959352"/>
+            <a:ext cx="3179064" cy="2139696"/>
+          </a:xfrm>
+          <a:prstGeom prst="rect">
+            <a:avLst/>
+          </a:prstGeom>
+          <a:noFill/>
+          <a:ln/>
+        </p:spPr>
+        <p:txBody>
+          <a:bodyPr wrap="square" rtlCol="0" anchor="t"/>
+          <a:lstStyle/>
+          <a:p>
+            <a:pPr indent="0" marL="0">
+              <a:spcAft>
+                <a:spcPts val="400"/>
+              </a:spcAft>
+              <a:buNone/>
+            </a:pPr>
+            <a:r>
+              <a:rPr lang="en-US" sz="1500" b="1" dirty="0">
+                <a:solidFill>
+                  <a:srgbClr val="B8452F"/>
+                </a:solidFill>
+              </a:rPr>
+              <a:t>원본 문제 (B17)</a:t>
+            </a:r>
+            <a:endParaRPr lang="en-US" sz="1500" dirty="0"/>
+          </a:p>
+          <a:p>
+            <a:pPr indent="0" marL="0">
+              <a:buNone/>
+            </a:pPr>
+            <a:r>
+              <a:rPr lang="en-US" sz="1300" dirty="0">
+                <a:solidFill>
+                  <a:srgbClr val="1B2A2F"/>
+                </a:solidFill>
+              </a:rPr>
+              <a:t>서버·화면 모두 수신 시각 판정 없음 → 끊긴 도크가 마지막 상태 유지</a:t>
+            </a:r>
+            <a:endParaRPr lang="en-US" sz="1500" dirty="0"/>
+          </a:p>
+        </p:txBody>
+      </p:sp>
+      <p:sp>
+        <p:nvSpPr>
+          <p:cNvPr id="7" name="card"/>
+          <p:cNvSpPr/>
+          <p:nvPr/>
+        </p:nvSpPr>
+        <p:spPr>
+          <a:xfrm>
+            <a:off x="4312920" y="3794760"/>
+            <a:ext cx="3581400" cy="2468880"/>
+          </a:xfrm>
+          <a:prstGeom prst="roundRect">
+            <a:avLst>
+              <a:gd name="adj" fmla="val 2963"/>
+            </a:avLst>
+          </a:prstGeom>
+          <a:solidFill>
+            <a:srgbClr val="E6F2EE"/>
+          </a:solidFill>
+          <a:ln w="12700">
+            <a:solidFill>
+              <a:srgbClr val="E6F2EE"/>
+            </a:solidFill>
+            <a:prstDash val="solid"/>
+          </a:ln>
+        </p:spPr>
+      </p:sp>
+      <p:sp>
+        <p:nvSpPr>
+          <p:cNvPr id="8" name="card-text"/>
+          <p:cNvSpPr txBox="1"/>
+          <p:nvPr/>
+        </p:nvSpPr>
+        <p:spPr>
+          <a:xfrm>
+            <a:off x="4514088" y="3959352"/>
+            <a:ext cx="3179064" cy="2139696"/>
+          </a:xfrm>
+          <a:prstGeom prst="rect">
+            <a:avLst/>
+          </a:prstGeom>
+          <a:noFill/>
+          <a:ln/>
+        </p:spPr>
+        <p:txBody>
+          <a:bodyPr wrap="square" rtlCol="0" anchor="t"/>
+          <a:lstStyle/>
+          <a:p>
+            <a:pPr indent="0" marL="0">
+              <a:spcAft>
+                <a:spcPts val="400"/>
+              </a:spcAft>
+              <a:buNone/>
+            </a:pPr>
+            <a:r>
+              <a:rPr lang="en-US" sz="1500" b="1" dirty="0">
+                <a:solidFill>
+                  <a:srgbClr val="0F6E5C"/>
+                </a:solidFill>
+              </a:rPr>
+              <a:t>판정</a:t>
+            </a:r>
+            <a:endParaRPr lang="en-US" sz="1500" dirty="0"/>
+          </a:p>
+          <a:p>
+            <a:pPr indent="0" marL="0">
+              <a:buNone/>
+            </a:pPr>
+            <a:r>
+              <a:rPr lang="en-US" sz="1300" dirty="0">
+                <a:solidFill>
+                  <a:srgbClr val="1B2A2F"/>
+                </a:solidFill>
+              </a:rPr>
+              <a:t>Connected=false 또는 서버시각 - ReceivedAt &gt; TimeoutSeconds → Offline(진회색)</a:t>
+            </a:r>
+            <a:endParaRPr lang="en-US" sz="1500" dirty="0"/>
+          </a:p>
+        </p:txBody>
+      </p:sp>
+      <p:sp>
+        <p:nvSpPr>
+          <p:cNvPr id="9" name="card"/>
+          <p:cNvSpPr/>
+          <p:nvPr/>
+        </p:nvSpPr>
+        <p:spPr>
+          <a:xfrm>
+            <a:off x="8168640" y="3794760"/>
+            <a:ext cx="3581400" cy="2468880"/>
+          </a:xfrm>
+          <a:prstGeom prst="roundRect">
+            <a:avLst>
+              <a:gd name="adj" fmla="val 2963"/>
+            </a:avLst>
+          </a:prstGeom>
+          <a:solidFill>
+            <a:srgbClr val="E6F2EE"/>
+          </a:solidFill>
+          <a:ln w="12700">
+            <a:solidFill>
+              <a:srgbClr val="E6F2EE"/>
+            </a:solidFill>
+            <a:prstDash val="solid"/>
+          </a:ln>
+        </p:spPr>
+      </p:sp>
+      <p:sp>
+        <p:nvSpPr>
+          <p:cNvPr id="10" name="card-text"/>
+          <p:cNvSpPr txBox="1"/>
+          <p:nvPr/>
+        </p:nvSpPr>
+        <p:spPr>
+          <a:xfrm>
+            <a:off x="8369808" y="3959352"/>
+            <a:ext cx="3179064" cy="2139696"/>
+          </a:xfrm>
+          <a:prstGeom prst="rect">
+            <a:avLst/>
+          </a:prstGeom>
+          <a:noFill/>
+          <a:ln/>
+        </p:spPr>
+        <p:txBody>
+          <a:bodyPr wrap="square" rtlCol="0" anchor="t"/>
+          <a:lstStyle/>
+          <a:p>
+            <a:pPr indent="0" marL="0">
+              <a:spcAft>
+                <a:spcPts val="400"/>
+              </a:spcAft>
+              <a:buNone/>
+            </a:pPr>
+            <a:r>
+              <a:rPr lang="en-US" sz="1500" b="1" dirty="0">
+                <a:solidFill>
+                  <a:srgbClr val="0F6E5C"/>
+                </a:solidFill>
+              </a:rPr>
+              <a:t>이력</a:t>
+            </a:r>
+            <a:endParaRPr lang="en-US" sz="1500" dirty="0"/>
+          </a:p>
+          <a:p>
+            <a:pPr indent="0" marL="0">
+              <a:buNone/>
+            </a:pPr>
+            <a:r>
+              <a:rPr lang="en-US" sz="1300" dirty="0">
+                <a:solidFill>
+                  <a:srgbClr val="1B2A2F"/>
+                </a:solidFill>
+              </a:rPr>
+              <a:t>끊김 E0000.0050 · 복구 E0000.0051 을 ftms_event_log 에 기록</a:t>
+            </a:r>
+            <a:endParaRPr lang="en-US" sz="1500" dirty="0"/>
+          </a:p>
+        </p:txBody>
+      </p:sp>
+      <p:sp>
+        <p:nvSpPr>
+          <p:cNvPr id="25" name="Slide Number Placeholder 0"/>
+          <p:cNvSpPr>
+            <a:spLocks noGrp="1"/>
+          </p:cNvSpPr>
+          <p:nvPr>
+            <p:ph type="sldNum" sz="quarter" idx="4294967295"/>
+          </p:nvPr>
+        </p:nvSpPr>
+        <p:spPr>
+          <a:xfrm>
+            <a:off x="11247120" y="6446520"/>
+            <a:ext cx="548640" cy="274320"/>
+          </a:xfrm>
+          <a:prstGeom prst="rect">
+            <a:avLst/>
+          </a:prstGeom>
+          <a:extLst>
+            <a:ext uri="{C572A759-6A51-4108-AA02-DFA0A04FC94B}">
+              <ma14:wrappingTextBoxFlag xmlns:ma14="http://schemas.microsoft.com/office/mac/drawingml/2011/main" val="0"/>
+            </a:ext>
+          </a:extLst>
+        </p:spPr>
+        <p:txBody>
+          <a:bodyPr/>
+          <a:lstStyle>
+            <a:lvl1pPr>
+              <a:defRPr sz="1000">
+                <a:solidFill>
+                  <a:srgbClr val="5B6B70"/>
+                </a:solidFill>
+              </a:defRPr>
+            </a:lvl1pPr>
+          </a:lstStyle>
+          <a:p>
+            <a:pPr algn="r"/>
+            <a:fld id="{F7021451-1387-4CA6-816F-3879F97B5CBC}" type="slidenum">
+              <a:rPr b="0" lang="en-US"/>
+              <a:t>20</a:t>
+            </a:fld>
+            <a:endParaRPr lang="en-US"/>
+          </a:p>
+        </p:txBody>
+      </p:sp>
+    </p:spTree>
+  </p:cSld>
+  <p:clrMapOvr>
+    <a:masterClrMapping/>
+  </p:clrMapOvr>
+</p:sld>
+</file>
+
+<file path=ppt/slides/slide21.xml><?xml version="1.0" encoding="utf-8"?>
+<p:sld xmlns:a="http://schemas.openxmlformats.org/drawingml/2006/main" xmlns:r="http://schemas.openxmlformats.org/officeDocument/2006/relationships" xmlns:p="http://schemas.openxmlformats.org/presentationml/2006/main">
+  <p:cSld name="Slide 21">
+    <p:spTree>
+      <p:nvGrpSpPr>
+        <p:cNvPr id="1" name=""/>
+        <p:cNvGrpSpPr/>
+        <p:nvPr/>
+      </p:nvGrpSpPr>
+      <p:grpSpPr>
+        <a:xfrm>
+          <a:off x="0" y="0"/>
+          <a:ext cx="0" cy="0"/>
+          <a:chOff x="0" y="0"/>
+          <a:chExt cx="0" cy="0"/>
+        </a:xfrm>
+      </p:grpSpPr>
+      <p:sp>
+        <p:nvSpPr>
+          <p:cNvPr id="2" name="Text 0"/>
+          <p:cNvSpPr/>
+          <p:nvPr>
+            <p:ph idx="100" type="title" hasCustomPrompt="1"/>
+          </p:nvPr>
+        </p:nvSpPr>
+        <p:spPr>
+          <a:xfrm>
+            <a:off x="457200" y="274320"/>
+            <a:ext cx="11247120" cy="731520"/>
+          </a:xfrm>
+          <a:prstGeom prst="rect">
+            <a:avLst/>
+          </a:prstGeom>
+          <a:noFill/>
+          <a:ln/>
+        </p:spPr>
+        <p:txBody>
+          <a:bodyPr wrap="square" lIns="0" tIns="0" rIns="0" bIns="0" rtlCol="0" anchor="ctr"/>
+          <a:lstStyle/>
+          <a:p>
+            <a:pPr indent="0" marL="0">
+              <a:buNone/>
+            </a:pPr>
+            <a:r>
+              <a:rPr lang="en-US" sz="3000" b="1" dirty="0">
+                <a:solidFill>
+                  <a:schemeClr val="tx2"/>
+                </a:solidFill>
+              </a:rPr>
+              <a:t>주의 사항 요약</a:t>
+            </a:r>
+            <a:endParaRPr lang="en-US" sz="3000" dirty="0"/>
+          </a:p>
+        </p:txBody>
+      </p:sp>
+      <p:sp>
+        <p:nvSpPr>
+          <p:cNvPr id="3" name="card"/>
+          <p:cNvSpPr/>
+          <p:nvPr/>
+        </p:nvSpPr>
+        <p:spPr>
+          <a:xfrm>
+            <a:off x="457200" y="1234440"/>
+            <a:ext cx="3611880" cy="2286000"/>
+          </a:xfrm>
+          <a:prstGeom prst="roundRect">
+            <a:avLst>
+              <a:gd name="adj" fmla="val 3200"/>
+            </a:avLst>
+          </a:prstGeom>
+          <a:solidFill>
+            <a:srgbClr val="FFFFFF"/>
+          </a:solidFill>
+          <a:ln w="12700">
+            <a:solidFill>
+              <a:srgbClr val="CBD5D8"/>
+            </a:solidFill>
+            <a:prstDash val="solid"/>
+          </a:ln>
+          <a:effectLst>
+            <a:outerShdw sx="100000" sy="100000" kx="0" ky="0" algn="bl" rotWithShape="0" blurRad="76200" dist="25400" dir="5400000">
+              <a:srgbClr val="000000">
+                <a:alpha val="12000"/>
+              </a:srgbClr>
+            </a:outerShdw>
+          </a:effectLst>
+        </p:spPr>
+      </p:sp>
+      <p:sp>
+        <p:nvSpPr>
+          <p:cNvPr id="4" name="badge"/>
+          <p:cNvSpPr/>
+          <p:nvPr/>
+        </p:nvSpPr>
+        <p:spPr>
+          <a:xfrm>
+            <a:off x="658368" y="1435608"/>
+            <a:ext cx="457200" cy="457200"/>
+          </a:xfrm>
+          <a:prstGeom prst="ellipse">
+            <a:avLst/>
           </a:prstGeom>
           <a:solidFill>
             <a:srgbClr val="B8452F"/>
@@ -8912,6 +8628,1084 @@
       </p:sp>
       <p:sp>
         <p:nvSpPr>
+          <p:cNvPr id="5" name="badge-num"/>
+          <p:cNvSpPr txBox="1"/>
+          <p:nvPr/>
+        </p:nvSpPr>
+        <p:spPr>
+          <a:xfrm>
+            <a:off x="658368" y="1435608"/>
+            <a:ext cx="457200" cy="457200"/>
+          </a:xfrm>
+          <a:prstGeom prst="rect">
+            <a:avLst/>
+          </a:prstGeom>
+          <a:noFill/>
+          <a:ln/>
+        </p:spPr>
+        <p:txBody>
+          <a:bodyPr wrap="square" lIns="0" tIns="0" rIns="0" bIns="0" rtlCol="0" anchor="ctr"/>
+          <a:lstStyle/>
+          <a:p>
+            <a:pPr algn="ctr" indent="0" marL="0">
+              <a:buNone/>
+            </a:pPr>
+            <a:r>
+              <a:rPr lang="en-US" sz="1500" b="1" dirty="0">
+                <a:solidFill>
+                  <a:srgbClr val="FFFFFF"/>
+                </a:solidFill>
+              </a:rPr>
+              <a:t>1</a:t>
+            </a:r>
+            <a:endParaRPr lang="en-US" sz="1500" dirty="0"/>
+          </a:p>
+        </p:txBody>
+      </p:sp>
+      <p:sp>
+        <p:nvSpPr>
+          <p:cNvPr id="6" name="card-head"/>
+          <p:cNvSpPr txBox="1"/>
+          <p:nvPr/>
+        </p:nvSpPr>
+        <p:spPr>
+          <a:xfrm>
+            <a:off x="1234440" y="1417320"/>
+            <a:ext cx="2651760" cy="502920"/>
+          </a:xfrm>
+          <a:prstGeom prst="rect">
+            <a:avLst/>
+          </a:prstGeom>
+          <a:noFill/>
+          <a:ln/>
+        </p:spPr>
+        <p:txBody>
+          <a:bodyPr wrap="square" lIns="0" tIns="0" rIns="0" bIns="0" rtlCol="0" anchor="ctr"/>
+          <a:lstStyle/>
+          <a:p>
+            <a:pPr indent="0" marL="0">
+              <a:buNone/>
+            </a:pPr>
+            <a:r>
+              <a:rPr lang="en-US" sz="1600" b="1" dirty="0">
+                <a:solidFill>
+                  <a:srgbClr val="1B2A2F"/>
+                </a:solidFill>
+              </a:rPr>
+              <a:t>보안</a:t>
+            </a:r>
+            <a:endParaRPr lang="en-US" sz="1600" dirty="0"/>
+          </a:p>
+        </p:txBody>
+      </p:sp>
+      <p:sp>
+        <p:nvSpPr>
+          <p:cNvPr id="7" name="card-body"/>
+          <p:cNvSpPr txBox="1"/>
+          <p:nvPr/>
+        </p:nvSpPr>
+        <p:spPr>
+          <a:xfrm>
+            <a:off x="685800" y="2011680"/>
+            <a:ext cx="3154680" cy="1371600"/>
+          </a:xfrm>
+          <a:prstGeom prst="rect">
+            <a:avLst/>
+          </a:prstGeom>
+          <a:noFill/>
+          <a:ln/>
+        </p:spPr>
+        <p:txBody>
+          <a:bodyPr wrap="square" lIns="0" tIns="0" rIns="0" bIns="0" rtlCol="0" anchor="t"/>
+          <a:lstStyle/>
+          <a:p>
+            <a:pPr indent="0" marL="0">
+              <a:buNone/>
+            </a:pPr>
+            <a:r>
+              <a:rPr lang="en-US" sz="1300" dirty="0">
+                <a:solidFill>
+                  <a:srgbClr val="1B2A2F"/>
+                </a:solidFill>
+              </a:rPr>
+              <a:t>익명 Admin 가입, API·SignalR·TCP 무인증, 기본 계정, 비밀키 포함</a:t>
+            </a:r>
+            <a:endParaRPr lang="en-US" sz="1300" dirty="0"/>
+          </a:p>
+        </p:txBody>
+      </p:sp>
+      <p:sp>
+        <p:nvSpPr>
+          <p:cNvPr id="8" name="card"/>
+          <p:cNvSpPr/>
+          <p:nvPr/>
+        </p:nvSpPr>
+        <p:spPr>
+          <a:xfrm>
+            <a:off x="4279392" y="1234440"/>
+            <a:ext cx="3611880" cy="2286000"/>
+          </a:xfrm>
+          <a:prstGeom prst="roundRect">
+            <a:avLst>
+              <a:gd name="adj" fmla="val 3200"/>
+            </a:avLst>
+          </a:prstGeom>
+          <a:solidFill>
+            <a:srgbClr val="FFFFFF"/>
+          </a:solidFill>
+          <a:ln w="12700">
+            <a:solidFill>
+              <a:srgbClr val="CBD5D8"/>
+            </a:solidFill>
+            <a:prstDash val="solid"/>
+          </a:ln>
+          <a:effectLst>
+            <a:outerShdw sx="100000" sy="100000" kx="0" ky="0" algn="bl" rotWithShape="0" blurRad="76200" dist="25400" dir="5400000">
+              <a:srgbClr val="000000">
+                <a:alpha val="12000"/>
+              </a:srgbClr>
+            </a:outerShdw>
+          </a:effectLst>
+        </p:spPr>
+      </p:sp>
+      <p:sp>
+        <p:nvSpPr>
+          <p:cNvPr id="9" name="badge"/>
+          <p:cNvSpPr/>
+          <p:nvPr/>
+        </p:nvSpPr>
+        <p:spPr>
+          <a:xfrm>
+            <a:off x="4480560" y="1435608"/>
+            <a:ext cx="457200" cy="457200"/>
+          </a:xfrm>
+          <a:prstGeom prst="ellipse">
+            <a:avLst/>
+          </a:prstGeom>
+          <a:solidFill>
+            <a:srgbClr val="C99A00"/>
+          </a:solidFill>
+          <a:ln w="12700">
+            <a:solidFill>
+              <a:srgbClr val="C99A00"/>
+            </a:solidFill>
+            <a:prstDash val="solid"/>
+          </a:ln>
+        </p:spPr>
+      </p:sp>
+      <p:sp>
+        <p:nvSpPr>
+          <p:cNvPr id="10" name="badge-num"/>
+          <p:cNvSpPr txBox="1"/>
+          <p:nvPr/>
+        </p:nvSpPr>
+        <p:spPr>
+          <a:xfrm>
+            <a:off x="4480560" y="1435608"/>
+            <a:ext cx="457200" cy="457200"/>
+          </a:xfrm>
+          <a:prstGeom prst="rect">
+            <a:avLst/>
+          </a:prstGeom>
+          <a:noFill/>
+          <a:ln/>
+        </p:spPr>
+        <p:txBody>
+          <a:bodyPr wrap="square" lIns="0" tIns="0" rIns="0" bIns="0" rtlCol="0" anchor="ctr"/>
+          <a:lstStyle/>
+          <a:p>
+            <a:pPr algn="ctr" indent="0" marL="0">
+              <a:buNone/>
+            </a:pPr>
+            <a:r>
+              <a:rPr lang="en-US" sz="1500" b="1" dirty="0">
+                <a:solidFill>
+                  <a:srgbClr val="FFFFFF"/>
+                </a:solidFill>
+              </a:rPr>
+              <a:t>2</a:t>
+            </a:r>
+            <a:endParaRPr lang="en-US" sz="1500" dirty="0"/>
+          </a:p>
+        </p:txBody>
+      </p:sp>
+      <p:sp>
+        <p:nvSpPr>
+          <p:cNvPr id="11" name="card-head"/>
+          <p:cNvSpPr txBox="1"/>
+          <p:nvPr/>
+        </p:nvSpPr>
+        <p:spPr>
+          <a:xfrm>
+            <a:off x="5056632" y="1417320"/>
+            <a:ext cx="2651760" cy="502920"/>
+          </a:xfrm>
+          <a:prstGeom prst="rect">
+            <a:avLst/>
+          </a:prstGeom>
+          <a:noFill/>
+          <a:ln/>
+        </p:spPr>
+        <p:txBody>
+          <a:bodyPr wrap="square" lIns="0" tIns="0" rIns="0" bIns="0" rtlCol="0" anchor="ctr"/>
+          <a:lstStyle/>
+          <a:p>
+            <a:pPr indent="0" marL="0">
+              <a:buNone/>
+            </a:pPr>
+            <a:r>
+              <a:rPr lang="en-US" sz="1600" b="1" dirty="0">
+                <a:solidFill>
+                  <a:srgbClr val="1B2A2F"/>
+                </a:solidFill>
+              </a:rPr>
+              <a:t>기동</a:t>
+            </a:r>
+            <a:endParaRPr lang="en-US" sz="1600" dirty="0"/>
+          </a:p>
+        </p:txBody>
+      </p:sp>
+      <p:sp>
+        <p:nvSpPr>
+          <p:cNvPr id="12" name="card-body"/>
+          <p:cNvSpPr txBox="1"/>
+          <p:nvPr/>
+        </p:nvSpPr>
+        <p:spPr>
+          <a:xfrm>
+            <a:off x="4507992" y="2011680"/>
+            <a:ext cx="3154680" cy="1371600"/>
+          </a:xfrm>
+          <a:prstGeom prst="rect">
+            <a:avLst/>
+          </a:prstGeom>
+          <a:noFill/>
+          <a:ln/>
+        </p:spPr>
+        <p:txBody>
+          <a:bodyPr wrap="square" lIns="0" tIns="0" rIns="0" bIns="0" rtlCol="0" anchor="t"/>
+          <a:lstStyle/>
+          <a:p>
+            <a:pPr indent="0" marL="0">
+              <a:buNone/>
+            </a:pPr>
+            <a:r>
+              <a:rPr lang="en-US" sz="1300" dirty="0">
+                <a:solidFill>
+                  <a:srgbClr val="1B2A2F"/>
+                </a:solidFill>
+              </a:rPr>
+              <a:t>DB 연결 후에야 8121 개방, 재시도 없음 (B12)</a:t>
+            </a:r>
+            <a:endParaRPr lang="en-US" sz="1300" dirty="0"/>
+          </a:p>
+        </p:txBody>
+      </p:sp>
+      <p:sp>
+        <p:nvSpPr>
+          <p:cNvPr id="13" name="card"/>
+          <p:cNvSpPr/>
+          <p:nvPr/>
+        </p:nvSpPr>
+        <p:spPr>
+          <a:xfrm>
+            <a:off x="8101584" y="1234440"/>
+            <a:ext cx="3611880" cy="2286000"/>
+          </a:xfrm>
+          <a:prstGeom prst="roundRect">
+            <a:avLst>
+              <a:gd name="adj" fmla="val 3200"/>
+            </a:avLst>
+          </a:prstGeom>
+          <a:solidFill>
+            <a:srgbClr val="FFFFFF"/>
+          </a:solidFill>
+          <a:ln w="12700">
+            <a:solidFill>
+              <a:srgbClr val="CBD5D8"/>
+            </a:solidFill>
+            <a:prstDash val="solid"/>
+          </a:ln>
+          <a:effectLst>
+            <a:outerShdw sx="100000" sy="100000" kx="0" ky="0" algn="bl" rotWithShape="0" blurRad="76200" dist="25400" dir="5400000">
+              <a:srgbClr val="000000">
+                <a:alpha val="12000"/>
+              </a:srgbClr>
+            </a:outerShdw>
+          </a:effectLst>
+        </p:spPr>
+      </p:sp>
+      <p:sp>
+        <p:nvSpPr>
+          <p:cNvPr id="14" name="badge"/>
+          <p:cNvSpPr/>
+          <p:nvPr/>
+        </p:nvSpPr>
+        <p:spPr>
+          <a:xfrm>
+            <a:off x="8302752" y="1435608"/>
+            <a:ext cx="457200" cy="457200"/>
+          </a:xfrm>
+          <a:prstGeom prst="ellipse">
+            <a:avLst/>
+          </a:prstGeom>
+          <a:solidFill>
+            <a:srgbClr val="C99A00"/>
+          </a:solidFill>
+          <a:ln w="12700">
+            <a:solidFill>
+              <a:srgbClr val="C99A00"/>
+            </a:solidFill>
+            <a:prstDash val="solid"/>
+          </a:ln>
+        </p:spPr>
+      </p:sp>
+      <p:sp>
+        <p:nvSpPr>
+          <p:cNvPr id="15" name="badge-num"/>
+          <p:cNvSpPr txBox="1"/>
+          <p:nvPr/>
+        </p:nvSpPr>
+        <p:spPr>
+          <a:xfrm>
+            <a:off x="8302752" y="1435608"/>
+            <a:ext cx="457200" cy="457200"/>
+          </a:xfrm>
+          <a:prstGeom prst="rect">
+            <a:avLst/>
+          </a:prstGeom>
+          <a:noFill/>
+          <a:ln/>
+        </p:spPr>
+        <p:txBody>
+          <a:bodyPr wrap="square" lIns="0" tIns="0" rIns="0" bIns="0" rtlCol="0" anchor="ctr"/>
+          <a:lstStyle/>
+          <a:p>
+            <a:pPr algn="ctr" indent="0" marL="0">
+              <a:buNone/>
+            </a:pPr>
+            <a:r>
+              <a:rPr lang="en-US" sz="1500" b="1" dirty="0">
+                <a:solidFill>
+                  <a:srgbClr val="FFFFFF"/>
+                </a:solidFill>
+              </a:rPr>
+              <a:t>3</a:t>
+            </a:r>
+            <a:endParaRPr lang="en-US" sz="1500" dirty="0"/>
+          </a:p>
+        </p:txBody>
+      </p:sp>
+      <p:sp>
+        <p:nvSpPr>
+          <p:cNvPr id="16" name="card-head"/>
+          <p:cNvSpPr txBox="1"/>
+          <p:nvPr/>
+        </p:nvSpPr>
+        <p:spPr>
+          <a:xfrm>
+            <a:off x="8878824" y="1417320"/>
+            <a:ext cx="2651760" cy="502920"/>
+          </a:xfrm>
+          <a:prstGeom prst="rect">
+            <a:avLst/>
+          </a:prstGeom>
+          <a:noFill/>
+          <a:ln/>
+        </p:spPr>
+        <p:txBody>
+          <a:bodyPr wrap="square" lIns="0" tIns="0" rIns="0" bIns="0" rtlCol="0" anchor="ctr"/>
+          <a:lstStyle/>
+          <a:p>
+            <a:pPr indent="0" marL="0">
+              <a:buNone/>
+            </a:pPr>
+            <a:r>
+              <a:rPr lang="en-US" sz="1600" b="1" dirty="0">
+                <a:solidFill>
+                  <a:srgbClr val="1B2A2F"/>
+                </a:solidFill>
+              </a:rPr>
+              <a:t>상태 영속화</a:t>
+            </a:r>
+            <a:endParaRPr lang="en-US" sz="1600" dirty="0"/>
+          </a:p>
+        </p:txBody>
+      </p:sp>
+      <p:sp>
+        <p:nvSpPr>
+          <p:cNvPr id="17" name="card-body"/>
+          <p:cNvSpPr txBox="1"/>
+          <p:nvPr/>
+        </p:nvSpPr>
+        <p:spPr>
+          <a:xfrm>
+            <a:off x="8330184" y="2011680"/>
+            <a:ext cx="3154680" cy="1371600"/>
+          </a:xfrm>
+          <a:prstGeom prst="rect">
+            <a:avLst/>
+          </a:prstGeom>
+          <a:noFill/>
+          <a:ln/>
+        </p:spPr>
+        <p:txBody>
+          <a:bodyPr wrap="square" lIns="0" tIns="0" rIns="0" bIns="0" rtlCol="0" anchor="t"/>
+          <a:lstStyle/>
+          <a:p>
+            <a:pPr indent="0" marL="0">
+              <a:buNone/>
+            </a:pPr>
+            <a:r>
+              <a:rPr lang="en-US" sz="1300" dirty="0">
+                <a:solidFill>
+                  <a:srgbClr val="1B2A2F"/>
+                </a:solidFill>
+              </a:rPr>
+              <a:t>저장/복원 테이블 불일치로 재시작 시 미복원 (B15)</a:t>
+            </a:r>
+            <a:endParaRPr lang="en-US" sz="1300" dirty="0"/>
+          </a:p>
+        </p:txBody>
+      </p:sp>
+      <p:sp>
+        <p:nvSpPr>
+          <p:cNvPr id="18" name="card"/>
+          <p:cNvSpPr/>
+          <p:nvPr/>
+        </p:nvSpPr>
+        <p:spPr>
+          <a:xfrm>
+            <a:off x="457200" y="3749040"/>
+            <a:ext cx="3611880" cy="2286000"/>
+          </a:xfrm>
+          <a:prstGeom prst="roundRect">
+            <a:avLst>
+              <a:gd name="adj" fmla="val 3200"/>
+            </a:avLst>
+          </a:prstGeom>
+          <a:solidFill>
+            <a:srgbClr val="FFFFFF"/>
+          </a:solidFill>
+          <a:ln w="12700">
+            <a:solidFill>
+              <a:srgbClr val="CBD5D8"/>
+            </a:solidFill>
+            <a:prstDash val="solid"/>
+          </a:ln>
+          <a:effectLst>
+            <a:outerShdw sx="100000" sy="100000" kx="0" ky="0" algn="bl" rotWithShape="0" blurRad="76200" dist="25400" dir="5400000">
+              <a:srgbClr val="000000">
+                <a:alpha val="12000"/>
+              </a:srgbClr>
+            </a:outerShdw>
+          </a:effectLst>
+        </p:spPr>
+      </p:sp>
+      <p:sp>
+        <p:nvSpPr>
+          <p:cNvPr id="19" name="badge"/>
+          <p:cNvSpPr/>
+          <p:nvPr/>
+        </p:nvSpPr>
+        <p:spPr>
+          <a:xfrm>
+            <a:off x="658368" y="3950208"/>
+            <a:ext cx="457200" cy="457200"/>
+          </a:xfrm>
+          <a:prstGeom prst="ellipse">
+            <a:avLst/>
+          </a:prstGeom>
+          <a:solidFill>
+            <a:srgbClr val="C99A00"/>
+          </a:solidFill>
+          <a:ln w="12700">
+            <a:solidFill>
+              <a:srgbClr val="C99A00"/>
+            </a:solidFill>
+            <a:prstDash val="solid"/>
+          </a:ln>
+        </p:spPr>
+      </p:sp>
+      <p:sp>
+        <p:nvSpPr>
+          <p:cNvPr id="20" name="badge-num"/>
+          <p:cNvSpPr txBox="1"/>
+          <p:nvPr/>
+        </p:nvSpPr>
+        <p:spPr>
+          <a:xfrm>
+            <a:off x="658368" y="3950208"/>
+            <a:ext cx="457200" cy="457200"/>
+          </a:xfrm>
+          <a:prstGeom prst="rect">
+            <a:avLst/>
+          </a:prstGeom>
+          <a:noFill/>
+          <a:ln/>
+        </p:spPr>
+        <p:txBody>
+          <a:bodyPr wrap="square" lIns="0" tIns="0" rIns="0" bIns="0" rtlCol="0" anchor="ctr"/>
+          <a:lstStyle/>
+          <a:p>
+            <a:pPr algn="ctr" indent="0" marL="0">
+              <a:buNone/>
+            </a:pPr>
+            <a:r>
+              <a:rPr lang="en-US" sz="1500" b="1" dirty="0">
+                <a:solidFill>
+                  <a:srgbClr val="FFFFFF"/>
+                </a:solidFill>
+              </a:rPr>
+              <a:t>4</a:t>
+            </a:r>
+            <a:endParaRPr lang="en-US" sz="1500" dirty="0"/>
+          </a:p>
+        </p:txBody>
+      </p:sp>
+      <p:sp>
+        <p:nvSpPr>
+          <p:cNvPr id="21" name="card-head"/>
+          <p:cNvSpPr txBox="1"/>
+          <p:nvPr/>
+        </p:nvSpPr>
+        <p:spPr>
+          <a:xfrm>
+            <a:off x="1234440" y="3931920"/>
+            <a:ext cx="2651760" cy="502920"/>
+          </a:xfrm>
+          <a:prstGeom prst="rect">
+            <a:avLst/>
+          </a:prstGeom>
+          <a:noFill/>
+          <a:ln/>
+        </p:spPr>
+        <p:txBody>
+          <a:bodyPr wrap="square" lIns="0" tIns="0" rIns="0" bIns="0" rtlCol="0" anchor="ctr"/>
+          <a:lstStyle/>
+          <a:p>
+            <a:pPr indent="0" marL="0">
+              <a:buNone/>
+            </a:pPr>
+            <a:r>
+              <a:rPr lang="en-US" sz="1600" b="1" dirty="0">
+                <a:solidFill>
+                  <a:srgbClr val="1B2A2F"/>
+                </a:solidFill>
+              </a:rPr>
+              <a:t>끊김 표시</a:t>
+            </a:r>
+            <a:endParaRPr lang="en-US" sz="1600" dirty="0"/>
+          </a:p>
+        </p:txBody>
+      </p:sp>
+      <p:sp>
+        <p:nvSpPr>
+          <p:cNvPr id="22" name="card-body"/>
+          <p:cNvSpPr txBox="1"/>
+          <p:nvPr/>
+        </p:nvSpPr>
+        <p:spPr>
+          <a:xfrm>
+            <a:off x="685800" y="4526280"/>
+            <a:ext cx="3154680" cy="1371600"/>
+          </a:xfrm>
+          <a:prstGeom prst="rect">
+            <a:avLst/>
+          </a:prstGeom>
+          <a:noFill/>
+          <a:ln/>
+        </p:spPr>
+        <p:txBody>
+          <a:bodyPr wrap="square" lIns="0" tIns="0" rIns="0" bIns="0" rtlCol="0" anchor="t"/>
+          <a:lstStyle/>
+          <a:p>
+            <a:pPr indent="0" marL="0">
+              <a:buNone/>
+            </a:pPr>
+            <a:r>
+              <a:rPr lang="en-US" sz="1300" dirty="0">
+                <a:solidFill>
+                  <a:srgbClr val="1B2A2F"/>
+                </a:solidFill>
+              </a:rPr>
+              <a:t>수신 시각 판정 없음 → 패치 dock-offline (B17)</a:t>
+            </a:r>
+            <a:endParaRPr lang="en-US" sz="1300" dirty="0"/>
+          </a:p>
+        </p:txBody>
+      </p:sp>
+      <p:sp>
+        <p:nvSpPr>
+          <p:cNvPr id="23" name="card"/>
+          <p:cNvSpPr/>
+          <p:nvPr/>
+        </p:nvSpPr>
+        <p:spPr>
+          <a:xfrm>
+            <a:off x="4279392" y="3749040"/>
+            <a:ext cx="3611880" cy="2286000"/>
+          </a:xfrm>
+          <a:prstGeom prst="roundRect">
+            <a:avLst>
+              <a:gd name="adj" fmla="val 3200"/>
+            </a:avLst>
+          </a:prstGeom>
+          <a:solidFill>
+            <a:srgbClr val="FFFFFF"/>
+          </a:solidFill>
+          <a:ln w="12700">
+            <a:solidFill>
+              <a:srgbClr val="CBD5D8"/>
+            </a:solidFill>
+            <a:prstDash val="solid"/>
+          </a:ln>
+          <a:effectLst>
+            <a:outerShdw sx="100000" sy="100000" kx="0" ky="0" algn="bl" rotWithShape="0" blurRad="76200" dist="25400" dir="5400000">
+              <a:srgbClr val="000000">
+                <a:alpha val="12000"/>
+              </a:srgbClr>
+            </a:outerShdw>
+          </a:effectLst>
+        </p:spPr>
+      </p:sp>
+      <p:sp>
+        <p:nvSpPr>
+          <p:cNvPr id="24" name="badge"/>
+          <p:cNvSpPr/>
+          <p:nvPr/>
+        </p:nvSpPr>
+        <p:spPr>
+          <a:xfrm>
+            <a:off x="4480560" y="3950208"/>
+            <a:ext cx="457200" cy="457200"/>
+          </a:xfrm>
+          <a:prstGeom prst="ellipse">
+            <a:avLst/>
+          </a:prstGeom>
+          <a:solidFill>
+            <a:srgbClr val="B8452F"/>
+          </a:solidFill>
+          <a:ln w="12700">
+            <a:solidFill>
+              <a:srgbClr val="B8452F"/>
+            </a:solidFill>
+            <a:prstDash val="solid"/>
+          </a:ln>
+        </p:spPr>
+      </p:sp>
+      <p:sp>
+        <p:nvSpPr>
+          <p:cNvPr id="25" name="badge-num"/>
+          <p:cNvSpPr txBox="1"/>
+          <p:nvPr/>
+        </p:nvSpPr>
+        <p:spPr>
+          <a:xfrm>
+            <a:off x="4480560" y="3950208"/>
+            <a:ext cx="457200" cy="457200"/>
+          </a:xfrm>
+          <a:prstGeom prst="rect">
+            <a:avLst/>
+          </a:prstGeom>
+          <a:noFill/>
+          <a:ln/>
+        </p:spPr>
+        <p:txBody>
+          <a:bodyPr wrap="square" lIns="0" tIns="0" rIns="0" bIns="0" rtlCol="0" anchor="ctr"/>
+          <a:lstStyle/>
+          <a:p>
+            <a:pPr algn="ctr" indent="0" marL="0">
+              <a:buNone/>
+            </a:pPr>
+            <a:r>
+              <a:rPr lang="en-US" sz="1500" b="1" dirty="0">
+                <a:solidFill>
+                  <a:srgbClr val="FFFFFF"/>
+                </a:solidFill>
+              </a:rPr>
+              <a:t>5</a:t>
+            </a:r>
+            <a:endParaRPr lang="en-US" sz="1500" dirty="0"/>
+          </a:p>
+        </p:txBody>
+      </p:sp>
+      <p:sp>
+        <p:nvSpPr>
+          <p:cNvPr id="26" name="card-head"/>
+          <p:cNvSpPr txBox="1"/>
+          <p:nvPr/>
+        </p:nvSpPr>
+        <p:spPr>
+          <a:xfrm>
+            <a:off x="5056632" y="3931920"/>
+            <a:ext cx="2651760" cy="502920"/>
+          </a:xfrm>
+          <a:prstGeom prst="rect">
+            <a:avLst/>
+          </a:prstGeom>
+          <a:noFill/>
+          <a:ln/>
+        </p:spPr>
+        <p:txBody>
+          <a:bodyPr wrap="square" lIns="0" tIns="0" rIns="0" bIns="0" rtlCol="0" anchor="ctr"/>
+          <a:lstStyle/>
+          <a:p>
+            <a:pPr indent="0" marL="0">
+              <a:buNone/>
+            </a:pPr>
+            <a:r>
+              <a:rPr lang="en-US" sz="1600" b="1" dirty="0">
+                <a:solidFill>
+                  <a:srgbClr val="1B2A2F"/>
+                </a:solidFill>
+              </a:rPr>
+              <a:t>예외 처리</a:t>
+            </a:r>
+            <a:endParaRPr lang="en-US" sz="1600" dirty="0"/>
+          </a:p>
+        </p:txBody>
+      </p:sp>
+      <p:sp>
+        <p:nvSpPr>
+          <p:cNvPr id="27" name="card-body"/>
+          <p:cNvSpPr txBox="1"/>
+          <p:nvPr/>
+        </p:nvSpPr>
+        <p:spPr>
+          <a:xfrm>
+            <a:off x="4507992" y="4526280"/>
+            <a:ext cx="3154680" cy="1371600"/>
+          </a:xfrm>
+          <a:prstGeom prst="rect">
+            <a:avLst/>
+          </a:prstGeom>
+          <a:noFill/>
+          <a:ln/>
+        </p:spPr>
+        <p:txBody>
+          <a:bodyPr wrap="square" lIns="0" tIns="0" rIns="0" bIns="0" rtlCol="0" anchor="t"/>
+          <a:lstStyle/>
+          <a:p>
+            <a:pPr indent="0" marL="0">
+              <a:buNone/>
+            </a:pPr>
+            <a:r>
+              <a:rPr lang="en-US" sz="1300" dirty="0">
+                <a:solidFill>
+                  <a:srgbClr val="1B2A2F"/>
+                </a:solidFill>
+              </a:rPr>
+              <a:t>async void 타이머, 집계 루프 무방비, 빈 catch (B1·B2·B6)</a:t>
+            </a:r>
+            <a:endParaRPr lang="en-US" sz="1300" dirty="0"/>
+          </a:p>
+        </p:txBody>
+      </p:sp>
+      <p:sp>
+        <p:nvSpPr>
+          <p:cNvPr id="28" name="card"/>
+          <p:cNvSpPr/>
+          <p:nvPr/>
+        </p:nvSpPr>
+        <p:spPr>
+          <a:xfrm>
+            <a:off x="8101584" y="3749040"/>
+            <a:ext cx="3611880" cy="2286000"/>
+          </a:xfrm>
+          <a:prstGeom prst="roundRect">
+            <a:avLst>
+              <a:gd name="adj" fmla="val 3200"/>
+            </a:avLst>
+          </a:prstGeom>
+          <a:solidFill>
+            <a:srgbClr val="FFFFFF"/>
+          </a:solidFill>
+          <a:ln w="12700">
+            <a:solidFill>
+              <a:srgbClr val="CBD5D8"/>
+            </a:solidFill>
+            <a:prstDash val="solid"/>
+          </a:ln>
+          <a:effectLst>
+            <a:outerShdw sx="100000" sy="100000" kx="0" ky="0" algn="bl" rotWithShape="0" blurRad="76200" dist="25400" dir="5400000">
+              <a:srgbClr val="000000">
+                <a:alpha val="12000"/>
+              </a:srgbClr>
+            </a:outerShdw>
+          </a:effectLst>
+        </p:spPr>
+      </p:sp>
+      <p:sp>
+        <p:nvSpPr>
+          <p:cNvPr id="29" name="badge"/>
+          <p:cNvSpPr/>
+          <p:nvPr/>
+        </p:nvSpPr>
+        <p:spPr>
+          <a:xfrm>
+            <a:off x="8302752" y="3950208"/>
+            <a:ext cx="457200" cy="457200"/>
+          </a:xfrm>
+          <a:prstGeom prst="ellipse">
+            <a:avLst/>
+          </a:prstGeom>
+          <a:solidFill>
+            <a:srgbClr val="C99A00"/>
+          </a:solidFill>
+          <a:ln w="12700">
+            <a:solidFill>
+              <a:srgbClr val="C99A00"/>
+            </a:solidFill>
+            <a:prstDash val="solid"/>
+          </a:ln>
+        </p:spPr>
+      </p:sp>
+      <p:sp>
+        <p:nvSpPr>
+          <p:cNvPr id="30" name="badge-num"/>
+          <p:cNvSpPr txBox="1"/>
+          <p:nvPr/>
+        </p:nvSpPr>
+        <p:spPr>
+          <a:xfrm>
+            <a:off x="8302752" y="3950208"/>
+            <a:ext cx="457200" cy="457200"/>
+          </a:xfrm>
+          <a:prstGeom prst="rect">
+            <a:avLst/>
+          </a:prstGeom>
+          <a:noFill/>
+          <a:ln/>
+        </p:spPr>
+        <p:txBody>
+          <a:bodyPr wrap="square" lIns="0" tIns="0" rIns="0" bIns="0" rtlCol="0" anchor="ctr"/>
+          <a:lstStyle/>
+          <a:p>
+            <a:pPr algn="ctr" indent="0" marL="0">
+              <a:buNone/>
+            </a:pPr>
+            <a:r>
+              <a:rPr lang="en-US" sz="1500" b="1" dirty="0">
+                <a:solidFill>
+                  <a:srgbClr val="FFFFFF"/>
+                </a:solidFill>
+              </a:rPr>
+              <a:t>6</a:t>
+            </a:r>
+            <a:endParaRPr lang="en-US" sz="1500" dirty="0"/>
+          </a:p>
+        </p:txBody>
+      </p:sp>
+      <p:sp>
+        <p:nvSpPr>
+          <p:cNvPr id="31" name="card-head"/>
+          <p:cNvSpPr txBox="1"/>
+          <p:nvPr/>
+        </p:nvSpPr>
+        <p:spPr>
+          <a:xfrm>
+            <a:off x="8878824" y="3931920"/>
+            <a:ext cx="2651760" cy="502920"/>
+          </a:xfrm>
+          <a:prstGeom prst="rect">
+            <a:avLst/>
+          </a:prstGeom>
+          <a:noFill/>
+          <a:ln/>
+        </p:spPr>
+        <p:txBody>
+          <a:bodyPr wrap="square" lIns="0" tIns="0" rIns="0" bIns="0" rtlCol="0" anchor="ctr"/>
+          <a:lstStyle/>
+          <a:p>
+            <a:pPr indent="0" marL="0">
+              <a:buNone/>
+            </a:pPr>
+            <a:r>
+              <a:rPr lang="en-US" sz="1600" b="1" dirty="0">
+                <a:solidFill>
+                  <a:srgbClr val="1B2A2F"/>
+                </a:solidFill>
+              </a:rPr>
+              <a:t>동시성</a:t>
+            </a:r>
+            <a:endParaRPr lang="en-US" sz="1600" dirty="0"/>
+          </a:p>
+        </p:txBody>
+      </p:sp>
+      <p:sp>
+        <p:nvSpPr>
+          <p:cNvPr id="32" name="card-body"/>
+          <p:cNvSpPr txBox="1"/>
+          <p:nvPr/>
+        </p:nvSpPr>
+        <p:spPr>
+          <a:xfrm>
+            <a:off x="8330184" y="4526280"/>
+            <a:ext cx="3154680" cy="1371600"/>
+          </a:xfrm>
+          <a:prstGeom prst="rect">
+            <a:avLst/>
+          </a:prstGeom>
+          <a:noFill/>
+          <a:ln/>
+        </p:spPr>
+        <p:txBody>
+          <a:bodyPr wrap="square" lIns="0" tIns="0" rIns="0" bIns="0" rtlCol="0" anchor="t"/>
+          <a:lstStyle/>
+          <a:p>
+            <a:pPr indent="0" marL="0">
+              <a:buNone/>
+            </a:pPr>
+            <a:r>
+              <a:rPr lang="en-US" sz="1300" dirty="0">
+                <a:solidFill>
+                  <a:srgbClr val="1B2A2F"/>
+                </a:solidFill>
+              </a:rPr>
+              <a:t>내부 가변 객체 반환, Default 공유 객체 수정 (B3·B10)</a:t>
+            </a:r>
+            <a:endParaRPr lang="en-US" sz="1300" dirty="0"/>
+          </a:p>
+        </p:txBody>
+      </p:sp>
+      <p:sp>
+        <p:nvSpPr>
+          <p:cNvPr id="25" name="Slide Number Placeholder 0"/>
+          <p:cNvSpPr>
+            <a:spLocks noGrp="1"/>
+          </p:cNvSpPr>
+          <p:nvPr>
+            <p:ph type="sldNum" sz="quarter" idx="4294967295"/>
+          </p:nvPr>
+        </p:nvSpPr>
+        <p:spPr>
+          <a:xfrm>
+            <a:off x="11247120" y="6446520"/>
+            <a:ext cx="548640" cy="274320"/>
+          </a:xfrm>
+          <a:prstGeom prst="rect">
+            <a:avLst/>
+          </a:prstGeom>
+          <a:extLst>
+            <a:ext uri="{C572A759-6A51-4108-AA02-DFA0A04FC94B}">
+              <ma14:wrappingTextBoxFlag xmlns:ma14="http://schemas.microsoft.com/office/mac/drawingml/2011/main" val="0"/>
+            </a:ext>
+          </a:extLst>
+        </p:spPr>
+        <p:txBody>
+          <a:bodyPr/>
+          <a:lstStyle>
+            <a:lvl1pPr>
+              <a:defRPr sz="1000">
+                <a:solidFill>
+                  <a:srgbClr val="5B6B70"/>
+                </a:solidFill>
+              </a:defRPr>
+            </a:lvl1pPr>
+          </a:lstStyle>
+          <a:p>
+            <a:pPr algn="r"/>
+            <a:fld id="{F7021451-1387-4CA6-816F-3879F97B5CBC}" type="slidenum">
+              <a:rPr b="0" lang="en-US"/>
+              <a:t>21</a:t>
+            </a:fld>
+            <a:endParaRPr lang="en-US"/>
+          </a:p>
+        </p:txBody>
+      </p:sp>
+    </p:spTree>
+  </p:cSld>
+  <p:clrMapOvr>
+    <a:masterClrMapping/>
+  </p:clrMapOvr>
+</p:sld>
+</file>
+
+<file path=ppt/slides/slide22.xml><?xml version="1.0" encoding="utf-8"?>
+<p:sld xmlns:a="http://schemas.openxmlformats.org/drawingml/2006/main" xmlns:r="http://schemas.openxmlformats.org/officeDocument/2006/relationships" xmlns:p="http://schemas.openxmlformats.org/presentationml/2006/main">
+  <p:cSld name="Slide 22">
+    <p:spTree>
+      <p:nvGrpSpPr>
+        <p:cNvPr id="1" name=""/>
+        <p:cNvGrpSpPr/>
+        <p:nvPr/>
+      </p:nvGrpSpPr>
+      <p:grpSpPr>
+        <a:xfrm>
+          <a:off x="0" y="0"/>
+          <a:ext cx="0" cy="0"/>
+          <a:chOff x="0" y="0"/>
+          <a:chExt cx="0" cy="0"/>
+        </a:xfrm>
+      </p:grpSpPr>
+      <p:sp>
+        <p:nvSpPr>
+          <p:cNvPr id="2" name="Text 0"/>
+          <p:cNvSpPr/>
+          <p:nvPr>
+            <p:ph idx="100" type="title" hasCustomPrompt="1"/>
+          </p:nvPr>
+        </p:nvSpPr>
+        <p:spPr>
+          <a:xfrm>
+            <a:off x="457200" y="274320"/>
+            <a:ext cx="11247120" cy="731520"/>
+          </a:xfrm>
+          <a:prstGeom prst="rect">
+            <a:avLst/>
+          </a:prstGeom>
+          <a:noFill/>
+          <a:ln/>
+        </p:spPr>
+        <p:txBody>
+          <a:bodyPr wrap="square" lIns="0" tIns="0" rIns="0" bIns="0" rtlCol="0" anchor="ctr"/>
+          <a:lstStyle/>
+          <a:p>
+            <a:pPr indent="0" marL="0">
+              <a:buNone/>
+            </a:pPr>
+            <a:r>
+              <a:rPr lang="en-US" sz="3000" b="1" dirty="0">
+                <a:solidFill>
+                  <a:schemeClr val="tx2"/>
+                </a:solidFill>
+              </a:rPr>
+              <a:t>권장 조치 순서</a:t>
+            </a:r>
+            <a:endParaRPr lang="en-US" sz="3000" dirty="0"/>
+          </a:p>
+        </p:txBody>
+      </p:sp>
+      <p:sp>
+        <p:nvSpPr>
+          <p:cNvPr id="3" name="step-head"/>
+          <p:cNvSpPr/>
+          <p:nvPr/>
+        </p:nvSpPr>
+        <p:spPr>
+          <a:xfrm>
+            <a:off x="457200" y="1828800"/>
+            <a:ext cx="2606040" cy="685800"/>
+          </a:xfrm>
+          <a:prstGeom prst="roundRect">
+            <a:avLst>
+              <a:gd name="adj" fmla="val 13333"/>
+            </a:avLst>
+          </a:prstGeom>
+          <a:solidFill>
+            <a:srgbClr val="B8452F"/>
+          </a:solidFill>
+          <a:ln w="12700">
+            <a:solidFill>
+              <a:srgbClr val="B8452F"/>
+            </a:solidFill>
+            <a:prstDash val="solid"/>
+          </a:ln>
+        </p:spPr>
+      </p:sp>
+      <p:sp>
+        <p:nvSpPr>
           <p:cNvPr id="4" name="step-label"/>
           <p:cNvSpPr txBox="1"/>
           <p:nvPr/>
@@ -9537,7 +10331,7 @@
             <a:pPr algn="r"/>
             <a:fld id="{F7021451-1387-4CA6-816F-3879F97B5CBC}" type="slidenum">
               <a:rPr b="0" lang="en-US"/>
-              <a:t>20</a:t>
+              <a:t>22</a:t>
             </a:fld>
             <a:endParaRPr lang="en-US"/>
           </a:p>
@@ -11750,7 +12544,7 @@
                   <a:schemeClr val="tx2"/>
                 </a:solidFill>
               </a:rPr>
-              <a:t>Heartbeat 처리</a:t>
+              <a:t>세션 내부 — Pipe 로 수신과 해석 분리</a:t>
             </a:r>
             <a:endParaRPr lang="en-US" sz="3000" dirty="0"/>
           </a:p>
@@ -11785,7 +12579,7 @@
       </p:sp>
       <p:pic>
         <p:nvPicPr>
-          <p:cNvPr id="4" name="Heartbeat 처리" descr="Heartbeat 처리">    </p:cNvPr>
+          <p:cNvPr id="4" name="세션 내부 — Pipe 로 수신과 해석 분리" descr="세션 내부 — Pipe 로 수신과 해석 분리">    </p:cNvPr>
           <p:cNvPicPr>
             <a:picLocks noChangeAspect="1"/>
           </p:cNvPicPr>
@@ -11799,8 +12593,8 @@
         </p:blipFill>
         <p:spPr>
           <a:xfrm>
-            <a:off x="566928" y="1414728"/>
-            <a:ext cx="7598664" cy="4577183"/>
+            <a:off x="1638502" y="1252728"/>
+            <a:ext cx="5455516" cy="4901184"/>
           </a:xfrm>
           <a:prstGeom prst="rect">
             <a:avLst/>
@@ -11867,7 +12661,7 @@
                   <a:srgbClr val="0F6E5C"/>
                 </a:solidFill>
               </a:rPr>
-              <a:t>상태 저장</a:t>
+              <a:t>Hot Task</a:t>
             </a:r>
             <a:endParaRPr lang="en-US" sz="1500" dirty="0"/>
           </a:p>
@@ -11884,7 +12678,7 @@
                   <a:srgbClr val="1B2A2F"/>
                 </a:solidFill>
               </a:rPr>
-              <a:t>메모리에 덮어쓰고 10초마다 dock_message_events 에 기록</a:t>
+              <a:t>async 메서드는 호출 즉시 실행. ToList() 가 포트별 리스너를, 세션은 FillPipe·ReadPipe 두 Task 를 바로 시작</a:t>
             </a:r>
             <a:endParaRPr lang="en-US" sz="1500" dirty="0"/>
           </a:p>
@@ -11901,7 +12695,7 @@
                   <a:srgbClr val="0F6E5C"/>
                 </a:solidFill>
               </a:rPr>
-              <a:t>설정 내려주기</a:t>
+              <a:t>Pipe 생산자·소비자</a:t>
             </a:r>
             <a:endParaRPr lang="en-US" sz="1500" dirty="0"/>
           </a:p>
@@ -11918,7 +12712,7 @@
                   <a:srgbClr val="1B2A2F"/>
                 </a:solidFill>
               </a:rPr>
-              <a:t>응답에 도크 활성 파라미터(없으면 Default)를 실어 보냄</a:t>
+              <a:t>FillPipe 는 소켓 → Pipe (복사 없음), ReadPipe 는 STX…ETX 만 꺼내고 남은 조각은 AdvanceTo 로 보존</a:t>
             </a:r>
             <a:endParaRPr lang="en-US" sz="1500" dirty="0"/>
           </a:p>
@@ -11935,7 +12729,7 @@
                   <a:srgbClr val="0F6E5C"/>
                 </a:solidFill>
               </a:rPr>
-              <a:t>알람</a:t>
+              <a:t>배압과 종료</a:t>
             </a:r>
             <a:endParaRPr lang="en-US" sz="1500" dirty="0"/>
           </a:p>
@@ -11949,7 +12743,7 @@
                   <a:srgbClr val="1B2A2F"/>
                 </a:solidFill>
               </a:rPr>
-              <a:t>장치 상태 비트 변화만 ftms_event_log 로 기록 (DeviceStatusManager)</a:t>
+              <a:t>64KB 이상 쌓이면 FlushAsync 대기. 끊김 → writer Complete → reader 종료 → 목록 정리</a:t>
             </a:r>
             <a:endParaRPr lang="en-US" sz="1500" dirty="0"/>
           </a:p>

--- a/docs/04_주요클래스-함수-발표.pptx
+++ b/docs/04_주요클래스-함수-발표.pptx
@@ -27,9 +27,10 @@
     <p:sldId id="275" r:id="rId21"/>
     <p:sldId id="276" r:id="rId22"/>
     <p:sldId id="277" r:id="rId23"/>
+    <p:sldId id="278" r:id="rId24"/>
   </p:sldIdLst>
   <p:notesMasterIdLst>
-    <p:notesMasterId r:id="rId24"/>
+    <p:notesMasterId r:id="rId25"/>
   </p:notesMasterIdLst>
   <p:sldSz cx="12192000" cy="6858000"/>
   <p:notesSz cx="6858000" cy="12192000"/>
@@ -128,14 +129,14 @@
   <p:extLst>
     <p:ext uri="{521415D9-36F7-43E2-AB2F-B90AF26B5E84}">
       <p14:sectionLst xmlns:p14="http://schemas.microsoft.com/office/powerpoint/2010/main">
-        <p14:section name="개요" id="{a15d5372-264c-fc8f-b974-c1205415609e}">
+        <p14:section name="개요" id="{29eee488-4a91-d878-40ae-418843000ccc}">
           <p14:sldIdLst>
             <p14:sldId id="256"/>
             <p14:sldId id="257"/>
             <p14:sldId id="258"/>
           </p14:sldIdLst>
         </p14:section>
-        <p14:section name="app-server.ftms" id="{748b1861-0e38-a34e-2575-f02f0b8801f6}">
+        <p14:section name="app-server.ftms" id="{88a6c6db-1733-9b3f-005a-cc9b8422926e}">
           <p14:sldIdLst>
             <p14:sldId id="259"/>
             <p14:sldId id="260"/>
@@ -150,20 +151,21 @@
             <p14:sldId id="269"/>
             <p14:sldId id="270"/>
             <p14:sldId id="271"/>
+            <p14:sldId id="272"/>
           </p14:sldIdLst>
         </p14:section>
-        <p14:section name="DxfBlazorViewer.Client" id="{ecd6649e-f02e-aab5-0f15-18e22325cece}">
+        <p14:section name="DxfBlazorViewer.Client" id="{bbaa9030-982f-7859-b41d-1e9dbfa20729}">
           <p14:sldIdLst>
-            <p14:sldId id="272"/>
             <p14:sldId id="273"/>
             <p14:sldId id="274"/>
             <p14:sldId id="275"/>
+            <p14:sldId id="276"/>
           </p14:sldIdLst>
         </p14:section>
-        <p14:section name="정리" id="{086c2256-2fde-1939-a68b-63b010e2af4a}">
+        <p14:section name="정리" id="{9cfa1a23-ab97-52c7-851c-0f13f0c52061}">
           <p14:sldIdLst>
-            <p14:sldId id="276"/>
             <p14:sldId id="277"/>
+            <p14:sldId id="278"/>
           </p14:sldIdLst>
         </p14:section>
       </p14:sectionLst>
@@ -1274,7 +1276,7 @@
           <a:p>
             <a:r>
               <a:rPr lang="en-US" dirty="0"/>
-              <a:t/>
+              <a:t>접근 방식은 세 가지입니다. Identity 는 Scoped AccountDbContext, 싱글턴 서비스는 IDbContextFactory&lt;DataDbContext&gt;(풀 128), 대량 처리와 DB 함수 호출은 NpgsqlConnection 으로 직접 SQL 을 실행합니다. 실제 TCP 연결은 Npgsql 연결 풀이 재사용합니다.</a:t>
             </a:r>
             <a:endParaRPr lang="en-US" dirty="0"/>
           </a:p>
@@ -1450,7 +1452,7 @@
           <a:p>
             <a:r>
               <a:rPr lang="en-US" dirty="0"/>
-              <a:t>1~2초 폴링 코드에 중단점을 걸면 WASM 디버깅이 매우 느려집니다. Viewer 는 IAsyncDisposable 만 구현해 Dispose() 가 호출되지 않는 점도 주의합니다.</a:t>
+              <a:t/>
             </a:r>
             <a:endParaRPr lang="en-US" dirty="0"/>
           </a:p>
@@ -1626,7 +1628,7 @@
           <a:p>
             <a:r>
               <a:rPr lang="en-US" dirty="0"/>
-              <a:t/>
+              <a:t>1~2초 폴링 코드에 중단점을 걸면 WASM 디버깅이 매우 느려집니다. Viewer 는 IAsyncDisposable 만 구현해 Dispose() 가 호출되지 않는 점도 주의합니다.</a:t>
             </a:r>
             <a:endParaRPr lang="en-US" dirty="0"/>
           </a:p>
@@ -1826,6 +1828,94 @@
             <a:fld id="{F7021451-1387-4CA6-816F-3879F97B5CBC}" type="slidenum">
               <a:rPr lang="en-US"/>
               <a:t>22</a:t>
+            </a:fld>
+            <a:endParaRPr lang="en-US"/>
+          </a:p>
+        </p:txBody>
+      </p:sp>
+    </p:spTree>
+    <p:extLst>
+      <p:ext uri="{BB962C8B-B14F-4D97-AF65-F5344CB8AC3E}">
+        <p14:creationId xmlns:p14="http://schemas.microsoft.com/office/powerpoint/2010/main" val="1024086991"/>
+      </p:ext>
+    </p:extLst>
+  </p:cSld>
+  <p:clrMapOvr>
+    <a:masterClrMapping/>
+  </p:clrMapOvr>
+</p:notes>
+</file>
+
+<file path=ppt/notesSlides/notesSlide23.xml><?xml version="1.0" encoding="utf-8"?>
+<p:notes xmlns:a="http://schemas.openxmlformats.org/drawingml/2006/main" xmlns:r="http://schemas.openxmlformats.org/officeDocument/2006/relationships" xmlns:p="http://schemas.openxmlformats.org/presentationml/2006/main">
+  <p:cSld>
+    <p:spTree>
+      <p:nvGrpSpPr>
+        <p:cNvPr id="1" name=""/>
+        <p:cNvGrpSpPr/>
+        <p:nvPr/>
+      </p:nvGrpSpPr>
+      <p:grpSpPr>
+        <a:xfrm>
+          <a:off x="0" y="0"/>
+          <a:ext cx="0" cy="0"/>
+          <a:chOff x="0" y="0"/>
+          <a:chExt cx="0" cy="0"/>
+        </a:xfrm>
+      </p:grpSpPr>
+      <p:sp>
+        <p:nvSpPr>
+          <p:cNvPr id="2" name="Slide Image Placeholder 1"/>
+          <p:cNvSpPr>
+            <a:spLocks noGrp="1" noRot="1" noChangeAspect="1"/>
+          </p:cNvSpPr>
+          <p:nvPr>
+            <p:ph type="sldImg"/>
+          </p:nvPr>
+        </p:nvSpPr>
+        <p:spPr/>
+      </p:sp>
+      <p:sp>
+        <p:nvSpPr>
+          <p:cNvPr id="3" name="Notes Placeholder 2"/>
+          <p:cNvSpPr>
+            <a:spLocks noGrp="1"/>
+          </p:cNvSpPr>
+          <p:nvPr>
+            <p:ph type="body" idx="1"/>
+          </p:nvPr>
+        </p:nvSpPr>
+        <p:spPr/>
+        <p:txBody>
+          <a:bodyPr/>
+          <a:lstStyle/>
+          <a:p>
+            <a:r>
+              <a:rPr lang="en-US" dirty="0"/>
+              <a:t/>
+            </a:r>
+            <a:endParaRPr lang="en-US" dirty="0"/>
+          </a:p>
+        </p:txBody>
+      </p:sp>
+      <p:sp>
+        <p:nvSpPr>
+          <p:cNvPr id="4" name="Slide Number Placeholder 3"/>
+          <p:cNvSpPr>
+            <a:spLocks noGrp="1"/>
+          </p:cNvSpPr>
+          <p:nvPr>
+            <p:ph type="sldNum" sz="quarter" idx="10"/>
+          </p:nvPr>
+        </p:nvSpPr>
+        <p:spPr/>
+        <p:txBody>
+          <a:bodyPr/>
+          <a:lstStyle/>
+          <a:p>
+            <a:fld id="{F7021451-1387-4CA6-816F-3879F97B5CBC}" type="slidenum">
+              <a:rPr lang="en-US"/>
+              <a:t>23</a:t>
             </a:fld>
             <a:endParaRPr lang="en-US"/>
           </a:p>
@@ -6604,8 +6694,8 @@
         </p:nvSpPr>
         <p:spPr>
           <a:xfrm>
-            <a:off x="731520" y="2377440"/>
-            <a:ext cx="10698480" cy="1097280"/>
+            <a:off x="457200" y="274320"/>
+            <a:ext cx="11247120" cy="731520"/>
           </a:xfrm>
           <a:prstGeom prst="rect">
             <a:avLst/>
@@ -6614,36 +6704,112 @@
           <a:ln/>
         </p:spPr>
         <p:txBody>
-          <a:bodyPr wrap="square" rtlCol="0"/>
-          <a:lstStyle/>
-          <a:p>
-            <a:pPr indent="0" marL="0">
-              <a:buNone/>
-            </a:pPr>
-            <a:r>
-              <a:rPr lang="en-US" sz="4000" b="1" dirty="0">
-                <a:solidFill>
-                  <a:schemeClr val="bg1"/>
-                </a:solidFill>
-              </a:rPr>
-              <a:t>DxfBlazorViewer.Client</a:t>
-            </a:r>
-            <a:endParaRPr lang="en-US" sz="4000" dirty="0"/>
-          </a:p>
-        </p:txBody>
-      </p:sp>
-      <p:sp>
-        <p:nvSpPr>
-          <p:cNvPr id="3" name="Text 0"/>
+          <a:bodyPr wrap="square" lIns="0" tIns="0" rIns="0" bIns="0" rtlCol="0" anchor="ctr"/>
+          <a:lstStyle/>
+          <a:p>
+            <a:pPr indent="0" marL="0">
+              <a:buNone/>
+            </a:pPr>
+            <a:r>
+              <a:rPr lang="en-US" sz="3000" b="1" dirty="0">
+                <a:solidFill>
+                  <a:schemeClr val="tx2"/>
+                </a:solidFill>
+              </a:rPr>
+              <a:t>EF Core 와 DB 연결</a:t>
+            </a:r>
+            <a:endParaRPr lang="en-US" sz="3000" dirty="0"/>
+          </a:p>
+        </p:txBody>
+      </p:sp>
+      <p:sp>
+        <p:nvSpPr>
+          <p:cNvPr id="3" name="diagram-frame"/>
           <p:cNvSpPr/>
-          <p:nvPr>
-            <p:ph idx="101" type="body" hasCustomPrompt="1"/>
-          </p:nvPr>
-        </p:nvSpPr>
-        <p:spPr>
-          <a:xfrm>
-            <a:off x="731520" y="3566160"/>
-            <a:ext cx="10698480" cy="914400"/>
+          <p:nvPr/>
+        </p:nvSpPr>
+        <p:spPr>
+          <a:xfrm>
+            <a:off x="457200" y="1143000"/>
+            <a:ext cx="11292840" cy="3108960"/>
+          </a:xfrm>
+          <a:prstGeom prst="roundRect">
+            <a:avLst>
+              <a:gd name="adj" fmla="val 2353"/>
+            </a:avLst>
+          </a:prstGeom>
+          <a:solidFill>
+            <a:srgbClr val="FFFFFF"/>
+          </a:solidFill>
+          <a:ln w="12700">
+            <a:solidFill>
+              <a:srgbClr val="CBD5D8"/>
+            </a:solidFill>
+            <a:prstDash val="solid"/>
+          </a:ln>
+        </p:spPr>
+      </p:sp>
+      <p:pic>
+        <p:nvPicPr>
+          <p:cNvPr id="4" name="EF Core 와 DB 연결" descr="EF Core 와 DB 연결">    </p:cNvPr>
+          <p:cNvPicPr>
+            <a:picLocks noChangeAspect="1"/>
+          </p:cNvPicPr>
+          <p:nvPr/>
+        </p:nvPicPr>
+        <p:blipFill>
+          <a:blip r:embed="rId1"/>
+          <a:stretch>
+            <a:fillRect/>
+          </a:stretch>
+        </p:blipFill>
+        <p:spPr>
+          <a:xfrm>
+            <a:off x="1531818" y="1280160"/>
+            <a:ext cx="9143603" cy="2834640"/>
+          </a:xfrm>
+          <a:prstGeom prst="rect">
+            <a:avLst/>
+          </a:prstGeom>
+        </p:spPr>
+      </p:pic>
+      <p:sp>
+        <p:nvSpPr>
+          <p:cNvPr id="5" name="card"/>
+          <p:cNvSpPr/>
+          <p:nvPr/>
+        </p:nvSpPr>
+        <p:spPr>
+          <a:xfrm>
+            <a:off x="457200" y="4526280"/>
+            <a:ext cx="3581400" cy="1737360"/>
+          </a:xfrm>
+          <a:prstGeom prst="roundRect">
+            <a:avLst>
+              <a:gd name="adj" fmla="val 4211"/>
+            </a:avLst>
+          </a:prstGeom>
+          <a:solidFill>
+            <a:srgbClr val="E6F2EE"/>
+          </a:solidFill>
+          <a:ln w="12700">
+            <a:solidFill>
+              <a:srgbClr val="E6F2EE"/>
+            </a:solidFill>
+            <a:prstDash val="solid"/>
+          </a:ln>
+        </p:spPr>
+      </p:sp>
+      <p:sp>
+        <p:nvSpPr>
+          <p:cNvPr id="6" name="card-text"/>
+          <p:cNvSpPr txBox="1"/>
+          <p:nvPr/>
+        </p:nvSpPr>
+        <p:spPr>
+          <a:xfrm>
+            <a:off x="658368" y="4690872"/>
+            <a:ext cx="3179064" cy="1408176"/>
           </a:xfrm>
           <a:prstGeom prst="rect">
             <a:avLst/>
@@ -6652,21 +6818,198 @@
           <a:ln/>
         </p:spPr>
         <p:txBody>
-          <a:bodyPr wrap="square" rtlCol="0"/>
-          <a:lstStyle/>
-          <a:p>
-            <a:pPr indent="0" marL="0">
-              <a:buNone/>
-            </a:pPr>
-            <a:r>
-              <a:rPr lang="en-US" sz="1800" dirty="0">
-                <a:solidFill>
-                  <a:srgbClr val="D6EFE7"/>
-                </a:solidFill>
-              </a:rPr>
-              <a:t>Blazor WASM · SkiaSharp 도면/도식 렌더링 · 폴링 + SignalR</a:t>
-            </a:r>
-            <a:endParaRPr lang="en-US" sz="1800" dirty="0"/>
+          <a:bodyPr wrap="square" rtlCol="0" anchor="t"/>
+          <a:lstStyle/>
+          <a:p>
+            <a:pPr indent="0" marL="0">
+              <a:spcAft>
+                <a:spcPts val="400"/>
+              </a:spcAft>
+              <a:buNone/>
+            </a:pPr>
+            <a:r>
+              <a:rPr lang="en-US" sz="1500" b="1" dirty="0">
+                <a:solidFill>
+                  <a:srgbClr val="0F6E5C"/>
+                </a:solidFill>
+              </a:rPr>
+              <a:t>패키지는 자동 복원</a:t>
+            </a:r>
+            <a:endParaRPr lang="en-US" sz="1500" dirty="0"/>
+          </a:p>
+          <a:p>
+            <a:pPr indent="0" marL="0">
+              <a:buNone/>
+            </a:pPr>
+            <a:r>
+              <a:rPr lang="en-US" sz="1300" dirty="0">
+                <a:solidFill>
+                  <a:srgbClr val="1B2A2F"/>
+                </a:solidFill>
+              </a:rPr>
+              <a:t>csproj PackageReference(8.*) → 빌드 시 NuGet Restore. Npgsql.EFCore 하나로 EF Core·Npgsql 함께 설치</a:t>
+            </a:r>
+            <a:endParaRPr lang="en-US" sz="1500" dirty="0"/>
+          </a:p>
+        </p:txBody>
+      </p:sp>
+      <p:sp>
+        <p:nvSpPr>
+          <p:cNvPr id="7" name="card"/>
+          <p:cNvSpPr/>
+          <p:nvPr/>
+        </p:nvSpPr>
+        <p:spPr>
+          <a:xfrm>
+            <a:off x="4312920" y="4526280"/>
+            <a:ext cx="3581400" cy="1737360"/>
+          </a:xfrm>
+          <a:prstGeom prst="roundRect">
+            <a:avLst>
+              <a:gd name="adj" fmla="val 4211"/>
+            </a:avLst>
+          </a:prstGeom>
+          <a:solidFill>
+            <a:srgbClr val="E6F2EE"/>
+          </a:solidFill>
+          <a:ln w="12700">
+            <a:solidFill>
+              <a:srgbClr val="E6F2EE"/>
+            </a:solidFill>
+            <a:prstDash val="solid"/>
+          </a:ln>
+        </p:spPr>
+      </p:sp>
+      <p:sp>
+        <p:nvSpPr>
+          <p:cNvPr id="8" name="card-text"/>
+          <p:cNvSpPr txBox="1"/>
+          <p:nvPr/>
+        </p:nvSpPr>
+        <p:spPr>
+          <a:xfrm>
+            <a:off x="4514088" y="4690872"/>
+            <a:ext cx="3179064" cy="1408176"/>
+          </a:xfrm>
+          <a:prstGeom prst="rect">
+            <a:avLst/>
+          </a:prstGeom>
+          <a:noFill/>
+          <a:ln/>
+        </p:spPr>
+        <p:txBody>
+          <a:bodyPr wrap="square" rtlCol="0" anchor="t"/>
+          <a:lstStyle/>
+          <a:p>
+            <a:pPr indent="0" marL="0">
+              <a:spcAft>
+                <a:spcPts val="400"/>
+              </a:spcAft>
+              <a:buNone/>
+            </a:pPr>
+            <a:r>
+              <a:rPr lang="en-US" sz="1500" b="1" dirty="0">
+                <a:solidFill>
+                  <a:srgbClr val="0F6E5C"/>
+                </a:solidFill>
+              </a:rPr>
+              <a:t>등록과 첫 접속</a:t>
+            </a:r>
+            <a:endParaRPr lang="en-US" sz="1500" dirty="0"/>
+          </a:p>
+          <a:p>
+            <a:pPr indent="0" marL="0">
+              <a:buNone/>
+            </a:pPr>
+            <a:r>
+              <a:rPr lang="en-US" sz="1300" dirty="0">
+                <a:solidFill>
+                  <a:srgbClr val="1B2A2F"/>
+                </a:solidFill>
+              </a:rPr>
+              <a:t>AddDbContextDetails 는 UseNpgsql 설정만 등록. 실제 접속은 BuildDatabaseAsync 의 EnsureCreated()</a:t>
+            </a:r>
+            <a:endParaRPr lang="en-US" sz="1500" dirty="0"/>
+          </a:p>
+        </p:txBody>
+      </p:sp>
+      <p:sp>
+        <p:nvSpPr>
+          <p:cNvPr id="9" name="card"/>
+          <p:cNvSpPr/>
+          <p:nvPr/>
+        </p:nvSpPr>
+        <p:spPr>
+          <a:xfrm>
+            <a:off x="8168640" y="4526280"/>
+            <a:ext cx="3581400" cy="1737360"/>
+          </a:xfrm>
+          <a:prstGeom prst="roundRect">
+            <a:avLst>
+              <a:gd name="adj" fmla="val 4211"/>
+            </a:avLst>
+          </a:prstGeom>
+          <a:solidFill>
+            <a:srgbClr val="FBEDEA"/>
+          </a:solidFill>
+          <a:ln w="12700">
+            <a:solidFill>
+              <a:srgbClr val="FBEDEA"/>
+            </a:solidFill>
+            <a:prstDash val="solid"/>
+          </a:ln>
+        </p:spPr>
+      </p:sp>
+      <p:sp>
+        <p:nvSpPr>
+          <p:cNvPr id="10" name="card-text"/>
+          <p:cNvSpPr txBox="1"/>
+          <p:nvPr/>
+        </p:nvSpPr>
+        <p:spPr>
+          <a:xfrm>
+            <a:off x="8369808" y="4690872"/>
+            <a:ext cx="3179064" cy="1408176"/>
+          </a:xfrm>
+          <a:prstGeom prst="rect">
+            <a:avLst/>
+          </a:prstGeom>
+          <a:noFill/>
+          <a:ln/>
+        </p:spPr>
+        <p:txBody>
+          <a:bodyPr wrap="square" rtlCol="0" anchor="t"/>
+          <a:lstStyle/>
+          <a:p>
+            <a:pPr indent="0" marL="0">
+              <a:spcAft>
+                <a:spcPts val="400"/>
+              </a:spcAft>
+              <a:buNone/>
+            </a:pPr>
+            <a:r>
+              <a:rPr lang="en-US" sz="1500" b="1" dirty="0">
+                <a:solidFill>
+                  <a:srgbClr val="B8452F"/>
+                </a:solidFill>
+              </a:rPr>
+              <a:t>주의</a:t>
+            </a:r>
+            <a:endParaRPr lang="en-US" sz="1500" dirty="0"/>
+          </a:p>
+          <a:p>
+            <a:pPr indent="0" marL="0">
+              <a:buNone/>
+            </a:pPr>
+            <a:r>
+              <a:rPr lang="en-US" sz="1300" dirty="0">
+                <a:solidFill>
+                  <a:srgbClr val="1B2A2F"/>
+                </a:solidFill>
+              </a:rPr>
+              <a:t>EnsureCreated 는 테이블이 있으면 무동작(Migrations 없음) · 연결 문자열 비밀번호 로그 출력(S10)</a:t>
+            </a:r>
+            <a:endParaRPr lang="en-US" sz="1500" dirty="0"/>
           </a:p>
         </p:txBody>
       </p:sp>
@@ -6682,7 +7025,7 @@
         </p:nvSpPr>
         <p:spPr>
           <a:xfrm>
-            <a:off x="11338560" y="6400800"/>
+            <a:off x="11247120" y="6446520"/>
             <a:ext cx="548640" cy="274320"/>
           </a:xfrm>
           <a:prstGeom prst="rect">
@@ -6700,13 +7043,13 @@
             <a:lvl1pPr>
               <a:defRPr sz="1000">
                 <a:solidFill>
-                  <a:srgbClr val="D6EFE7"/>
+                  <a:srgbClr val="5B6B70"/>
                 </a:solidFill>
               </a:defRPr>
             </a:lvl1pPr>
           </a:lstStyle>
           <a:p>
-            <a:pPr algn="l"/>
+            <a:pPr algn="r"/>
             <a:fld id="{F7021451-1387-4CA6-816F-3879F97B5CBC}" type="slidenum">
               <a:rPr b="0" lang="en-US"/>
               <a:t>17</a:t>
@@ -6750,8 +7093,8 @@
         </p:nvSpPr>
         <p:spPr>
           <a:xfrm>
-            <a:off x="457200" y="274320"/>
-            <a:ext cx="11247120" cy="731520"/>
+            <a:off x="731520" y="2377440"/>
+            <a:ext cx="10698480" cy="1097280"/>
           </a:xfrm>
           <a:prstGeom prst="rect">
             <a:avLst/>
@@ -6760,112 +7103,36 @@
           <a:ln/>
         </p:spPr>
         <p:txBody>
-          <a:bodyPr wrap="square" lIns="0" tIns="0" rIns="0" bIns="0" rtlCol="0" anchor="ctr"/>
-          <a:lstStyle/>
-          <a:p>
-            <a:pPr indent="0" marL="0">
-              <a:buNone/>
-            </a:pPr>
-            <a:r>
-              <a:rPr lang="en-US" sz="3000" b="1" dirty="0">
-                <a:solidFill>
-                  <a:schemeClr val="tx2"/>
-                </a:solidFill>
-              </a:rPr>
-              <a:t>웹 UI 구성</a:t>
-            </a:r>
-            <a:endParaRPr lang="en-US" sz="3000" dirty="0"/>
-          </a:p>
-        </p:txBody>
-      </p:sp>
-      <p:sp>
-        <p:nvSpPr>
-          <p:cNvPr id="3" name="diagram-frame"/>
+          <a:bodyPr wrap="square" rtlCol="0"/>
+          <a:lstStyle/>
+          <a:p>
+            <a:pPr indent="0" marL="0">
+              <a:buNone/>
+            </a:pPr>
+            <a:r>
+              <a:rPr lang="en-US" sz="4000" b="1" dirty="0">
+                <a:solidFill>
+                  <a:schemeClr val="bg1"/>
+                </a:solidFill>
+              </a:rPr>
+              <a:t>DxfBlazorViewer.Client</a:t>
+            </a:r>
+            <a:endParaRPr lang="en-US" sz="4000" dirty="0"/>
+          </a:p>
+        </p:txBody>
+      </p:sp>
+      <p:sp>
+        <p:nvSpPr>
+          <p:cNvPr id="3" name="Text 0"/>
           <p:cNvSpPr/>
-          <p:nvPr/>
-        </p:nvSpPr>
-        <p:spPr>
-          <a:xfrm>
-            <a:off x="457200" y="1143000"/>
-            <a:ext cx="7818120" cy="5120640"/>
-          </a:xfrm>
-          <a:prstGeom prst="roundRect">
-            <a:avLst>
-              <a:gd name="adj" fmla="val 1429"/>
-            </a:avLst>
-          </a:prstGeom>
-          <a:solidFill>
-            <a:srgbClr val="FFFFFF"/>
-          </a:solidFill>
-          <a:ln w="12700">
-            <a:solidFill>
-              <a:srgbClr val="CBD5D8"/>
-            </a:solidFill>
-            <a:prstDash val="solid"/>
-          </a:ln>
-        </p:spPr>
-      </p:sp>
-      <p:pic>
-        <p:nvPicPr>
-          <p:cNvPr id="4" name="웹 UI 구성" descr="웹 UI 구성">    </p:cNvPr>
-          <p:cNvPicPr>
-            <a:picLocks noChangeAspect="1"/>
-          </p:cNvPicPr>
-          <p:nvPr/>
-        </p:nvPicPr>
-        <p:blipFill>
-          <a:blip r:embed="rId1"/>
-          <a:stretch>
-            <a:fillRect/>
-          </a:stretch>
-        </p:blipFill>
-        <p:spPr>
-          <a:xfrm>
-            <a:off x="1923242" y="1252728"/>
-            <a:ext cx="4886037" cy="4901184"/>
-          </a:xfrm>
-          <a:prstGeom prst="rect">
-            <a:avLst/>
-          </a:prstGeom>
-        </p:spPr>
-      </p:pic>
-      <p:sp>
-        <p:nvSpPr>
-          <p:cNvPr id="5" name="points-panel"/>
-          <p:cNvSpPr/>
-          <p:nvPr/>
-        </p:nvSpPr>
-        <p:spPr>
-          <a:xfrm>
-            <a:off x="8503920" y="1143000"/>
-            <a:ext cx="3246120" cy="5120640"/>
-          </a:xfrm>
-          <a:prstGeom prst="roundRect">
-            <a:avLst>
-              <a:gd name="adj" fmla="val 2254"/>
-            </a:avLst>
-          </a:prstGeom>
-          <a:solidFill>
-            <a:srgbClr val="E6F2EE"/>
-          </a:solidFill>
-          <a:ln w="12700">
-            <a:solidFill>
-              <a:srgbClr val="E6F2EE"/>
-            </a:solidFill>
-            <a:prstDash val="solid"/>
-          </a:ln>
-        </p:spPr>
-      </p:sp>
-      <p:sp>
-        <p:nvSpPr>
-          <p:cNvPr id="6" name="points-text"/>
-          <p:cNvSpPr txBox="1"/>
-          <p:nvPr/>
-        </p:nvSpPr>
-        <p:spPr>
-          <a:xfrm>
-            <a:off x="8732520" y="1325880"/>
-            <a:ext cx="2788920" cy="4754880"/>
+          <p:nvPr>
+            <p:ph idx="101" type="body" hasCustomPrompt="1"/>
+          </p:nvPr>
+        </p:nvSpPr>
+        <p:spPr>
+          <a:xfrm>
+            <a:off x="731520" y="3566160"/>
+            <a:ext cx="10698480" cy="914400"/>
           </a:xfrm>
           <a:prstGeom prst="rect">
             <a:avLst/>
@@ -6874,106 +7141,21 @@
           <a:ln/>
         </p:spPr>
         <p:txBody>
-          <a:bodyPr wrap="square" rtlCol="0" anchor="t"/>
-          <a:lstStyle/>
-          <a:p>
-            <a:pPr indent="0" marL="0">
-              <a:spcAft>
-                <a:spcPts val="200"/>
-              </a:spcAft>
-              <a:buNone/>
-            </a:pPr>
-            <a:r>
-              <a:rPr lang="en-US" sz="1500" b="1" dirty="0">
-                <a:solidFill>
-                  <a:srgbClr val="0F6E5C"/>
-                </a:solidFill>
-              </a:rPr>
-              <a:t>상대 주소 API</a:t>
-            </a:r>
-            <a:endParaRPr lang="en-US" sz="1500" dirty="0"/>
-          </a:p>
-          <a:p>
-            <a:pPr indent="0" marL="0">
-              <a:spcAft>
-                <a:spcPts val="1000"/>
-              </a:spcAft>
-              <a:buNone/>
-            </a:pPr>
-            <a:r>
-              <a:rPr lang="en-US" sz="1300" dirty="0">
-                <a:solidFill>
-                  <a:srgbClr val="1B2A2F"/>
-                </a:solidFill>
-              </a:rPr>
-              <a:t>HttpClient BaseAddress = 현재 사이트 → 리버스 프록시 필수</a:t>
-            </a:r>
-            <a:endParaRPr lang="en-US" sz="1500" dirty="0"/>
-          </a:p>
-          <a:p>
-            <a:pPr indent="0" marL="0">
-              <a:spcAft>
-                <a:spcPts val="200"/>
-              </a:spcAft>
-              <a:buNone/>
-            </a:pPr>
-            <a:r>
-              <a:rPr lang="en-US" sz="1500" b="1" dirty="0">
-                <a:solidFill>
-                  <a:srgbClr val="B8452F"/>
-                </a:solidFill>
-              </a:rPr>
-              <a:t>메뉴만 숨김</a:t>
-            </a:r>
-            <a:endParaRPr lang="en-US" sz="1500" dirty="0"/>
-          </a:p>
-          <a:p>
-            <a:pPr indent="0" marL="0">
-              <a:spcAft>
-                <a:spcPts val="1000"/>
-              </a:spcAft>
-              <a:buNone/>
-            </a:pPr>
-            <a:r>
-              <a:rPr lang="en-US" sz="1300" dirty="0">
-                <a:solidFill>
-                  <a:srgbClr val="1B2A2F"/>
-                </a:solidFill>
-              </a:rPr>
-              <a:t>MainLayout 이 역할별 메뉴만 숨기고, 페이지 자체는 로그인 확인 없음</a:t>
-            </a:r>
-            <a:endParaRPr lang="en-US" sz="1500" dirty="0"/>
-          </a:p>
-          <a:p>
-            <a:pPr indent="0" marL="0">
-              <a:spcAft>
-                <a:spcPts val="200"/>
-              </a:spcAft>
-              <a:buNone/>
-            </a:pPr>
-            <a:r>
-              <a:rPr lang="en-US" sz="1500" b="1" dirty="0">
-                <a:solidFill>
-                  <a:srgbClr val="0F6E5C"/>
-                </a:solidFill>
-              </a:rPr>
-              <a:t>Viewer 재사용</a:t>
-            </a:r>
-            <a:endParaRPr lang="en-US" sz="1500" dirty="0"/>
-          </a:p>
-          <a:p>
-            <a:pPr indent="0" marL="0">
-              <a:buNone/>
-            </a:pPr>
-            <a:r>
-              <a:rPr lang="en-US" sz="1300" dirty="0">
-                <a:solidFill>
-                  <a:srgbClr val="1B2A2F"/>
-                </a:solidFill>
-              </a:rPr>
-              <a:t>도면·도식 두 렌더러를 가진 Viewer 를 Monitoring 도 사용</a:t>
-            </a:r>
-            <a:endParaRPr lang="en-US" sz="1500" dirty="0"/>
+          <a:bodyPr wrap="square" rtlCol="0"/>
+          <a:lstStyle/>
+          <a:p>
+            <a:pPr indent="0" marL="0">
+              <a:buNone/>
+            </a:pPr>
+            <a:r>
+              <a:rPr lang="en-US" sz="1800" dirty="0">
+                <a:solidFill>
+                  <a:srgbClr val="D6EFE7"/>
+                </a:solidFill>
+              </a:rPr>
+              <a:t>Blazor WASM · SkiaSharp 도면/도식 렌더링 · 폴링 + SignalR</a:t>
+            </a:r>
+            <a:endParaRPr lang="en-US" sz="1800" dirty="0"/>
           </a:p>
         </p:txBody>
       </p:sp>
@@ -6989,7 +7171,7 @@
         </p:nvSpPr>
         <p:spPr>
           <a:xfrm>
-            <a:off x="11247120" y="6446520"/>
+            <a:off x="11338560" y="6400800"/>
             <a:ext cx="548640" cy="274320"/>
           </a:xfrm>
           <a:prstGeom prst="rect">
@@ -7007,13 +7189,13 @@
             <a:lvl1pPr>
               <a:defRPr sz="1000">
                 <a:solidFill>
-                  <a:srgbClr val="5B6B70"/>
+                  <a:srgbClr val="D6EFE7"/>
                 </a:solidFill>
               </a:defRPr>
             </a:lvl1pPr>
           </a:lstStyle>
           <a:p>
-            <a:pPr algn="r"/>
+            <a:pPr algn="l"/>
             <a:fld id="{F7021451-1387-4CA6-816F-3879F97B5CBC}" type="slidenum">
               <a:rPr b="0" lang="en-US"/>
               <a:t>18</a:t>
@@ -7079,7 +7261,7 @@
                   <a:schemeClr val="tx2"/>
                 </a:solidFill>
               </a:rPr>
-              <a:t>Viewer 데이터 흐름</a:t>
+              <a:t>웹 UI 구성</a:t>
             </a:r>
             <a:endParaRPr lang="en-US" sz="3000" dirty="0"/>
           </a:p>
@@ -7114,7 +7296,7 @@
       </p:sp>
       <p:pic>
         <p:nvPicPr>
-          <p:cNvPr id="4" name="Viewer 데이터 흐름" descr="Viewer 데이터 흐름">    </p:cNvPr>
+          <p:cNvPr id="4" name="웹 UI 구성" descr="웹 UI 구성">    </p:cNvPr>
           <p:cNvPicPr>
             <a:picLocks noChangeAspect="1"/>
           </p:cNvPicPr>
@@ -7128,8 +7310,8 @@
         </p:blipFill>
         <p:spPr>
           <a:xfrm>
-            <a:off x="1930284" y="1252728"/>
-            <a:ext cx="4871952" cy="4901184"/>
+            <a:off x="1923242" y="1252728"/>
+            <a:ext cx="4886037" cy="4901184"/>
           </a:xfrm>
           <a:prstGeom prst="rect">
             <a:avLst/>
@@ -7196,7 +7378,7 @@
                   <a:srgbClr val="0F6E5C"/>
                 </a:solidFill>
               </a:rPr>
-              <a:t>도면 1회 로드</a:t>
+              <a:t>상대 주소 API</a:t>
             </a:r>
             <a:endParaRPr lang="en-US" sz="1500" dirty="0"/>
           </a:p>
@@ -7213,7 +7395,7 @@
                   <a:srgbClr val="1B2A2F"/>
                 </a:solidFill>
               </a:rPr>
-              <a:t>/api/dxf 를 MessagePack+LZ4 로 받아 렌더러 캐시 구성</a:t>
+              <a:t>HttpClient BaseAddress = 현재 사이트 → 리버스 프록시 필수</a:t>
             </a:r>
             <a:endParaRPr lang="en-US" sz="1500" dirty="0"/>
           </a:p>
@@ -7227,10 +7409,10 @@
             <a:r>
               <a:rPr lang="en-US" sz="1500" b="1" dirty="0">
                 <a:solidFill>
-                  <a:srgbClr val="0F6E5C"/>
-                </a:solidFill>
-              </a:rPr>
-              <a:t>폴링 3종</a:t>
+                  <a:srgbClr val="B8452F"/>
+                </a:solidFill>
+              </a:rPr>
+              <a:t>메뉴만 숨김</a:t>
             </a:r>
             <a:endParaRPr lang="en-US" sz="1500" dirty="0"/>
           </a:p>
@@ -7247,7 +7429,7 @@
                   <a:srgbClr val="1B2A2F"/>
                 </a:solidFill>
               </a:rPr>
-              <a:t>처리수량 2초 · 도크 상태 1초 · 알람 1초 (재진입 방지)</a:t>
+              <a:t>MainLayout 이 역할별 메뉴만 숨기고, 페이지 자체는 로그인 확인 없음</a:t>
             </a:r>
             <a:endParaRPr lang="en-US" sz="1500" dirty="0"/>
           </a:p>
@@ -7264,7 +7446,7 @@
                   <a:srgbClr val="0F6E5C"/>
                 </a:solidFill>
               </a:rPr>
-              <a:t>SignalR</a:t>
+              <a:t>Viewer 재사용</a:t>
             </a:r>
             <a:endParaRPr lang="en-US" sz="1500" dirty="0"/>
           </a:p>
@@ -7278,7 +7460,7 @@
                   <a:srgbClr val="1B2A2F"/>
                 </a:solidFill>
               </a:rPr>
-              <a:t>서버 시각·수집 통계만 수신, 도크 상태는 폴링</a:t>
+              <a:t>도면·도식 두 렌더러를 가진 Viewer 를 Monitoring 도 사용</a:t>
             </a:r>
             <a:endParaRPr lang="en-US" sz="1500" dirty="0"/>
           </a:p>
@@ -8162,7 +8344,7 @@
                   <a:schemeClr val="tx2"/>
                 </a:solidFill>
               </a:rPr>
-              <a:t>도크 연결 상태 (끊김 패치 적용 후)</a:t>
+              <a:t>Viewer 데이터 흐름</a:t>
             </a:r>
             <a:endParaRPr lang="en-US" sz="3000" dirty="0"/>
           </a:p>
@@ -8177,11 +8359,11 @@
         <p:spPr>
           <a:xfrm>
             <a:off x="457200" y="1143000"/>
-            <a:ext cx="11292840" cy="2377440"/>
+            <a:ext cx="7818120" cy="5120640"/>
           </a:xfrm>
           <a:prstGeom prst="roundRect">
             <a:avLst>
-              <a:gd name="adj" fmla="val 3077"/>
+              <a:gd name="adj" fmla="val 1429"/>
             </a:avLst>
           </a:prstGeom>
           <a:solidFill>
@@ -8197,7 +8379,7 @@
       </p:sp>
       <p:pic>
         <p:nvPicPr>
-          <p:cNvPr id="4" name="도크 연결 상태 (끊김 패치 적용 후)" descr="도크 연결 상태 (끊김 패치 적용 후)">    </p:cNvPr>
+          <p:cNvPr id="4" name="Viewer 데이터 흐름" descr="Viewer 데이터 흐름">    </p:cNvPr>
           <p:cNvPicPr>
             <a:picLocks noChangeAspect="1"/>
           </p:cNvPicPr>
@@ -8211,8 +8393,8 @@
         </p:blipFill>
         <p:spPr>
           <a:xfrm>
-            <a:off x="1376394" y="1280160"/>
-            <a:ext cx="9454451" cy="2103120"/>
+            <a:off x="1930284" y="1252728"/>
+            <a:ext cx="4871952" cy="4901184"/>
           </a:xfrm>
           <a:prstGeom prst="rect">
             <a:avLst/>
@@ -8221,98 +8403,18 @@
       </p:pic>
       <p:sp>
         <p:nvSpPr>
-          <p:cNvPr id="5" name="card"/>
+          <p:cNvPr id="5" name="points-panel"/>
           <p:cNvSpPr/>
           <p:nvPr/>
         </p:nvSpPr>
         <p:spPr>
           <a:xfrm>
-            <a:off x="457200" y="3794760"/>
-            <a:ext cx="3581400" cy="2468880"/>
+            <a:off x="8503920" y="1143000"/>
+            <a:ext cx="3246120" cy="5120640"/>
           </a:xfrm>
           <a:prstGeom prst="roundRect">
             <a:avLst>
-              <a:gd name="adj" fmla="val 2963"/>
-            </a:avLst>
-          </a:prstGeom>
-          <a:solidFill>
-            <a:srgbClr val="FBEDEA"/>
-          </a:solidFill>
-          <a:ln w="12700">
-            <a:solidFill>
-              <a:srgbClr val="FBEDEA"/>
-            </a:solidFill>
-            <a:prstDash val="solid"/>
-          </a:ln>
-        </p:spPr>
-      </p:sp>
-      <p:sp>
-        <p:nvSpPr>
-          <p:cNvPr id="6" name="card-text"/>
-          <p:cNvSpPr txBox="1"/>
-          <p:nvPr/>
-        </p:nvSpPr>
-        <p:spPr>
-          <a:xfrm>
-            <a:off x="658368" y="3959352"/>
-            <a:ext cx="3179064" cy="2139696"/>
-          </a:xfrm>
-          <a:prstGeom prst="rect">
-            <a:avLst/>
-          </a:prstGeom>
-          <a:noFill/>
-          <a:ln/>
-        </p:spPr>
-        <p:txBody>
-          <a:bodyPr wrap="square" rtlCol="0" anchor="t"/>
-          <a:lstStyle/>
-          <a:p>
-            <a:pPr indent="0" marL="0">
-              <a:spcAft>
-                <a:spcPts val="400"/>
-              </a:spcAft>
-              <a:buNone/>
-            </a:pPr>
-            <a:r>
-              <a:rPr lang="en-US" sz="1500" b="1" dirty="0">
-                <a:solidFill>
-                  <a:srgbClr val="B8452F"/>
-                </a:solidFill>
-              </a:rPr>
-              <a:t>원본 문제 (B17)</a:t>
-            </a:r>
-            <a:endParaRPr lang="en-US" sz="1500" dirty="0"/>
-          </a:p>
-          <a:p>
-            <a:pPr indent="0" marL="0">
-              <a:buNone/>
-            </a:pPr>
-            <a:r>
-              <a:rPr lang="en-US" sz="1300" dirty="0">
-                <a:solidFill>
-                  <a:srgbClr val="1B2A2F"/>
-                </a:solidFill>
-              </a:rPr>
-              <a:t>서버·화면 모두 수신 시각 판정 없음 → 끊긴 도크가 마지막 상태 유지</a:t>
-            </a:r>
-            <a:endParaRPr lang="en-US" sz="1500" dirty="0"/>
-          </a:p>
-        </p:txBody>
-      </p:sp>
-      <p:sp>
-        <p:nvSpPr>
-          <p:cNvPr id="7" name="card"/>
-          <p:cNvSpPr/>
-          <p:nvPr/>
-        </p:nvSpPr>
-        <p:spPr>
-          <a:xfrm>
-            <a:off x="4312920" y="3794760"/>
-            <a:ext cx="3581400" cy="2468880"/>
-          </a:xfrm>
-          <a:prstGeom prst="roundRect">
-            <a:avLst>
-              <a:gd name="adj" fmla="val 2963"/>
+              <a:gd name="adj" fmla="val 2254"/>
             </a:avLst>
           </a:prstGeom>
           <a:solidFill>
@@ -8328,14 +8430,14 @@
       </p:sp>
       <p:sp>
         <p:nvSpPr>
-          <p:cNvPr id="8" name="card-text"/>
+          <p:cNvPr id="6" name="points-text"/>
           <p:cNvSpPr txBox="1"/>
           <p:nvPr/>
         </p:nvSpPr>
         <p:spPr>
           <a:xfrm>
-            <a:off x="4514088" y="3959352"/>
-            <a:ext cx="3179064" cy="2139696"/>
+            <a:off x="8732520" y="1325880"/>
+            <a:ext cx="2788920" cy="4754880"/>
           </a:xfrm>
           <a:prstGeom prst="rect">
             <a:avLst/>
@@ -8349,7 +8451,7 @@
           <a:p>
             <a:pPr indent="0" marL="0">
               <a:spcAft>
-                <a:spcPts val="400"/>
+                <a:spcPts val="200"/>
               </a:spcAft>
               <a:buNone/>
             </a:pPr>
@@ -8359,12 +8461,15 @@
                   <a:srgbClr val="0F6E5C"/>
                 </a:solidFill>
               </a:rPr>
-              <a:t>판정</a:t>
+              <a:t>도면 1회 로드</a:t>
             </a:r>
             <a:endParaRPr lang="en-US" sz="1500" dirty="0"/>
           </a:p>
           <a:p>
             <a:pPr indent="0" marL="0">
+              <a:spcAft>
+                <a:spcPts val="1000"/>
+              </a:spcAft>
               <a:buNone/>
             </a:pPr>
             <a:r>
@@ -8373,63 +8478,14 @@
                   <a:srgbClr val="1B2A2F"/>
                 </a:solidFill>
               </a:rPr>
-              <a:t>Connected=false 또는 서버시각 - ReceivedAt &gt; TimeoutSeconds → Offline(진회색)</a:t>
+              <a:t>/api/dxf 를 MessagePack+LZ4 로 받아 렌더러 캐시 구성</a:t>
             </a:r>
             <a:endParaRPr lang="en-US" sz="1500" dirty="0"/>
           </a:p>
-        </p:txBody>
-      </p:sp>
-      <p:sp>
-        <p:nvSpPr>
-          <p:cNvPr id="9" name="card"/>
-          <p:cNvSpPr/>
-          <p:nvPr/>
-        </p:nvSpPr>
-        <p:spPr>
-          <a:xfrm>
-            <a:off x="8168640" y="3794760"/>
-            <a:ext cx="3581400" cy="2468880"/>
-          </a:xfrm>
-          <a:prstGeom prst="roundRect">
-            <a:avLst>
-              <a:gd name="adj" fmla="val 2963"/>
-            </a:avLst>
-          </a:prstGeom>
-          <a:solidFill>
-            <a:srgbClr val="E6F2EE"/>
-          </a:solidFill>
-          <a:ln w="12700">
-            <a:solidFill>
-              <a:srgbClr val="E6F2EE"/>
-            </a:solidFill>
-            <a:prstDash val="solid"/>
-          </a:ln>
-        </p:spPr>
-      </p:sp>
-      <p:sp>
-        <p:nvSpPr>
-          <p:cNvPr id="10" name="card-text"/>
-          <p:cNvSpPr txBox="1"/>
-          <p:nvPr/>
-        </p:nvSpPr>
-        <p:spPr>
-          <a:xfrm>
-            <a:off x="8369808" y="3959352"/>
-            <a:ext cx="3179064" cy="2139696"/>
-          </a:xfrm>
-          <a:prstGeom prst="rect">
-            <a:avLst/>
-          </a:prstGeom>
-          <a:noFill/>
-          <a:ln/>
-        </p:spPr>
-        <p:txBody>
-          <a:bodyPr wrap="square" rtlCol="0" anchor="t"/>
-          <a:lstStyle/>
           <a:p>
             <a:pPr indent="0" marL="0">
               <a:spcAft>
-                <a:spcPts val="400"/>
+                <a:spcPts val="200"/>
               </a:spcAft>
               <a:buNone/>
             </a:pPr>
@@ -8439,12 +8495,15 @@
                   <a:srgbClr val="0F6E5C"/>
                 </a:solidFill>
               </a:rPr>
-              <a:t>이력</a:t>
+              <a:t>폴링 3종</a:t>
             </a:r>
             <a:endParaRPr lang="en-US" sz="1500" dirty="0"/>
           </a:p>
           <a:p>
             <a:pPr indent="0" marL="0">
+              <a:spcAft>
+                <a:spcPts val="1000"/>
+              </a:spcAft>
               <a:buNone/>
             </a:pPr>
             <a:r>
@@ -8453,7 +8512,38 @@
                   <a:srgbClr val="1B2A2F"/>
                 </a:solidFill>
               </a:rPr>
-              <a:t>끊김 E0000.0050 · 복구 E0000.0051 을 ftms_event_log 에 기록</a:t>
+              <a:t>처리수량 2초 · 도크 상태 1초 · 알람 1초 (재진입 방지)</a:t>
+            </a:r>
+            <a:endParaRPr lang="en-US" sz="1500" dirty="0"/>
+          </a:p>
+          <a:p>
+            <a:pPr indent="0" marL="0">
+              <a:spcAft>
+                <a:spcPts val="200"/>
+              </a:spcAft>
+              <a:buNone/>
+            </a:pPr>
+            <a:r>
+              <a:rPr lang="en-US" sz="1500" b="1" dirty="0">
+                <a:solidFill>
+                  <a:srgbClr val="0F6E5C"/>
+                </a:solidFill>
+              </a:rPr>
+              <a:t>SignalR</a:t>
+            </a:r>
+            <a:endParaRPr lang="en-US" sz="1500" dirty="0"/>
+          </a:p>
+          <a:p>
+            <a:pPr indent="0" marL="0">
+              <a:buNone/>
+            </a:pPr>
+            <a:r>
+              <a:rPr lang="en-US" sz="1300" dirty="0">
+                <a:solidFill>
+                  <a:srgbClr val="1B2A2F"/>
+                </a:solidFill>
+              </a:rPr>
+              <a:t>서버 시각·수집 통계만 수신, 도크 상태는 폴링</a:t>
             </a:r>
             <a:endParaRPr lang="en-US" sz="1500" dirty="0"/>
           </a:p>
@@ -8561,7 +8651,7 @@
                   <a:schemeClr val="tx2"/>
                 </a:solidFill>
               </a:rPr>
-              <a:t>주의 사항 요약</a:t>
+              <a:t>도크 연결 상태 (끊김 패치 적용 후)</a:t>
             </a:r>
             <a:endParaRPr lang="en-US" sz="3000" dirty="0"/>
           </a:p>
@@ -8569,18 +8659,18 @@
       </p:sp>
       <p:sp>
         <p:nvSpPr>
-          <p:cNvPr id="3" name="card"/>
+          <p:cNvPr id="3" name="diagram-frame"/>
           <p:cNvSpPr/>
           <p:nvPr/>
         </p:nvSpPr>
         <p:spPr>
           <a:xfrm>
-            <a:off x="457200" y="1234440"/>
-            <a:ext cx="3611880" cy="2286000"/>
+            <a:off x="457200" y="1143000"/>
+            <a:ext cx="11292840" cy="2377440"/>
           </a:xfrm>
           <a:prstGeom prst="roundRect">
             <a:avLst>
-              <a:gd name="adj" fmla="val 3200"/>
+              <a:gd name="adj" fmla="val 3077"/>
             </a:avLst>
           </a:prstGeom>
           <a:solidFill>
@@ -8592,35 +8682,54 @@
             </a:solidFill>
             <a:prstDash val="solid"/>
           </a:ln>
-          <a:effectLst>
-            <a:outerShdw sx="100000" sy="100000" kx="0" ky="0" algn="bl" rotWithShape="0" blurRad="76200" dist="25400" dir="5400000">
-              <a:srgbClr val="000000">
-                <a:alpha val="12000"/>
-              </a:srgbClr>
-            </a:outerShdw>
-          </a:effectLst>
-        </p:spPr>
-      </p:sp>
-      <p:sp>
-        <p:nvSpPr>
-          <p:cNvPr id="4" name="badge"/>
+        </p:spPr>
+      </p:sp>
+      <p:pic>
+        <p:nvPicPr>
+          <p:cNvPr id="4" name="도크 연결 상태 (끊김 패치 적용 후)" descr="도크 연결 상태 (끊김 패치 적용 후)">    </p:cNvPr>
+          <p:cNvPicPr>
+            <a:picLocks noChangeAspect="1"/>
+          </p:cNvPicPr>
+          <p:nvPr/>
+        </p:nvPicPr>
+        <p:blipFill>
+          <a:blip r:embed="rId1"/>
+          <a:stretch>
+            <a:fillRect/>
+          </a:stretch>
+        </p:blipFill>
+        <p:spPr>
+          <a:xfrm>
+            <a:off x="1376394" y="1280160"/>
+            <a:ext cx="9454451" cy="2103120"/>
+          </a:xfrm>
+          <a:prstGeom prst="rect">
+            <a:avLst/>
+          </a:prstGeom>
+        </p:spPr>
+      </p:pic>
+      <p:sp>
+        <p:nvSpPr>
+          <p:cNvPr id="5" name="card"/>
           <p:cNvSpPr/>
           <p:nvPr/>
         </p:nvSpPr>
         <p:spPr>
           <a:xfrm>
-            <a:off x="658368" y="1435608"/>
-            <a:ext cx="457200" cy="457200"/>
-          </a:xfrm>
-          <a:prstGeom prst="ellipse">
-            <a:avLst/>
+            <a:off x="457200" y="3794760"/>
+            <a:ext cx="3581400" cy="2468880"/>
+          </a:xfrm>
+          <a:prstGeom prst="roundRect">
+            <a:avLst>
+              <a:gd name="adj" fmla="val 2963"/>
+            </a:avLst>
           </a:prstGeom>
           <a:solidFill>
-            <a:srgbClr val="B8452F"/>
+            <a:srgbClr val="FBEDEA"/>
           </a:solidFill>
           <a:ln w="12700">
             <a:solidFill>
-              <a:srgbClr val="B8452F"/>
+              <a:srgbClr val="FBEDEA"/>
             </a:solidFill>
             <a:prstDash val="solid"/>
           </a:ln>
@@ -8628,14 +8737,14 @@
       </p:sp>
       <p:sp>
         <p:nvSpPr>
-          <p:cNvPr id="5" name="badge-num"/>
+          <p:cNvPr id="6" name="card-text"/>
           <p:cNvSpPr txBox="1"/>
           <p:nvPr/>
         </p:nvSpPr>
         <p:spPr>
           <a:xfrm>
-            <a:off x="658368" y="1435608"/>
-            <a:ext cx="457200" cy="457200"/>
+            <a:off x="658368" y="3959352"/>
+            <a:ext cx="3179064" cy="2139696"/>
           </a:xfrm>
           <a:prstGeom prst="rect">
             <a:avLst/>
@@ -8644,150 +8753,143 @@
           <a:ln/>
         </p:spPr>
         <p:txBody>
-          <a:bodyPr wrap="square" lIns="0" tIns="0" rIns="0" bIns="0" rtlCol="0" anchor="ctr"/>
-          <a:lstStyle/>
-          <a:p>
-            <a:pPr algn="ctr" indent="0" marL="0">
+          <a:bodyPr wrap="square" rtlCol="0" anchor="t"/>
+          <a:lstStyle/>
+          <a:p>
+            <a:pPr indent="0" marL="0">
+              <a:spcAft>
+                <a:spcPts val="400"/>
+              </a:spcAft>
               <a:buNone/>
             </a:pPr>
             <a:r>
               <a:rPr lang="en-US" sz="1500" b="1" dirty="0">
                 <a:solidFill>
-                  <a:srgbClr val="FFFFFF"/>
-                </a:solidFill>
-              </a:rPr>
-              <a:t>1</a:t>
+                  <a:srgbClr val="B8452F"/>
+                </a:solidFill>
+              </a:rPr>
+              <a:t>원본 문제 (B17)</a:t>
             </a:r>
             <a:endParaRPr lang="en-US" sz="1500" dirty="0"/>
           </a:p>
-        </p:txBody>
-      </p:sp>
-      <p:sp>
-        <p:nvSpPr>
-          <p:cNvPr id="6" name="card-head"/>
-          <p:cNvSpPr txBox="1"/>
-          <p:nvPr/>
-        </p:nvSpPr>
-        <p:spPr>
-          <a:xfrm>
-            <a:off x="1234440" y="1417320"/>
-            <a:ext cx="2651760" cy="502920"/>
-          </a:xfrm>
-          <a:prstGeom prst="rect">
-            <a:avLst/>
-          </a:prstGeom>
-          <a:noFill/>
-          <a:ln/>
-        </p:spPr>
-        <p:txBody>
-          <a:bodyPr wrap="square" lIns="0" tIns="0" rIns="0" bIns="0" rtlCol="0" anchor="ctr"/>
-          <a:lstStyle/>
-          <a:p>
-            <a:pPr indent="0" marL="0">
-              <a:buNone/>
-            </a:pPr>
-            <a:r>
-              <a:rPr lang="en-US" sz="1600" b="1" dirty="0">
+          <a:p>
+            <a:pPr indent="0" marL="0">
+              <a:buNone/>
+            </a:pPr>
+            <a:r>
+              <a:rPr lang="en-US" sz="1300" dirty="0">
                 <a:solidFill>
                   <a:srgbClr val="1B2A2F"/>
                 </a:solidFill>
               </a:rPr>
-              <a:t>보안</a:t>
-            </a:r>
-            <a:endParaRPr lang="en-US" sz="1600" dirty="0"/>
-          </a:p>
-        </p:txBody>
-      </p:sp>
-      <p:sp>
-        <p:nvSpPr>
-          <p:cNvPr id="7" name="card-body"/>
-          <p:cNvSpPr txBox="1"/>
-          <p:nvPr/>
-        </p:nvSpPr>
-        <p:spPr>
-          <a:xfrm>
-            <a:off x="685800" y="2011680"/>
-            <a:ext cx="3154680" cy="1371600"/>
-          </a:xfrm>
-          <a:prstGeom prst="rect">
-            <a:avLst/>
-          </a:prstGeom>
-          <a:noFill/>
-          <a:ln/>
-        </p:spPr>
-        <p:txBody>
-          <a:bodyPr wrap="square" lIns="0" tIns="0" rIns="0" bIns="0" rtlCol="0" anchor="t"/>
-          <a:lstStyle/>
-          <a:p>
-            <a:pPr indent="0" marL="0">
-              <a:buNone/>
-            </a:pPr>
-            <a:r>
-              <a:rPr lang="en-US" sz="1300" dirty="0">
-                <a:solidFill>
-                  <a:srgbClr val="1B2A2F"/>
-                </a:solidFill>
-              </a:rPr>
-              <a:t>익명 Admin 가입, API·SignalR·TCP 무인증, 기본 계정, 비밀키 포함</a:t>
-            </a:r>
-            <a:endParaRPr lang="en-US" sz="1300" dirty="0"/>
-          </a:p>
-        </p:txBody>
-      </p:sp>
-      <p:sp>
-        <p:nvSpPr>
-          <p:cNvPr id="8" name="card"/>
+              <a:t>서버·화면 모두 수신 시각 판정 없음 → 끊긴 도크가 마지막 상태 유지</a:t>
+            </a:r>
+            <a:endParaRPr lang="en-US" sz="1500" dirty="0"/>
+          </a:p>
+        </p:txBody>
+      </p:sp>
+      <p:sp>
+        <p:nvSpPr>
+          <p:cNvPr id="7" name="card"/>
           <p:cNvSpPr/>
           <p:nvPr/>
         </p:nvSpPr>
         <p:spPr>
           <a:xfrm>
-            <a:off x="4279392" y="1234440"/>
-            <a:ext cx="3611880" cy="2286000"/>
+            <a:off x="4312920" y="3794760"/>
+            <a:ext cx="3581400" cy="2468880"/>
           </a:xfrm>
           <a:prstGeom prst="roundRect">
             <a:avLst>
-              <a:gd name="adj" fmla="val 3200"/>
+              <a:gd name="adj" fmla="val 2963"/>
             </a:avLst>
           </a:prstGeom>
           <a:solidFill>
-            <a:srgbClr val="FFFFFF"/>
+            <a:srgbClr val="E6F2EE"/>
           </a:solidFill>
           <a:ln w="12700">
             <a:solidFill>
-              <a:srgbClr val="CBD5D8"/>
+              <a:srgbClr val="E6F2EE"/>
             </a:solidFill>
             <a:prstDash val="solid"/>
           </a:ln>
-          <a:effectLst>
-            <a:outerShdw sx="100000" sy="100000" kx="0" ky="0" algn="bl" rotWithShape="0" blurRad="76200" dist="25400" dir="5400000">
-              <a:srgbClr val="000000">
-                <a:alpha val="12000"/>
-              </a:srgbClr>
-            </a:outerShdw>
-          </a:effectLst>
-        </p:spPr>
-      </p:sp>
-      <p:sp>
-        <p:nvSpPr>
-          <p:cNvPr id="9" name="badge"/>
+        </p:spPr>
+      </p:sp>
+      <p:sp>
+        <p:nvSpPr>
+          <p:cNvPr id="8" name="card-text"/>
+          <p:cNvSpPr txBox="1"/>
+          <p:nvPr/>
+        </p:nvSpPr>
+        <p:spPr>
+          <a:xfrm>
+            <a:off x="4514088" y="3959352"/>
+            <a:ext cx="3179064" cy="2139696"/>
+          </a:xfrm>
+          <a:prstGeom prst="rect">
+            <a:avLst/>
+          </a:prstGeom>
+          <a:noFill/>
+          <a:ln/>
+        </p:spPr>
+        <p:txBody>
+          <a:bodyPr wrap="square" rtlCol="0" anchor="t"/>
+          <a:lstStyle/>
+          <a:p>
+            <a:pPr indent="0" marL="0">
+              <a:spcAft>
+                <a:spcPts val="400"/>
+              </a:spcAft>
+              <a:buNone/>
+            </a:pPr>
+            <a:r>
+              <a:rPr lang="en-US" sz="1500" b="1" dirty="0">
+                <a:solidFill>
+                  <a:srgbClr val="0F6E5C"/>
+                </a:solidFill>
+              </a:rPr>
+              <a:t>판정</a:t>
+            </a:r>
+            <a:endParaRPr lang="en-US" sz="1500" dirty="0"/>
+          </a:p>
+          <a:p>
+            <a:pPr indent="0" marL="0">
+              <a:buNone/>
+            </a:pPr>
+            <a:r>
+              <a:rPr lang="en-US" sz="1300" dirty="0">
+                <a:solidFill>
+                  <a:srgbClr val="1B2A2F"/>
+                </a:solidFill>
+              </a:rPr>
+              <a:t>Connected=false 또는 서버시각 - ReceivedAt &gt; TimeoutSeconds → Offline(진회색)</a:t>
+            </a:r>
+            <a:endParaRPr lang="en-US" sz="1500" dirty="0"/>
+          </a:p>
+        </p:txBody>
+      </p:sp>
+      <p:sp>
+        <p:nvSpPr>
+          <p:cNvPr id="9" name="card"/>
           <p:cNvSpPr/>
           <p:nvPr/>
         </p:nvSpPr>
         <p:spPr>
           <a:xfrm>
-            <a:off x="4480560" y="1435608"/>
-            <a:ext cx="457200" cy="457200"/>
-          </a:xfrm>
-          <a:prstGeom prst="ellipse">
-            <a:avLst/>
+            <a:off x="8168640" y="3794760"/>
+            <a:ext cx="3581400" cy="2468880"/>
+          </a:xfrm>
+          <a:prstGeom prst="roundRect">
+            <a:avLst>
+              <a:gd name="adj" fmla="val 2963"/>
+            </a:avLst>
           </a:prstGeom>
           <a:solidFill>
-            <a:srgbClr val="C99A00"/>
+            <a:srgbClr val="E6F2EE"/>
           </a:solidFill>
           <a:ln w="12700">
             <a:solidFill>
-              <a:srgbClr val="C99A00"/>
+              <a:srgbClr val="E6F2EE"/>
             </a:solidFill>
             <a:prstDash val="solid"/>
           </a:ln>
@@ -8795,14 +8897,14 @@
       </p:sp>
       <p:sp>
         <p:nvSpPr>
-          <p:cNvPr id="10" name="badge-num"/>
+          <p:cNvPr id="10" name="card-text"/>
           <p:cNvSpPr txBox="1"/>
           <p:nvPr/>
         </p:nvSpPr>
         <p:spPr>
           <a:xfrm>
-            <a:off x="4480560" y="1435608"/>
-            <a:ext cx="457200" cy="457200"/>
+            <a:off x="8369808" y="3959352"/>
+            <a:ext cx="3179064" cy="2139696"/>
           </a:xfrm>
           <a:prstGeom prst="rect">
             <a:avLst/>
@@ -8811,761 +8913,38 @@
           <a:ln/>
         </p:spPr>
         <p:txBody>
-          <a:bodyPr wrap="square" lIns="0" tIns="0" rIns="0" bIns="0" rtlCol="0" anchor="ctr"/>
-          <a:lstStyle/>
-          <a:p>
-            <a:pPr algn="ctr" indent="0" marL="0">
+          <a:bodyPr wrap="square" rtlCol="0" anchor="t"/>
+          <a:lstStyle/>
+          <a:p>
+            <a:pPr indent="0" marL="0">
+              <a:spcAft>
+                <a:spcPts val="400"/>
+              </a:spcAft>
               <a:buNone/>
             </a:pPr>
             <a:r>
               <a:rPr lang="en-US" sz="1500" b="1" dirty="0">
                 <a:solidFill>
-                  <a:srgbClr val="FFFFFF"/>
-                </a:solidFill>
-              </a:rPr>
-              <a:t>2</a:t>
+                  <a:srgbClr val="0F6E5C"/>
+                </a:solidFill>
+              </a:rPr>
+              <a:t>이력</a:t>
             </a:r>
             <a:endParaRPr lang="en-US" sz="1500" dirty="0"/>
           </a:p>
-        </p:txBody>
-      </p:sp>
-      <p:sp>
-        <p:nvSpPr>
-          <p:cNvPr id="11" name="card-head"/>
-          <p:cNvSpPr txBox="1"/>
-          <p:nvPr/>
-        </p:nvSpPr>
-        <p:spPr>
-          <a:xfrm>
-            <a:off x="5056632" y="1417320"/>
-            <a:ext cx="2651760" cy="502920"/>
-          </a:xfrm>
-          <a:prstGeom prst="rect">
-            <a:avLst/>
-          </a:prstGeom>
-          <a:noFill/>
-          <a:ln/>
-        </p:spPr>
-        <p:txBody>
-          <a:bodyPr wrap="square" lIns="0" tIns="0" rIns="0" bIns="0" rtlCol="0" anchor="ctr"/>
-          <a:lstStyle/>
-          <a:p>
-            <a:pPr indent="0" marL="0">
-              <a:buNone/>
-            </a:pPr>
-            <a:r>
-              <a:rPr lang="en-US" sz="1600" b="1" dirty="0">
+          <a:p>
+            <a:pPr indent="0" marL="0">
+              <a:buNone/>
+            </a:pPr>
+            <a:r>
+              <a:rPr lang="en-US" sz="1300" dirty="0">
                 <a:solidFill>
                   <a:srgbClr val="1B2A2F"/>
                 </a:solidFill>
               </a:rPr>
-              <a:t>기동</a:t>
-            </a:r>
-            <a:endParaRPr lang="en-US" sz="1600" dirty="0"/>
-          </a:p>
-        </p:txBody>
-      </p:sp>
-      <p:sp>
-        <p:nvSpPr>
-          <p:cNvPr id="12" name="card-body"/>
-          <p:cNvSpPr txBox="1"/>
-          <p:nvPr/>
-        </p:nvSpPr>
-        <p:spPr>
-          <a:xfrm>
-            <a:off x="4507992" y="2011680"/>
-            <a:ext cx="3154680" cy="1371600"/>
-          </a:xfrm>
-          <a:prstGeom prst="rect">
-            <a:avLst/>
-          </a:prstGeom>
-          <a:noFill/>
-          <a:ln/>
-        </p:spPr>
-        <p:txBody>
-          <a:bodyPr wrap="square" lIns="0" tIns="0" rIns="0" bIns="0" rtlCol="0" anchor="t"/>
-          <a:lstStyle/>
-          <a:p>
-            <a:pPr indent="0" marL="0">
-              <a:buNone/>
-            </a:pPr>
-            <a:r>
-              <a:rPr lang="en-US" sz="1300" dirty="0">
-                <a:solidFill>
-                  <a:srgbClr val="1B2A2F"/>
-                </a:solidFill>
-              </a:rPr>
-              <a:t>DB 연결 후에야 8121 개방, 재시도 없음 (B12)</a:t>
-            </a:r>
-            <a:endParaRPr lang="en-US" sz="1300" dirty="0"/>
-          </a:p>
-        </p:txBody>
-      </p:sp>
-      <p:sp>
-        <p:nvSpPr>
-          <p:cNvPr id="13" name="card"/>
-          <p:cNvSpPr/>
-          <p:nvPr/>
-        </p:nvSpPr>
-        <p:spPr>
-          <a:xfrm>
-            <a:off x="8101584" y="1234440"/>
-            <a:ext cx="3611880" cy="2286000"/>
-          </a:xfrm>
-          <a:prstGeom prst="roundRect">
-            <a:avLst>
-              <a:gd name="adj" fmla="val 3200"/>
-            </a:avLst>
-          </a:prstGeom>
-          <a:solidFill>
-            <a:srgbClr val="FFFFFF"/>
-          </a:solidFill>
-          <a:ln w="12700">
-            <a:solidFill>
-              <a:srgbClr val="CBD5D8"/>
-            </a:solidFill>
-            <a:prstDash val="solid"/>
-          </a:ln>
-          <a:effectLst>
-            <a:outerShdw sx="100000" sy="100000" kx="0" ky="0" algn="bl" rotWithShape="0" blurRad="76200" dist="25400" dir="5400000">
-              <a:srgbClr val="000000">
-                <a:alpha val="12000"/>
-              </a:srgbClr>
-            </a:outerShdw>
-          </a:effectLst>
-        </p:spPr>
-      </p:sp>
-      <p:sp>
-        <p:nvSpPr>
-          <p:cNvPr id="14" name="badge"/>
-          <p:cNvSpPr/>
-          <p:nvPr/>
-        </p:nvSpPr>
-        <p:spPr>
-          <a:xfrm>
-            <a:off x="8302752" y="1435608"/>
-            <a:ext cx="457200" cy="457200"/>
-          </a:xfrm>
-          <a:prstGeom prst="ellipse">
-            <a:avLst/>
-          </a:prstGeom>
-          <a:solidFill>
-            <a:srgbClr val="C99A00"/>
-          </a:solidFill>
-          <a:ln w="12700">
-            <a:solidFill>
-              <a:srgbClr val="C99A00"/>
-            </a:solidFill>
-            <a:prstDash val="solid"/>
-          </a:ln>
-        </p:spPr>
-      </p:sp>
-      <p:sp>
-        <p:nvSpPr>
-          <p:cNvPr id="15" name="badge-num"/>
-          <p:cNvSpPr txBox="1"/>
-          <p:nvPr/>
-        </p:nvSpPr>
-        <p:spPr>
-          <a:xfrm>
-            <a:off x="8302752" y="1435608"/>
-            <a:ext cx="457200" cy="457200"/>
-          </a:xfrm>
-          <a:prstGeom prst="rect">
-            <a:avLst/>
-          </a:prstGeom>
-          <a:noFill/>
-          <a:ln/>
-        </p:spPr>
-        <p:txBody>
-          <a:bodyPr wrap="square" lIns="0" tIns="0" rIns="0" bIns="0" rtlCol="0" anchor="ctr"/>
-          <a:lstStyle/>
-          <a:p>
-            <a:pPr algn="ctr" indent="0" marL="0">
-              <a:buNone/>
-            </a:pPr>
-            <a:r>
-              <a:rPr lang="en-US" sz="1500" b="1" dirty="0">
-                <a:solidFill>
-                  <a:srgbClr val="FFFFFF"/>
-                </a:solidFill>
-              </a:rPr>
-              <a:t>3</a:t>
+              <a:t>끊김 E0000.0050 · 복구 E0000.0051 을 ftms_event_log 에 기록</a:t>
             </a:r>
             <a:endParaRPr lang="en-US" sz="1500" dirty="0"/>
-          </a:p>
-        </p:txBody>
-      </p:sp>
-      <p:sp>
-        <p:nvSpPr>
-          <p:cNvPr id="16" name="card-head"/>
-          <p:cNvSpPr txBox="1"/>
-          <p:nvPr/>
-        </p:nvSpPr>
-        <p:spPr>
-          <a:xfrm>
-            <a:off x="8878824" y="1417320"/>
-            <a:ext cx="2651760" cy="502920"/>
-          </a:xfrm>
-          <a:prstGeom prst="rect">
-            <a:avLst/>
-          </a:prstGeom>
-          <a:noFill/>
-          <a:ln/>
-        </p:spPr>
-        <p:txBody>
-          <a:bodyPr wrap="square" lIns="0" tIns="0" rIns="0" bIns="0" rtlCol="0" anchor="ctr"/>
-          <a:lstStyle/>
-          <a:p>
-            <a:pPr indent="0" marL="0">
-              <a:buNone/>
-            </a:pPr>
-            <a:r>
-              <a:rPr lang="en-US" sz="1600" b="1" dirty="0">
-                <a:solidFill>
-                  <a:srgbClr val="1B2A2F"/>
-                </a:solidFill>
-              </a:rPr>
-              <a:t>상태 영속화</a:t>
-            </a:r>
-            <a:endParaRPr lang="en-US" sz="1600" dirty="0"/>
-          </a:p>
-        </p:txBody>
-      </p:sp>
-      <p:sp>
-        <p:nvSpPr>
-          <p:cNvPr id="17" name="card-body"/>
-          <p:cNvSpPr txBox="1"/>
-          <p:nvPr/>
-        </p:nvSpPr>
-        <p:spPr>
-          <a:xfrm>
-            <a:off x="8330184" y="2011680"/>
-            <a:ext cx="3154680" cy="1371600"/>
-          </a:xfrm>
-          <a:prstGeom prst="rect">
-            <a:avLst/>
-          </a:prstGeom>
-          <a:noFill/>
-          <a:ln/>
-        </p:spPr>
-        <p:txBody>
-          <a:bodyPr wrap="square" lIns="0" tIns="0" rIns="0" bIns="0" rtlCol="0" anchor="t"/>
-          <a:lstStyle/>
-          <a:p>
-            <a:pPr indent="0" marL="0">
-              <a:buNone/>
-            </a:pPr>
-            <a:r>
-              <a:rPr lang="en-US" sz="1300" dirty="0">
-                <a:solidFill>
-                  <a:srgbClr val="1B2A2F"/>
-                </a:solidFill>
-              </a:rPr>
-              <a:t>저장/복원 테이블 불일치로 재시작 시 미복원 (B15)</a:t>
-            </a:r>
-            <a:endParaRPr lang="en-US" sz="1300" dirty="0"/>
-          </a:p>
-        </p:txBody>
-      </p:sp>
-      <p:sp>
-        <p:nvSpPr>
-          <p:cNvPr id="18" name="card"/>
-          <p:cNvSpPr/>
-          <p:nvPr/>
-        </p:nvSpPr>
-        <p:spPr>
-          <a:xfrm>
-            <a:off x="457200" y="3749040"/>
-            <a:ext cx="3611880" cy="2286000"/>
-          </a:xfrm>
-          <a:prstGeom prst="roundRect">
-            <a:avLst>
-              <a:gd name="adj" fmla="val 3200"/>
-            </a:avLst>
-          </a:prstGeom>
-          <a:solidFill>
-            <a:srgbClr val="FFFFFF"/>
-          </a:solidFill>
-          <a:ln w="12700">
-            <a:solidFill>
-              <a:srgbClr val="CBD5D8"/>
-            </a:solidFill>
-            <a:prstDash val="solid"/>
-          </a:ln>
-          <a:effectLst>
-            <a:outerShdw sx="100000" sy="100000" kx="0" ky="0" algn="bl" rotWithShape="0" blurRad="76200" dist="25400" dir="5400000">
-              <a:srgbClr val="000000">
-                <a:alpha val="12000"/>
-              </a:srgbClr>
-            </a:outerShdw>
-          </a:effectLst>
-        </p:spPr>
-      </p:sp>
-      <p:sp>
-        <p:nvSpPr>
-          <p:cNvPr id="19" name="badge"/>
-          <p:cNvSpPr/>
-          <p:nvPr/>
-        </p:nvSpPr>
-        <p:spPr>
-          <a:xfrm>
-            <a:off x="658368" y="3950208"/>
-            <a:ext cx="457200" cy="457200"/>
-          </a:xfrm>
-          <a:prstGeom prst="ellipse">
-            <a:avLst/>
-          </a:prstGeom>
-          <a:solidFill>
-            <a:srgbClr val="C99A00"/>
-          </a:solidFill>
-          <a:ln w="12700">
-            <a:solidFill>
-              <a:srgbClr val="C99A00"/>
-            </a:solidFill>
-            <a:prstDash val="solid"/>
-          </a:ln>
-        </p:spPr>
-      </p:sp>
-      <p:sp>
-        <p:nvSpPr>
-          <p:cNvPr id="20" name="badge-num"/>
-          <p:cNvSpPr txBox="1"/>
-          <p:nvPr/>
-        </p:nvSpPr>
-        <p:spPr>
-          <a:xfrm>
-            <a:off x="658368" y="3950208"/>
-            <a:ext cx="457200" cy="457200"/>
-          </a:xfrm>
-          <a:prstGeom prst="rect">
-            <a:avLst/>
-          </a:prstGeom>
-          <a:noFill/>
-          <a:ln/>
-        </p:spPr>
-        <p:txBody>
-          <a:bodyPr wrap="square" lIns="0" tIns="0" rIns="0" bIns="0" rtlCol="0" anchor="ctr"/>
-          <a:lstStyle/>
-          <a:p>
-            <a:pPr algn="ctr" indent="0" marL="0">
-              <a:buNone/>
-            </a:pPr>
-            <a:r>
-              <a:rPr lang="en-US" sz="1500" b="1" dirty="0">
-                <a:solidFill>
-                  <a:srgbClr val="FFFFFF"/>
-                </a:solidFill>
-              </a:rPr>
-              <a:t>4</a:t>
-            </a:r>
-            <a:endParaRPr lang="en-US" sz="1500" dirty="0"/>
-          </a:p>
-        </p:txBody>
-      </p:sp>
-      <p:sp>
-        <p:nvSpPr>
-          <p:cNvPr id="21" name="card-head"/>
-          <p:cNvSpPr txBox="1"/>
-          <p:nvPr/>
-        </p:nvSpPr>
-        <p:spPr>
-          <a:xfrm>
-            <a:off x="1234440" y="3931920"/>
-            <a:ext cx="2651760" cy="502920"/>
-          </a:xfrm>
-          <a:prstGeom prst="rect">
-            <a:avLst/>
-          </a:prstGeom>
-          <a:noFill/>
-          <a:ln/>
-        </p:spPr>
-        <p:txBody>
-          <a:bodyPr wrap="square" lIns="0" tIns="0" rIns="0" bIns="0" rtlCol="0" anchor="ctr"/>
-          <a:lstStyle/>
-          <a:p>
-            <a:pPr indent="0" marL="0">
-              <a:buNone/>
-            </a:pPr>
-            <a:r>
-              <a:rPr lang="en-US" sz="1600" b="1" dirty="0">
-                <a:solidFill>
-                  <a:srgbClr val="1B2A2F"/>
-                </a:solidFill>
-              </a:rPr>
-              <a:t>끊김 표시</a:t>
-            </a:r>
-            <a:endParaRPr lang="en-US" sz="1600" dirty="0"/>
-          </a:p>
-        </p:txBody>
-      </p:sp>
-      <p:sp>
-        <p:nvSpPr>
-          <p:cNvPr id="22" name="card-body"/>
-          <p:cNvSpPr txBox="1"/>
-          <p:nvPr/>
-        </p:nvSpPr>
-        <p:spPr>
-          <a:xfrm>
-            <a:off x="685800" y="4526280"/>
-            <a:ext cx="3154680" cy="1371600"/>
-          </a:xfrm>
-          <a:prstGeom prst="rect">
-            <a:avLst/>
-          </a:prstGeom>
-          <a:noFill/>
-          <a:ln/>
-        </p:spPr>
-        <p:txBody>
-          <a:bodyPr wrap="square" lIns="0" tIns="0" rIns="0" bIns="0" rtlCol="0" anchor="t"/>
-          <a:lstStyle/>
-          <a:p>
-            <a:pPr indent="0" marL="0">
-              <a:buNone/>
-            </a:pPr>
-            <a:r>
-              <a:rPr lang="en-US" sz="1300" dirty="0">
-                <a:solidFill>
-                  <a:srgbClr val="1B2A2F"/>
-                </a:solidFill>
-              </a:rPr>
-              <a:t>수신 시각 판정 없음 → 패치 dock-offline (B17)</a:t>
-            </a:r>
-            <a:endParaRPr lang="en-US" sz="1300" dirty="0"/>
-          </a:p>
-        </p:txBody>
-      </p:sp>
-      <p:sp>
-        <p:nvSpPr>
-          <p:cNvPr id="23" name="card"/>
-          <p:cNvSpPr/>
-          <p:nvPr/>
-        </p:nvSpPr>
-        <p:spPr>
-          <a:xfrm>
-            <a:off x="4279392" y="3749040"/>
-            <a:ext cx="3611880" cy="2286000"/>
-          </a:xfrm>
-          <a:prstGeom prst="roundRect">
-            <a:avLst>
-              <a:gd name="adj" fmla="val 3200"/>
-            </a:avLst>
-          </a:prstGeom>
-          <a:solidFill>
-            <a:srgbClr val="FFFFFF"/>
-          </a:solidFill>
-          <a:ln w="12700">
-            <a:solidFill>
-              <a:srgbClr val="CBD5D8"/>
-            </a:solidFill>
-            <a:prstDash val="solid"/>
-          </a:ln>
-          <a:effectLst>
-            <a:outerShdw sx="100000" sy="100000" kx="0" ky="0" algn="bl" rotWithShape="0" blurRad="76200" dist="25400" dir="5400000">
-              <a:srgbClr val="000000">
-                <a:alpha val="12000"/>
-              </a:srgbClr>
-            </a:outerShdw>
-          </a:effectLst>
-        </p:spPr>
-      </p:sp>
-      <p:sp>
-        <p:nvSpPr>
-          <p:cNvPr id="24" name="badge"/>
-          <p:cNvSpPr/>
-          <p:nvPr/>
-        </p:nvSpPr>
-        <p:spPr>
-          <a:xfrm>
-            <a:off x="4480560" y="3950208"/>
-            <a:ext cx="457200" cy="457200"/>
-          </a:xfrm>
-          <a:prstGeom prst="ellipse">
-            <a:avLst/>
-          </a:prstGeom>
-          <a:solidFill>
-            <a:srgbClr val="B8452F"/>
-          </a:solidFill>
-          <a:ln w="12700">
-            <a:solidFill>
-              <a:srgbClr val="B8452F"/>
-            </a:solidFill>
-            <a:prstDash val="solid"/>
-          </a:ln>
-        </p:spPr>
-      </p:sp>
-      <p:sp>
-        <p:nvSpPr>
-          <p:cNvPr id="25" name="badge-num"/>
-          <p:cNvSpPr txBox="1"/>
-          <p:nvPr/>
-        </p:nvSpPr>
-        <p:spPr>
-          <a:xfrm>
-            <a:off x="4480560" y="3950208"/>
-            <a:ext cx="457200" cy="457200"/>
-          </a:xfrm>
-          <a:prstGeom prst="rect">
-            <a:avLst/>
-          </a:prstGeom>
-          <a:noFill/>
-          <a:ln/>
-        </p:spPr>
-        <p:txBody>
-          <a:bodyPr wrap="square" lIns="0" tIns="0" rIns="0" bIns="0" rtlCol="0" anchor="ctr"/>
-          <a:lstStyle/>
-          <a:p>
-            <a:pPr algn="ctr" indent="0" marL="0">
-              <a:buNone/>
-            </a:pPr>
-            <a:r>
-              <a:rPr lang="en-US" sz="1500" b="1" dirty="0">
-                <a:solidFill>
-                  <a:srgbClr val="FFFFFF"/>
-                </a:solidFill>
-              </a:rPr>
-              <a:t>5</a:t>
-            </a:r>
-            <a:endParaRPr lang="en-US" sz="1500" dirty="0"/>
-          </a:p>
-        </p:txBody>
-      </p:sp>
-      <p:sp>
-        <p:nvSpPr>
-          <p:cNvPr id="26" name="card-head"/>
-          <p:cNvSpPr txBox="1"/>
-          <p:nvPr/>
-        </p:nvSpPr>
-        <p:spPr>
-          <a:xfrm>
-            <a:off x="5056632" y="3931920"/>
-            <a:ext cx="2651760" cy="502920"/>
-          </a:xfrm>
-          <a:prstGeom prst="rect">
-            <a:avLst/>
-          </a:prstGeom>
-          <a:noFill/>
-          <a:ln/>
-        </p:spPr>
-        <p:txBody>
-          <a:bodyPr wrap="square" lIns="0" tIns="0" rIns="0" bIns="0" rtlCol="0" anchor="ctr"/>
-          <a:lstStyle/>
-          <a:p>
-            <a:pPr indent="0" marL="0">
-              <a:buNone/>
-            </a:pPr>
-            <a:r>
-              <a:rPr lang="en-US" sz="1600" b="1" dirty="0">
-                <a:solidFill>
-                  <a:srgbClr val="1B2A2F"/>
-                </a:solidFill>
-              </a:rPr>
-              <a:t>예외 처리</a:t>
-            </a:r>
-            <a:endParaRPr lang="en-US" sz="1600" dirty="0"/>
-          </a:p>
-        </p:txBody>
-      </p:sp>
-      <p:sp>
-        <p:nvSpPr>
-          <p:cNvPr id="27" name="card-body"/>
-          <p:cNvSpPr txBox="1"/>
-          <p:nvPr/>
-        </p:nvSpPr>
-        <p:spPr>
-          <a:xfrm>
-            <a:off x="4507992" y="4526280"/>
-            <a:ext cx="3154680" cy="1371600"/>
-          </a:xfrm>
-          <a:prstGeom prst="rect">
-            <a:avLst/>
-          </a:prstGeom>
-          <a:noFill/>
-          <a:ln/>
-        </p:spPr>
-        <p:txBody>
-          <a:bodyPr wrap="square" lIns="0" tIns="0" rIns="0" bIns="0" rtlCol="0" anchor="t"/>
-          <a:lstStyle/>
-          <a:p>
-            <a:pPr indent="0" marL="0">
-              <a:buNone/>
-            </a:pPr>
-            <a:r>
-              <a:rPr lang="en-US" sz="1300" dirty="0">
-                <a:solidFill>
-                  <a:srgbClr val="1B2A2F"/>
-                </a:solidFill>
-              </a:rPr>
-              <a:t>async void 타이머, 집계 루프 무방비, 빈 catch (B1·B2·B6)</a:t>
-            </a:r>
-            <a:endParaRPr lang="en-US" sz="1300" dirty="0"/>
-          </a:p>
-        </p:txBody>
-      </p:sp>
-      <p:sp>
-        <p:nvSpPr>
-          <p:cNvPr id="28" name="card"/>
-          <p:cNvSpPr/>
-          <p:nvPr/>
-        </p:nvSpPr>
-        <p:spPr>
-          <a:xfrm>
-            <a:off x="8101584" y="3749040"/>
-            <a:ext cx="3611880" cy="2286000"/>
-          </a:xfrm>
-          <a:prstGeom prst="roundRect">
-            <a:avLst>
-              <a:gd name="adj" fmla="val 3200"/>
-            </a:avLst>
-          </a:prstGeom>
-          <a:solidFill>
-            <a:srgbClr val="FFFFFF"/>
-          </a:solidFill>
-          <a:ln w="12700">
-            <a:solidFill>
-              <a:srgbClr val="CBD5D8"/>
-            </a:solidFill>
-            <a:prstDash val="solid"/>
-          </a:ln>
-          <a:effectLst>
-            <a:outerShdw sx="100000" sy="100000" kx="0" ky="0" algn="bl" rotWithShape="0" blurRad="76200" dist="25400" dir="5400000">
-              <a:srgbClr val="000000">
-                <a:alpha val="12000"/>
-              </a:srgbClr>
-            </a:outerShdw>
-          </a:effectLst>
-        </p:spPr>
-      </p:sp>
-      <p:sp>
-        <p:nvSpPr>
-          <p:cNvPr id="29" name="badge"/>
-          <p:cNvSpPr/>
-          <p:nvPr/>
-        </p:nvSpPr>
-        <p:spPr>
-          <a:xfrm>
-            <a:off x="8302752" y="3950208"/>
-            <a:ext cx="457200" cy="457200"/>
-          </a:xfrm>
-          <a:prstGeom prst="ellipse">
-            <a:avLst/>
-          </a:prstGeom>
-          <a:solidFill>
-            <a:srgbClr val="C99A00"/>
-          </a:solidFill>
-          <a:ln w="12700">
-            <a:solidFill>
-              <a:srgbClr val="C99A00"/>
-            </a:solidFill>
-            <a:prstDash val="solid"/>
-          </a:ln>
-        </p:spPr>
-      </p:sp>
-      <p:sp>
-        <p:nvSpPr>
-          <p:cNvPr id="30" name="badge-num"/>
-          <p:cNvSpPr txBox="1"/>
-          <p:nvPr/>
-        </p:nvSpPr>
-        <p:spPr>
-          <a:xfrm>
-            <a:off x="8302752" y="3950208"/>
-            <a:ext cx="457200" cy="457200"/>
-          </a:xfrm>
-          <a:prstGeom prst="rect">
-            <a:avLst/>
-          </a:prstGeom>
-          <a:noFill/>
-          <a:ln/>
-        </p:spPr>
-        <p:txBody>
-          <a:bodyPr wrap="square" lIns="0" tIns="0" rIns="0" bIns="0" rtlCol="0" anchor="ctr"/>
-          <a:lstStyle/>
-          <a:p>
-            <a:pPr algn="ctr" indent="0" marL="0">
-              <a:buNone/>
-            </a:pPr>
-            <a:r>
-              <a:rPr lang="en-US" sz="1500" b="1" dirty="0">
-                <a:solidFill>
-                  <a:srgbClr val="FFFFFF"/>
-                </a:solidFill>
-              </a:rPr>
-              <a:t>6</a:t>
-            </a:r>
-            <a:endParaRPr lang="en-US" sz="1500" dirty="0"/>
-          </a:p>
-        </p:txBody>
-      </p:sp>
-      <p:sp>
-        <p:nvSpPr>
-          <p:cNvPr id="31" name="card-head"/>
-          <p:cNvSpPr txBox="1"/>
-          <p:nvPr/>
-        </p:nvSpPr>
-        <p:spPr>
-          <a:xfrm>
-            <a:off x="8878824" y="3931920"/>
-            <a:ext cx="2651760" cy="502920"/>
-          </a:xfrm>
-          <a:prstGeom prst="rect">
-            <a:avLst/>
-          </a:prstGeom>
-          <a:noFill/>
-          <a:ln/>
-        </p:spPr>
-        <p:txBody>
-          <a:bodyPr wrap="square" lIns="0" tIns="0" rIns="0" bIns="0" rtlCol="0" anchor="ctr"/>
-          <a:lstStyle/>
-          <a:p>
-            <a:pPr indent="0" marL="0">
-              <a:buNone/>
-            </a:pPr>
-            <a:r>
-              <a:rPr lang="en-US" sz="1600" b="1" dirty="0">
-                <a:solidFill>
-                  <a:srgbClr val="1B2A2F"/>
-                </a:solidFill>
-              </a:rPr>
-              <a:t>동시성</a:t>
-            </a:r>
-            <a:endParaRPr lang="en-US" sz="1600" dirty="0"/>
-          </a:p>
-        </p:txBody>
-      </p:sp>
-      <p:sp>
-        <p:nvSpPr>
-          <p:cNvPr id="32" name="card-body"/>
-          <p:cNvSpPr txBox="1"/>
-          <p:nvPr/>
-        </p:nvSpPr>
-        <p:spPr>
-          <a:xfrm>
-            <a:off x="8330184" y="4526280"/>
-            <a:ext cx="3154680" cy="1371600"/>
-          </a:xfrm>
-          <a:prstGeom prst="rect">
-            <a:avLst/>
-          </a:prstGeom>
-          <a:noFill/>
-          <a:ln/>
-        </p:spPr>
-        <p:txBody>
-          <a:bodyPr wrap="square" lIns="0" tIns="0" rIns="0" bIns="0" rtlCol="0" anchor="t"/>
-          <a:lstStyle/>
-          <a:p>
-            <a:pPr indent="0" marL="0">
-              <a:buNone/>
-            </a:pPr>
-            <a:r>
-              <a:rPr lang="en-US" sz="1300" dirty="0">
-                <a:solidFill>
-                  <a:srgbClr val="1B2A2F"/>
-                </a:solidFill>
-              </a:rPr>
-              <a:t>내부 가변 객체 반환, Default 공유 객체 수정 (B3·B10)</a:t>
-            </a:r>
-            <a:endParaRPr lang="en-US" sz="1300" dirty="0"/>
           </a:p>
         </p:txBody>
       </p:sp>
@@ -9671,7 +9050,7 @@
                   <a:schemeClr val="tx2"/>
                 </a:solidFill>
               </a:rPr>
-              <a:t>권장 조치 순서</a:t>
+              <a:t>주의 사항 요약</a:t>
             </a:r>
             <a:endParaRPr lang="en-US" sz="3000" dirty="0"/>
           </a:p>
@@ -9679,19 +9058,51 @@
       </p:sp>
       <p:sp>
         <p:nvSpPr>
-          <p:cNvPr id="3" name="step-head"/>
+          <p:cNvPr id="3" name="card"/>
           <p:cNvSpPr/>
           <p:nvPr/>
         </p:nvSpPr>
         <p:spPr>
           <a:xfrm>
-            <a:off x="457200" y="1828800"/>
-            <a:ext cx="2606040" cy="685800"/>
+            <a:off x="457200" y="1234440"/>
+            <a:ext cx="3611880" cy="2286000"/>
           </a:xfrm>
           <a:prstGeom prst="roundRect">
             <a:avLst>
-              <a:gd name="adj" fmla="val 13333"/>
+              <a:gd name="adj" fmla="val 3200"/>
             </a:avLst>
+          </a:prstGeom>
+          <a:solidFill>
+            <a:srgbClr val="FFFFFF"/>
+          </a:solidFill>
+          <a:ln w="12700">
+            <a:solidFill>
+              <a:srgbClr val="CBD5D8"/>
+            </a:solidFill>
+            <a:prstDash val="solid"/>
+          </a:ln>
+          <a:effectLst>
+            <a:outerShdw sx="100000" sy="100000" kx="0" ky="0" algn="bl" rotWithShape="0" blurRad="76200" dist="25400" dir="5400000">
+              <a:srgbClr val="000000">
+                <a:alpha val="12000"/>
+              </a:srgbClr>
+            </a:outerShdw>
+          </a:effectLst>
+        </p:spPr>
+      </p:sp>
+      <p:sp>
+        <p:nvSpPr>
+          <p:cNvPr id="4" name="badge"/>
+          <p:cNvSpPr/>
+          <p:nvPr/>
+        </p:nvSpPr>
+        <p:spPr>
+          <a:xfrm>
+            <a:off x="658368" y="1435608"/>
+            <a:ext cx="457200" cy="457200"/>
+          </a:xfrm>
+          <a:prstGeom prst="ellipse">
+            <a:avLst/>
           </a:prstGeom>
           <a:solidFill>
             <a:srgbClr val="B8452F"/>
@@ -9706,6 +9117,1084 @@
       </p:sp>
       <p:sp>
         <p:nvSpPr>
+          <p:cNvPr id="5" name="badge-num"/>
+          <p:cNvSpPr txBox="1"/>
+          <p:nvPr/>
+        </p:nvSpPr>
+        <p:spPr>
+          <a:xfrm>
+            <a:off x="658368" y="1435608"/>
+            <a:ext cx="457200" cy="457200"/>
+          </a:xfrm>
+          <a:prstGeom prst="rect">
+            <a:avLst/>
+          </a:prstGeom>
+          <a:noFill/>
+          <a:ln/>
+        </p:spPr>
+        <p:txBody>
+          <a:bodyPr wrap="square" lIns="0" tIns="0" rIns="0" bIns="0" rtlCol="0" anchor="ctr"/>
+          <a:lstStyle/>
+          <a:p>
+            <a:pPr algn="ctr" indent="0" marL="0">
+              <a:buNone/>
+            </a:pPr>
+            <a:r>
+              <a:rPr lang="en-US" sz="1500" b="1" dirty="0">
+                <a:solidFill>
+                  <a:srgbClr val="FFFFFF"/>
+                </a:solidFill>
+              </a:rPr>
+              <a:t>1</a:t>
+            </a:r>
+            <a:endParaRPr lang="en-US" sz="1500" dirty="0"/>
+          </a:p>
+        </p:txBody>
+      </p:sp>
+      <p:sp>
+        <p:nvSpPr>
+          <p:cNvPr id="6" name="card-head"/>
+          <p:cNvSpPr txBox="1"/>
+          <p:nvPr/>
+        </p:nvSpPr>
+        <p:spPr>
+          <a:xfrm>
+            <a:off x="1234440" y="1417320"/>
+            <a:ext cx="2651760" cy="502920"/>
+          </a:xfrm>
+          <a:prstGeom prst="rect">
+            <a:avLst/>
+          </a:prstGeom>
+          <a:noFill/>
+          <a:ln/>
+        </p:spPr>
+        <p:txBody>
+          <a:bodyPr wrap="square" lIns="0" tIns="0" rIns="0" bIns="0" rtlCol="0" anchor="ctr"/>
+          <a:lstStyle/>
+          <a:p>
+            <a:pPr indent="0" marL="0">
+              <a:buNone/>
+            </a:pPr>
+            <a:r>
+              <a:rPr lang="en-US" sz="1600" b="1" dirty="0">
+                <a:solidFill>
+                  <a:srgbClr val="1B2A2F"/>
+                </a:solidFill>
+              </a:rPr>
+              <a:t>보안</a:t>
+            </a:r>
+            <a:endParaRPr lang="en-US" sz="1600" dirty="0"/>
+          </a:p>
+        </p:txBody>
+      </p:sp>
+      <p:sp>
+        <p:nvSpPr>
+          <p:cNvPr id="7" name="card-body"/>
+          <p:cNvSpPr txBox="1"/>
+          <p:nvPr/>
+        </p:nvSpPr>
+        <p:spPr>
+          <a:xfrm>
+            <a:off x="685800" y="2011680"/>
+            <a:ext cx="3154680" cy="1371600"/>
+          </a:xfrm>
+          <a:prstGeom prst="rect">
+            <a:avLst/>
+          </a:prstGeom>
+          <a:noFill/>
+          <a:ln/>
+        </p:spPr>
+        <p:txBody>
+          <a:bodyPr wrap="square" lIns="0" tIns="0" rIns="0" bIns="0" rtlCol="0" anchor="t"/>
+          <a:lstStyle/>
+          <a:p>
+            <a:pPr indent="0" marL="0">
+              <a:buNone/>
+            </a:pPr>
+            <a:r>
+              <a:rPr lang="en-US" sz="1300" dirty="0">
+                <a:solidFill>
+                  <a:srgbClr val="1B2A2F"/>
+                </a:solidFill>
+              </a:rPr>
+              <a:t>익명 Admin 가입, API·SignalR·TCP 무인증, 기본 계정, 비밀키 포함</a:t>
+            </a:r>
+            <a:endParaRPr lang="en-US" sz="1300" dirty="0"/>
+          </a:p>
+        </p:txBody>
+      </p:sp>
+      <p:sp>
+        <p:nvSpPr>
+          <p:cNvPr id="8" name="card"/>
+          <p:cNvSpPr/>
+          <p:nvPr/>
+        </p:nvSpPr>
+        <p:spPr>
+          <a:xfrm>
+            <a:off x="4279392" y="1234440"/>
+            <a:ext cx="3611880" cy="2286000"/>
+          </a:xfrm>
+          <a:prstGeom prst="roundRect">
+            <a:avLst>
+              <a:gd name="adj" fmla="val 3200"/>
+            </a:avLst>
+          </a:prstGeom>
+          <a:solidFill>
+            <a:srgbClr val="FFFFFF"/>
+          </a:solidFill>
+          <a:ln w="12700">
+            <a:solidFill>
+              <a:srgbClr val="CBD5D8"/>
+            </a:solidFill>
+            <a:prstDash val="solid"/>
+          </a:ln>
+          <a:effectLst>
+            <a:outerShdw sx="100000" sy="100000" kx="0" ky="0" algn="bl" rotWithShape="0" blurRad="76200" dist="25400" dir="5400000">
+              <a:srgbClr val="000000">
+                <a:alpha val="12000"/>
+              </a:srgbClr>
+            </a:outerShdw>
+          </a:effectLst>
+        </p:spPr>
+      </p:sp>
+      <p:sp>
+        <p:nvSpPr>
+          <p:cNvPr id="9" name="badge"/>
+          <p:cNvSpPr/>
+          <p:nvPr/>
+        </p:nvSpPr>
+        <p:spPr>
+          <a:xfrm>
+            <a:off x="4480560" y="1435608"/>
+            <a:ext cx="457200" cy="457200"/>
+          </a:xfrm>
+          <a:prstGeom prst="ellipse">
+            <a:avLst/>
+          </a:prstGeom>
+          <a:solidFill>
+            <a:srgbClr val="C99A00"/>
+          </a:solidFill>
+          <a:ln w="12700">
+            <a:solidFill>
+              <a:srgbClr val="C99A00"/>
+            </a:solidFill>
+            <a:prstDash val="solid"/>
+          </a:ln>
+        </p:spPr>
+      </p:sp>
+      <p:sp>
+        <p:nvSpPr>
+          <p:cNvPr id="10" name="badge-num"/>
+          <p:cNvSpPr txBox="1"/>
+          <p:nvPr/>
+        </p:nvSpPr>
+        <p:spPr>
+          <a:xfrm>
+            <a:off x="4480560" y="1435608"/>
+            <a:ext cx="457200" cy="457200"/>
+          </a:xfrm>
+          <a:prstGeom prst="rect">
+            <a:avLst/>
+          </a:prstGeom>
+          <a:noFill/>
+          <a:ln/>
+        </p:spPr>
+        <p:txBody>
+          <a:bodyPr wrap="square" lIns="0" tIns="0" rIns="0" bIns="0" rtlCol="0" anchor="ctr"/>
+          <a:lstStyle/>
+          <a:p>
+            <a:pPr algn="ctr" indent="0" marL="0">
+              <a:buNone/>
+            </a:pPr>
+            <a:r>
+              <a:rPr lang="en-US" sz="1500" b="1" dirty="0">
+                <a:solidFill>
+                  <a:srgbClr val="FFFFFF"/>
+                </a:solidFill>
+              </a:rPr>
+              <a:t>2</a:t>
+            </a:r>
+            <a:endParaRPr lang="en-US" sz="1500" dirty="0"/>
+          </a:p>
+        </p:txBody>
+      </p:sp>
+      <p:sp>
+        <p:nvSpPr>
+          <p:cNvPr id="11" name="card-head"/>
+          <p:cNvSpPr txBox="1"/>
+          <p:nvPr/>
+        </p:nvSpPr>
+        <p:spPr>
+          <a:xfrm>
+            <a:off x="5056632" y="1417320"/>
+            <a:ext cx="2651760" cy="502920"/>
+          </a:xfrm>
+          <a:prstGeom prst="rect">
+            <a:avLst/>
+          </a:prstGeom>
+          <a:noFill/>
+          <a:ln/>
+        </p:spPr>
+        <p:txBody>
+          <a:bodyPr wrap="square" lIns="0" tIns="0" rIns="0" bIns="0" rtlCol="0" anchor="ctr"/>
+          <a:lstStyle/>
+          <a:p>
+            <a:pPr indent="0" marL="0">
+              <a:buNone/>
+            </a:pPr>
+            <a:r>
+              <a:rPr lang="en-US" sz="1600" b="1" dirty="0">
+                <a:solidFill>
+                  <a:srgbClr val="1B2A2F"/>
+                </a:solidFill>
+              </a:rPr>
+              <a:t>기동</a:t>
+            </a:r>
+            <a:endParaRPr lang="en-US" sz="1600" dirty="0"/>
+          </a:p>
+        </p:txBody>
+      </p:sp>
+      <p:sp>
+        <p:nvSpPr>
+          <p:cNvPr id="12" name="card-body"/>
+          <p:cNvSpPr txBox="1"/>
+          <p:nvPr/>
+        </p:nvSpPr>
+        <p:spPr>
+          <a:xfrm>
+            <a:off x="4507992" y="2011680"/>
+            <a:ext cx="3154680" cy="1371600"/>
+          </a:xfrm>
+          <a:prstGeom prst="rect">
+            <a:avLst/>
+          </a:prstGeom>
+          <a:noFill/>
+          <a:ln/>
+        </p:spPr>
+        <p:txBody>
+          <a:bodyPr wrap="square" lIns="0" tIns="0" rIns="0" bIns="0" rtlCol="0" anchor="t"/>
+          <a:lstStyle/>
+          <a:p>
+            <a:pPr indent="0" marL="0">
+              <a:buNone/>
+            </a:pPr>
+            <a:r>
+              <a:rPr lang="en-US" sz="1300" dirty="0">
+                <a:solidFill>
+                  <a:srgbClr val="1B2A2F"/>
+                </a:solidFill>
+              </a:rPr>
+              <a:t>DB 연결 후에야 8121 개방, 재시도 없음 (B12)</a:t>
+            </a:r>
+            <a:endParaRPr lang="en-US" sz="1300" dirty="0"/>
+          </a:p>
+        </p:txBody>
+      </p:sp>
+      <p:sp>
+        <p:nvSpPr>
+          <p:cNvPr id="13" name="card"/>
+          <p:cNvSpPr/>
+          <p:nvPr/>
+        </p:nvSpPr>
+        <p:spPr>
+          <a:xfrm>
+            <a:off x="8101584" y="1234440"/>
+            <a:ext cx="3611880" cy="2286000"/>
+          </a:xfrm>
+          <a:prstGeom prst="roundRect">
+            <a:avLst>
+              <a:gd name="adj" fmla="val 3200"/>
+            </a:avLst>
+          </a:prstGeom>
+          <a:solidFill>
+            <a:srgbClr val="FFFFFF"/>
+          </a:solidFill>
+          <a:ln w="12700">
+            <a:solidFill>
+              <a:srgbClr val="CBD5D8"/>
+            </a:solidFill>
+            <a:prstDash val="solid"/>
+          </a:ln>
+          <a:effectLst>
+            <a:outerShdw sx="100000" sy="100000" kx="0" ky="0" algn="bl" rotWithShape="0" blurRad="76200" dist="25400" dir="5400000">
+              <a:srgbClr val="000000">
+                <a:alpha val="12000"/>
+              </a:srgbClr>
+            </a:outerShdw>
+          </a:effectLst>
+        </p:spPr>
+      </p:sp>
+      <p:sp>
+        <p:nvSpPr>
+          <p:cNvPr id="14" name="badge"/>
+          <p:cNvSpPr/>
+          <p:nvPr/>
+        </p:nvSpPr>
+        <p:spPr>
+          <a:xfrm>
+            <a:off x="8302752" y="1435608"/>
+            <a:ext cx="457200" cy="457200"/>
+          </a:xfrm>
+          <a:prstGeom prst="ellipse">
+            <a:avLst/>
+          </a:prstGeom>
+          <a:solidFill>
+            <a:srgbClr val="C99A00"/>
+          </a:solidFill>
+          <a:ln w="12700">
+            <a:solidFill>
+              <a:srgbClr val="C99A00"/>
+            </a:solidFill>
+            <a:prstDash val="solid"/>
+          </a:ln>
+        </p:spPr>
+      </p:sp>
+      <p:sp>
+        <p:nvSpPr>
+          <p:cNvPr id="15" name="badge-num"/>
+          <p:cNvSpPr txBox="1"/>
+          <p:nvPr/>
+        </p:nvSpPr>
+        <p:spPr>
+          <a:xfrm>
+            <a:off x="8302752" y="1435608"/>
+            <a:ext cx="457200" cy="457200"/>
+          </a:xfrm>
+          <a:prstGeom prst="rect">
+            <a:avLst/>
+          </a:prstGeom>
+          <a:noFill/>
+          <a:ln/>
+        </p:spPr>
+        <p:txBody>
+          <a:bodyPr wrap="square" lIns="0" tIns="0" rIns="0" bIns="0" rtlCol="0" anchor="ctr"/>
+          <a:lstStyle/>
+          <a:p>
+            <a:pPr algn="ctr" indent="0" marL="0">
+              <a:buNone/>
+            </a:pPr>
+            <a:r>
+              <a:rPr lang="en-US" sz="1500" b="1" dirty="0">
+                <a:solidFill>
+                  <a:srgbClr val="FFFFFF"/>
+                </a:solidFill>
+              </a:rPr>
+              <a:t>3</a:t>
+            </a:r>
+            <a:endParaRPr lang="en-US" sz="1500" dirty="0"/>
+          </a:p>
+        </p:txBody>
+      </p:sp>
+      <p:sp>
+        <p:nvSpPr>
+          <p:cNvPr id="16" name="card-head"/>
+          <p:cNvSpPr txBox="1"/>
+          <p:nvPr/>
+        </p:nvSpPr>
+        <p:spPr>
+          <a:xfrm>
+            <a:off x="8878824" y="1417320"/>
+            <a:ext cx="2651760" cy="502920"/>
+          </a:xfrm>
+          <a:prstGeom prst="rect">
+            <a:avLst/>
+          </a:prstGeom>
+          <a:noFill/>
+          <a:ln/>
+        </p:spPr>
+        <p:txBody>
+          <a:bodyPr wrap="square" lIns="0" tIns="0" rIns="0" bIns="0" rtlCol="0" anchor="ctr"/>
+          <a:lstStyle/>
+          <a:p>
+            <a:pPr indent="0" marL="0">
+              <a:buNone/>
+            </a:pPr>
+            <a:r>
+              <a:rPr lang="en-US" sz="1600" b="1" dirty="0">
+                <a:solidFill>
+                  <a:srgbClr val="1B2A2F"/>
+                </a:solidFill>
+              </a:rPr>
+              <a:t>상태 영속화</a:t>
+            </a:r>
+            <a:endParaRPr lang="en-US" sz="1600" dirty="0"/>
+          </a:p>
+        </p:txBody>
+      </p:sp>
+      <p:sp>
+        <p:nvSpPr>
+          <p:cNvPr id="17" name="card-body"/>
+          <p:cNvSpPr txBox="1"/>
+          <p:nvPr/>
+        </p:nvSpPr>
+        <p:spPr>
+          <a:xfrm>
+            <a:off x="8330184" y="2011680"/>
+            <a:ext cx="3154680" cy="1371600"/>
+          </a:xfrm>
+          <a:prstGeom prst="rect">
+            <a:avLst/>
+          </a:prstGeom>
+          <a:noFill/>
+          <a:ln/>
+        </p:spPr>
+        <p:txBody>
+          <a:bodyPr wrap="square" lIns="0" tIns="0" rIns="0" bIns="0" rtlCol="0" anchor="t"/>
+          <a:lstStyle/>
+          <a:p>
+            <a:pPr indent="0" marL="0">
+              <a:buNone/>
+            </a:pPr>
+            <a:r>
+              <a:rPr lang="en-US" sz="1300" dirty="0">
+                <a:solidFill>
+                  <a:srgbClr val="1B2A2F"/>
+                </a:solidFill>
+              </a:rPr>
+              <a:t>저장/복원 테이블 불일치로 재시작 시 미복원 (B15)</a:t>
+            </a:r>
+            <a:endParaRPr lang="en-US" sz="1300" dirty="0"/>
+          </a:p>
+        </p:txBody>
+      </p:sp>
+      <p:sp>
+        <p:nvSpPr>
+          <p:cNvPr id="18" name="card"/>
+          <p:cNvSpPr/>
+          <p:nvPr/>
+        </p:nvSpPr>
+        <p:spPr>
+          <a:xfrm>
+            <a:off x="457200" y="3749040"/>
+            <a:ext cx="3611880" cy="2286000"/>
+          </a:xfrm>
+          <a:prstGeom prst="roundRect">
+            <a:avLst>
+              <a:gd name="adj" fmla="val 3200"/>
+            </a:avLst>
+          </a:prstGeom>
+          <a:solidFill>
+            <a:srgbClr val="FFFFFF"/>
+          </a:solidFill>
+          <a:ln w="12700">
+            <a:solidFill>
+              <a:srgbClr val="CBD5D8"/>
+            </a:solidFill>
+            <a:prstDash val="solid"/>
+          </a:ln>
+          <a:effectLst>
+            <a:outerShdw sx="100000" sy="100000" kx="0" ky="0" algn="bl" rotWithShape="0" blurRad="76200" dist="25400" dir="5400000">
+              <a:srgbClr val="000000">
+                <a:alpha val="12000"/>
+              </a:srgbClr>
+            </a:outerShdw>
+          </a:effectLst>
+        </p:spPr>
+      </p:sp>
+      <p:sp>
+        <p:nvSpPr>
+          <p:cNvPr id="19" name="badge"/>
+          <p:cNvSpPr/>
+          <p:nvPr/>
+        </p:nvSpPr>
+        <p:spPr>
+          <a:xfrm>
+            <a:off x="658368" y="3950208"/>
+            <a:ext cx="457200" cy="457200"/>
+          </a:xfrm>
+          <a:prstGeom prst="ellipse">
+            <a:avLst/>
+          </a:prstGeom>
+          <a:solidFill>
+            <a:srgbClr val="C99A00"/>
+          </a:solidFill>
+          <a:ln w="12700">
+            <a:solidFill>
+              <a:srgbClr val="C99A00"/>
+            </a:solidFill>
+            <a:prstDash val="solid"/>
+          </a:ln>
+        </p:spPr>
+      </p:sp>
+      <p:sp>
+        <p:nvSpPr>
+          <p:cNvPr id="20" name="badge-num"/>
+          <p:cNvSpPr txBox="1"/>
+          <p:nvPr/>
+        </p:nvSpPr>
+        <p:spPr>
+          <a:xfrm>
+            <a:off x="658368" y="3950208"/>
+            <a:ext cx="457200" cy="457200"/>
+          </a:xfrm>
+          <a:prstGeom prst="rect">
+            <a:avLst/>
+          </a:prstGeom>
+          <a:noFill/>
+          <a:ln/>
+        </p:spPr>
+        <p:txBody>
+          <a:bodyPr wrap="square" lIns="0" tIns="0" rIns="0" bIns="0" rtlCol="0" anchor="ctr"/>
+          <a:lstStyle/>
+          <a:p>
+            <a:pPr algn="ctr" indent="0" marL="0">
+              <a:buNone/>
+            </a:pPr>
+            <a:r>
+              <a:rPr lang="en-US" sz="1500" b="1" dirty="0">
+                <a:solidFill>
+                  <a:srgbClr val="FFFFFF"/>
+                </a:solidFill>
+              </a:rPr>
+              <a:t>4</a:t>
+            </a:r>
+            <a:endParaRPr lang="en-US" sz="1500" dirty="0"/>
+          </a:p>
+        </p:txBody>
+      </p:sp>
+      <p:sp>
+        <p:nvSpPr>
+          <p:cNvPr id="21" name="card-head"/>
+          <p:cNvSpPr txBox="1"/>
+          <p:nvPr/>
+        </p:nvSpPr>
+        <p:spPr>
+          <a:xfrm>
+            <a:off x="1234440" y="3931920"/>
+            <a:ext cx="2651760" cy="502920"/>
+          </a:xfrm>
+          <a:prstGeom prst="rect">
+            <a:avLst/>
+          </a:prstGeom>
+          <a:noFill/>
+          <a:ln/>
+        </p:spPr>
+        <p:txBody>
+          <a:bodyPr wrap="square" lIns="0" tIns="0" rIns="0" bIns="0" rtlCol="0" anchor="ctr"/>
+          <a:lstStyle/>
+          <a:p>
+            <a:pPr indent="0" marL="0">
+              <a:buNone/>
+            </a:pPr>
+            <a:r>
+              <a:rPr lang="en-US" sz="1600" b="1" dirty="0">
+                <a:solidFill>
+                  <a:srgbClr val="1B2A2F"/>
+                </a:solidFill>
+              </a:rPr>
+              <a:t>끊김 표시</a:t>
+            </a:r>
+            <a:endParaRPr lang="en-US" sz="1600" dirty="0"/>
+          </a:p>
+        </p:txBody>
+      </p:sp>
+      <p:sp>
+        <p:nvSpPr>
+          <p:cNvPr id="22" name="card-body"/>
+          <p:cNvSpPr txBox="1"/>
+          <p:nvPr/>
+        </p:nvSpPr>
+        <p:spPr>
+          <a:xfrm>
+            <a:off x="685800" y="4526280"/>
+            <a:ext cx="3154680" cy="1371600"/>
+          </a:xfrm>
+          <a:prstGeom prst="rect">
+            <a:avLst/>
+          </a:prstGeom>
+          <a:noFill/>
+          <a:ln/>
+        </p:spPr>
+        <p:txBody>
+          <a:bodyPr wrap="square" lIns="0" tIns="0" rIns="0" bIns="0" rtlCol="0" anchor="t"/>
+          <a:lstStyle/>
+          <a:p>
+            <a:pPr indent="0" marL="0">
+              <a:buNone/>
+            </a:pPr>
+            <a:r>
+              <a:rPr lang="en-US" sz="1300" dirty="0">
+                <a:solidFill>
+                  <a:srgbClr val="1B2A2F"/>
+                </a:solidFill>
+              </a:rPr>
+              <a:t>수신 시각 판정 없음 → 패치 dock-offline (B17)</a:t>
+            </a:r>
+            <a:endParaRPr lang="en-US" sz="1300" dirty="0"/>
+          </a:p>
+        </p:txBody>
+      </p:sp>
+      <p:sp>
+        <p:nvSpPr>
+          <p:cNvPr id="23" name="card"/>
+          <p:cNvSpPr/>
+          <p:nvPr/>
+        </p:nvSpPr>
+        <p:spPr>
+          <a:xfrm>
+            <a:off x="4279392" y="3749040"/>
+            <a:ext cx="3611880" cy="2286000"/>
+          </a:xfrm>
+          <a:prstGeom prst="roundRect">
+            <a:avLst>
+              <a:gd name="adj" fmla="val 3200"/>
+            </a:avLst>
+          </a:prstGeom>
+          <a:solidFill>
+            <a:srgbClr val="FFFFFF"/>
+          </a:solidFill>
+          <a:ln w="12700">
+            <a:solidFill>
+              <a:srgbClr val="CBD5D8"/>
+            </a:solidFill>
+            <a:prstDash val="solid"/>
+          </a:ln>
+          <a:effectLst>
+            <a:outerShdw sx="100000" sy="100000" kx="0" ky="0" algn="bl" rotWithShape="0" blurRad="76200" dist="25400" dir="5400000">
+              <a:srgbClr val="000000">
+                <a:alpha val="12000"/>
+              </a:srgbClr>
+            </a:outerShdw>
+          </a:effectLst>
+        </p:spPr>
+      </p:sp>
+      <p:sp>
+        <p:nvSpPr>
+          <p:cNvPr id="24" name="badge"/>
+          <p:cNvSpPr/>
+          <p:nvPr/>
+        </p:nvSpPr>
+        <p:spPr>
+          <a:xfrm>
+            <a:off x="4480560" y="3950208"/>
+            <a:ext cx="457200" cy="457200"/>
+          </a:xfrm>
+          <a:prstGeom prst="ellipse">
+            <a:avLst/>
+          </a:prstGeom>
+          <a:solidFill>
+            <a:srgbClr val="B8452F"/>
+          </a:solidFill>
+          <a:ln w="12700">
+            <a:solidFill>
+              <a:srgbClr val="B8452F"/>
+            </a:solidFill>
+            <a:prstDash val="solid"/>
+          </a:ln>
+        </p:spPr>
+      </p:sp>
+      <p:sp>
+        <p:nvSpPr>
+          <p:cNvPr id="25" name="badge-num"/>
+          <p:cNvSpPr txBox="1"/>
+          <p:nvPr/>
+        </p:nvSpPr>
+        <p:spPr>
+          <a:xfrm>
+            <a:off x="4480560" y="3950208"/>
+            <a:ext cx="457200" cy="457200"/>
+          </a:xfrm>
+          <a:prstGeom prst="rect">
+            <a:avLst/>
+          </a:prstGeom>
+          <a:noFill/>
+          <a:ln/>
+        </p:spPr>
+        <p:txBody>
+          <a:bodyPr wrap="square" lIns="0" tIns="0" rIns="0" bIns="0" rtlCol="0" anchor="ctr"/>
+          <a:lstStyle/>
+          <a:p>
+            <a:pPr algn="ctr" indent="0" marL="0">
+              <a:buNone/>
+            </a:pPr>
+            <a:r>
+              <a:rPr lang="en-US" sz="1500" b="1" dirty="0">
+                <a:solidFill>
+                  <a:srgbClr val="FFFFFF"/>
+                </a:solidFill>
+              </a:rPr>
+              <a:t>5</a:t>
+            </a:r>
+            <a:endParaRPr lang="en-US" sz="1500" dirty="0"/>
+          </a:p>
+        </p:txBody>
+      </p:sp>
+      <p:sp>
+        <p:nvSpPr>
+          <p:cNvPr id="26" name="card-head"/>
+          <p:cNvSpPr txBox="1"/>
+          <p:nvPr/>
+        </p:nvSpPr>
+        <p:spPr>
+          <a:xfrm>
+            <a:off x="5056632" y="3931920"/>
+            <a:ext cx="2651760" cy="502920"/>
+          </a:xfrm>
+          <a:prstGeom prst="rect">
+            <a:avLst/>
+          </a:prstGeom>
+          <a:noFill/>
+          <a:ln/>
+        </p:spPr>
+        <p:txBody>
+          <a:bodyPr wrap="square" lIns="0" tIns="0" rIns="0" bIns="0" rtlCol="0" anchor="ctr"/>
+          <a:lstStyle/>
+          <a:p>
+            <a:pPr indent="0" marL="0">
+              <a:buNone/>
+            </a:pPr>
+            <a:r>
+              <a:rPr lang="en-US" sz="1600" b="1" dirty="0">
+                <a:solidFill>
+                  <a:srgbClr val="1B2A2F"/>
+                </a:solidFill>
+              </a:rPr>
+              <a:t>예외 처리</a:t>
+            </a:r>
+            <a:endParaRPr lang="en-US" sz="1600" dirty="0"/>
+          </a:p>
+        </p:txBody>
+      </p:sp>
+      <p:sp>
+        <p:nvSpPr>
+          <p:cNvPr id="27" name="card-body"/>
+          <p:cNvSpPr txBox="1"/>
+          <p:nvPr/>
+        </p:nvSpPr>
+        <p:spPr>
+          <a:xfrm>
+            <a:off x="4507992" y="4526280"/>
+            <a:ext cx="3154680" cy="1371600"/>
+          </a:xfrm>
+          <a:prstGeom prst="rect">
+            <a:avLst/>
+          </a:prstGeom>
+          <a:noFill/>
+          <a:ln/>
+        </p:spPr>
+        <p:txBody>
+          <a:bodyPr wrap="square" lIns="0" tIns="0" rIns="0" bIns="0" rtlCol="0" anchor="t"/>
+          <a:lstStyle/>
+          <a:p>
+            <a:pPr indent="0" marL="0">
+              <a:buNone/>
+            </a:pPr>
+            <a:r>
+              <a:rPr lang="en-US" sz="1300" dirty="0">
+                <a:solidFill>
+                  <a:srgbClr val="1B2A2F"/>
+                </a:solidFill>
+              </a:rPr>
+              <a:t>async void 타이머, 집계 루프 무방비, 빈 catch (B1·B2·B6)</a:t>
+            </a:r>
+            <a:endParaRPr lang="en-US" sz="1300" dirty="0"/>
+          </a:p>
+        </p:txBody>
+      </p:sp>
+      <p:sp>
+        <p:nvSpPr>
+          <p:cNvPr id="28" name="card"/>
+          <p:cNvSpPr/>
+          <p:nvPr/>
+        </p:nvSpPr>
+        <p:spPr>
+          <a:xfrm>
+            <a:off x="8101584" y="3749040"/>
+            <a:ext cx="3611880" cy="2286000"/>
+          </a:xfrm>
+          <a:prstGeom prst="roundRect">
+            <a:avLst>
+              <a:gd name="adj" fmla="val 3200"/>
+            </a:avLst>
+          </a:prstGeom>
+          <a:solidFill>
+            <a:srgbClr val="FFFFFF"/>
+          </a:solidFill>
+          <a:ln w="12700">
+            <a:solidFill>
+              <a:srgbClr val="CBD5D8"/>
+            </a:solidFill>
+            <a:prstDash val="solid"/>
+          </a:ln>
+          <a:effectLst>
+            <a:outerShdw sx="100000" sy="100000" kx="0" ky="0" algn="bl" rotWithShape="0" blurRad="76200" dist="25400" dir="5400000">
+              <a:srgbClr val="000000">
+                <a:alpha val="12000"/>
+              </a:srgbClr>
+            </a:outerShdw>
+          </a:effectLst>
+        </p:spPr>
+      </p:sp>
+      <p:sp>
+        <p:nvSpPr>
+          <p:cNvPr id="29" name="badge"/>
+          <p:cNvSpPr/>
+          <p:nvPr/>
+        </p:nvSpPr>
+        <p:spPr>
+          <a:xfrm>
+            <a:off x="8302752" y="3950208"/>
+            <a:ext cx="457200" cy="457200"/>
+          </a:xfrm>
+          <a:prstGeom prst="ellipse">
+            <a:avLst/>
+          </a:prstGeom>
+          <a:solidFill>
+            <a:srgbClr val="C99A00"/>
+          </a:solidFill>
+          <a:ln w="12700">
+            <a:solidFill>
+              <a:srgbClr val="C99A00"/>
+            </a:solidFill>
+            <a:prstDash val="solid"/>
+          </a:ln>
+        </p:spPr>
+      </p:sp>
+      <p:sp>
+        <p:nvSpPr>
+          <p:cNvPr id="30" name="badge-num"/>
+          <p:cNvSpPr txBox="1"/>
+          <p:nvPr/>
+        </p:nvSpPr>
+        <p:spPr>
+          <a:xfrm>
+            <a:off x="8302752" y="3950208"/>
+            <a:ext cx="457200" cy="457200"/>
+          </a:xfrm>
+          <a:prstGeom prst="rect">
+            <a:avLst/>
+          </a:prstGeom>
+          <a:noFill/>
+          <a:ln/>
+        </p:spPr>
+        <p:txBody>
+          <a:bodyPr wrap="square" lIns="0" tIns="0" rIns="0" bIns="0" rtlCol="0" anchor="ctr"/>
+          <a:lstStyle/>
+          <a:p>
+            <a:pPr algn="ctr" indent="0" marL="0">
+              <a:buNone/>
+            </a:pPr>
+            <a:r>
+              <a:rPr lang="en-US" sz="1500" b="1" dirty="0">
+                <a:solidFill>
+                  <a:srgbClr val="FFFFFF"/>
+                </a:solidFill>
+              </a:rPr>
+              <a:t>6</a:t>
+            </a:r>
+            <a:endParaRPr lang="en-US" sz="1500" dirty="0"/>
+          </a:p>
+        </p:txBody>
+      </p:sp>
+      <p:sp>
+        <p:nvSpPr>
+          <p:cNvPr id="31" name="card-head"/>
+          <p:cNvSpPr txBox="1"/>
+          <p:nvPr/>
+        </p:nvSpPr>
+        <p:spPr>
+          <a:xfrm>
+            <a:off x="8878824" y="3931920"/>
+            <a:ext cx="2651760" cy="502920"/>
+          </a:xfrm>
+          <a:prstGeom prst="rect">
+            <a:avLst/>
+          </a:prstGeom>
+          <a:noFill/>
+          <a:ln/>
+        </p:spPr>
+        <p:txBody>
+          <a:bodyPr wrap="square" lIns="0" tIns="0" rIns="0" bIns="0" rtlCol="0" anchor="ctr"/>
+          <a:lstStyle/>
+          <a:p>
+            <a:pPr indent="0" marL="0">
+              <a:buNone/>
+            </a:pPr>
+            <a:r>
+              <a:rPr lang="en-US" sz="1600" b="1" dirty="0">
+                <a:solidFill>
+                  <a:srgbClr val="1B2A2F"/>
+                </a:solidFill>
+              </a:rPr>
+              <a:t>동시성</a:t>
+            </a:r>
+            <a:endParaRPr lang="en-US" sz="1600" dirty="0"/>
+          </a:p>
+        </p:txBody>
+      </p:sp>
+      <p:sp>
+        <p:nvSpPr>
+          <p:cNvPr id="32" name="card-body"/>
+          <p:cNvSpPr txBox="1"/>
+          <p:nvPr/>
+        </p:nvSpPr>
+        <p:spPr>
+          <a:xfrm>
+            <a:off x="8330184" y="4526280"/>
+            <a:ext cx="3154680" cy="1371600"/>
+          </a:xfrm>
+          <a:prstGeom prst="rect">
+            <a:avLst/>
+          </a:prstGeom>
+          <a:noFill/>
+          <a:ln/>
+        </p:spPr>
+        <p:txBody>
+          <a:bodyPr wrap="square" lIns="0" tIns="0" rIns="0" bIns="0" rtlCol="0" anchor="t"/>
+          <a:lstStyle/>
+          <a:p>
+            <a:pPr indent="0" marL="0">
+              <a:buNone/>
+            </a:pPr>
+            <a:r>
+              <a:rPr lang="en-US" sz="1300" dirty="0">
+                <a:solidFill>
+                  <a:srgbClr val="1B2A2F"/>
+                </a:solidFill>
+              </a:rPr>
+              <a:t>내부 가변 객체 반환, Default 공유 객체 수정 (B3·B10)</a:t>
+            </a:r>
+            <a:endParaRPr lang="en-US" sz="1300" dirty="0"/>
+          </a:p>
+        </p:txBody>
+      </p:sp>
+      <p:sp>
+        <p:nvSpPr>
+          <p:cNvPr id="25" name="Slide Number Placeholder 0"/>
+          <p:cNvSpPr>
+            <a:spLocks noGrp="1"/>
+          </p:cNvSpPr>
+          <p:nvPr>
+            <p:ph type="sldNum" sz="quarter" idx="4294967295"/>
+          </p:nvPr>
+        </p:nvSpPr>
+        <p:spPr>
+          <a:xfrm>
+            <a:off x="11247120" y="6446520"/>
+            <a:ext cx="548640" cy="274320"/>
+          </a:xfrm>
+          <a:prstGeom prst="rect">
+            <a:avLst/>
+          </a:prstGeom>
+          <a:extLst>
+            <a:ext uri="{C572A759-6A51-4108-AA02-DFA0A04FC94B}">
+              <ma14:wrappingTextBoxFlag xmlns:ma14="http://schemas.microsoft.com/office/mac/drawingml/2011/main" val="0"/>
+            </a:ext>
+          </a:extLst>
+        </p:spPr>
+        <p:txBody>
+          <a:bodyPr/>
+          <a:lstStyle>
+            <a:lvl1pPr>
+              <a:defRPr sz="1000">
+                <a:solidFill>
+                  <a:srgbClr val="5B6B70"/>
+                </a:solidFill>
+              </a:defRPr>
+            </a:lvl1pPr>
+          </a:lstStyle>
+          <a:p>
+            <a:pPr algn="r"/>
+            <a:fld id="{F7021451-1387-4CA6-816F-3879F97B5CBC}" type="slidenum">
+              <a:rPr b="0" lang="en-US"/>
+              <a:t>22</a:t>
+            </a:fld>
+            <a:endParaRPr lang="en-US"/>
+          </a:p>
+        </p:txBody>
+      </p:sp>
+    </p:spTree>
+  </p:cSld>
+  <p:clrMapOvr>
+    <a:masterClrMapping/>
+  </p:clrMapOvr>
+</p:sld>
+</file>
+
+<file path=ppt/slides/slide23.xml><?xml version="1.0" encoding="utf-8"?>
+<p:sld xmlns:a="http://schemas.openxmlformats.org/drawingml/2006/main" xmlns:r="http://schemas.openxmlformats.org/officeDocument/2006/relationships" xmlns:p="http://schemas.openxmlformats.org/presentationml/2006/main">
+  <p:cSld name="Slide 23">
+    <p:spTree>
+      <p:nvGrpSpPr>
+        <p:cNvPr id="1" name=""/>
+        <p:cNvGrpSpPr/>
+        <p:nvPr/>
+      </p:nvGrpSpPr>
+      <p:grpSpPr>
+        <a:xfrm>
+          <a:off x="0" y="0"/>
+          <a:ext cx="0" cy="0"/>
+          <a:chOff x="0" y="0"/>
+          <a:chExt cx="0" cy="0"/>
+        </a:xfrm>
+      </p:grpSpPr>
+      <p:sp>
+        <p:nvSpPr>
+          <p:cNvPr id="2" name="Text 0"/>
+          <p:cNvSpPr/>
+          <p:nvPr>
+            <p:ph idx="100" type="title" hasCustomPrompt="1"/>
+          </p:nvPr>
+        </p:nvSpPr>
+        <p:spPr>
+          <a:xfrm>
+            <a:off x="457200" y="274320"/>
+            <a:ext cx="11247120" cy="731520"/>
+          </a:xfrm>
+          <a:prstGeom prst="rect">
+            <a:avLst/>
+          </a:prstGeom>
+          <a:noFill/>
+          <a:ln/>
+        </p:spPr>
+        <p:txBody>
+          <a:bodyPr wrap="square" lIns="0" tIns="0" rIns="0" bIns="0" rtlCol="0" anchor="ctr"/>
+          <a:lstStyle/>
+          <a:p>
+            <a:pPr indent="0" marL="0">
+              <a:buNone/>
+            </a:pPr>
+            <a:r>
+              <a:rPr lang="en-US" sz="3000" b="1" dirty="0">
+                <a:solidFill>
+                  <a:schemeClr val="tx2"/>
+                </a:solidFill>
+              </a:rPr>
+              <a:t>권장 조치 순서</a:t>
+            </a:r>
+            <a:endParaRPr lang="en-US" sz="3000" dirty="0"/>
+          </a:p>
+        </p:txBody>
+      </p:sp>
+      <p:sp>
+        <p:nvSpPr>
+          <p:cNvPr id="3" name="step-head"/>
+          <p:cNvSpPr/>
+          <p:nvPr/>
+        </p:nvSpPr>
+        <p:spPr>
+          <a:xfrm>
+            <a:off x="457200" y="1828800"/>
+            <a:ext cx="2606040" cy="685800"/>
+          </a:xfrm>
+          <a:prstGeom prst="roundRect">
+            <a:avLst>
+              <a:gd name="adj" fmla="val 13333"/>
+            </a:avLst>
+          </a:prstGeom>
+          <a:solidFill>
+            <a:srgbClr val="B8452F"/>
+          </a:solidFill>
+          <a:ln w="12700">
+            <a:solidFill>
+              <a:srgbClr val="B8452F"/>
+            </a:solidFill>
+            <a:prstDash val="solid"/>
+          </a:ln>
+        </p:spPr>
+      </p:sp>
+      <p:sp>
+        <p:nvSpPr>
           <p:cNvPr id="4" name="step-label"/>
           <p:cNvSpPr txBox="1"/>
           <p:nvPr/>
@@ -10331,7 +10820,7 @@
             <a:pPr algn="r"/>
             <a:fld id="{F7021451-1387-4CA6-816F-3879F97B5CBC}" type="slidenum">
               <a:rPr b="0" lang="en-US"/>
-              <a:t>22</a:t>
+              <a:t>23</a:t>
             </a:fld>
             <a:endParaRPr lang="en-US"/>
           </a:p>
